--- a/docs/slide.pptx
+++ b/docs/slide.pptx
@@ -4,6 +4,9 @@
   <p:sldMasterIdLst>
     <p:sldMasterId id="2147483648" r:id="rId1"/>
   </p:sldMasterIdLst>
+  <p:notesMasterIdLst>
+    <p:notesMasterId r:id="rId19"/>
+  </p:notesMasterIdLst>
   <p:sldIdLst>
     <p:sldId id="256" r:id="rId2"/>
     <p:sldId id="257" r:id="rId3"/>
@@ -23,11 +26,8 @@
     <p:sldId id="271" r:id="rId17"/>
     <p:sldId id="272" r:id="rId18"/>
   </p:sldIdLst>
-  <p:notesMasterIdLst>
-    <p:notesMasterId r:id="rId19"/>
-  </p:notesMasterIdLst>
-  <p:sldSz cx="12191695" cy="6858000"/>
-  <p:notesSz cx="6858000" cy="12191695"/>
+  <p:sldSz cx="12192000" cy="6858000"/>
+  <p:notesSz cx="6858000" cy="12192000"/>
   <p:defaultTextStyle>
     <a:lvl1pPr marL="0" algn="l" defTabSz="914400" rtl="0" eaLnBrk="1" latinLnBrk="0" hangingPunct="1">
       <a:defRPr sz="1800" kern="1200">
@@ -120,6 +120,11 @@
       </a:defRPr>
     </a:lvl9pPr>
   </p:defaultTextStyle>
+  <p:extLst>
+    <p:ext uri="{EFAFB233-063F-42B5-8137-9DF3F51BA10A}">
+      <p15:sldGuideLst xmlns:p15="http://schemas.microsoft.com/office/powerpoint/2012/main"/>
+    </p:ext>
+  </p:extLst>
 </p:presentation>
 </file>
 
@@ -145,234 +150,10 @@
           <a:chExt cx="0" cy="0"/>
         </a:xfrm>
       </p:grpSpPr>
-      <p:sp>
-        <p:nvSpPr>
-          <p:cNvPr id="2" name="Header Placeholder 1"/>
-          <p:cNvSpPr>
-            <a:spLocks noGrp="1"/>
-          </p:cNvSpPr>
-          <p:nvPr>
-            <p:ph type="hdr" sz="quarter"/>
-          </p:nvPr>
-        </p:nvSpPr>
-        <p:spPr>
-          <a:xfrm>
-            <a:off x="0" y="0"/>
-            <a:ext cx="2971800" cy="458788"/>
-          </a:xfrm>
-          <a:prstGeom prst="rect">
-            <a:avLst/>
-          </a:prstGeom>
-        </p:spPr>
-        <p:txBody>
-          <a:bodyPr vert="horz" lIns="91440" tIns="45720" rIns="91440" bIns="45720" rtlCol="0"/>
-          <a:lstStyle>
-            <a:lvl1pPr algn="l">
-              <a:defRPr sz="1200"/>
-            </a:lvl1pPr>
-          </a:lstStyle>
-          <a:p>
-            <a:endParaRPr lang="en-US"/>
-          </a:p>
-        </p:txBody>
-      </p:sp>
-      <p:sp>
-        <p:nvSpPr>
-          <p:cNvPr id="3" name="Date Placeholder 2"/>
-          <p:cNvSpPr>
-            <a:spLocks noGrp="1"/>
-          </p:cNvSpPr>
-          <p:nvPr>
-            <p:ph type="dt" idx="1"/>
-          </p:nvPr>
-        </p:nvSpPr>
-        <p:spPr>
-          <a:xfrm>
-            <a:off x="3884613" y="0"/>
-            <a:ext cx="2971800" cy="458788"/>
-          </a:xfrm>
-          <a:prstGeom prst="rect">
-            <a:avLst/>
-          </a:prstGeom>
-        </p:spPr>
-        <p:txBody>
-          <a:bodyPr vert="horz" lIns="91440" tIns="45720" rIns="91440" bIns="45720" rtlCol="0"/>
-          <a:lstStyle>
-            <a:lvl1pPr algn="r">
-              <a:defRPr sz="1200"/>
-            </a:lvl1pPr>
-          </a:lstStyle>
-          <a:p>
-            <a:fld id="{5282F153-3F37-0F45-9E97-73ACFA13230C}" type="datetimeFigureOut">
-              <a:rPr lang="en-US"/>
-              <a:t>7/23/19</a:t>
-            </a:fld>
-            <a:endParaRPr lang="en-US"/>
-          </a:p>
-        </p:txBody>
-      </p:sp>
-      <p:sp>
-        <p:nvSpPr>
-          <p:cNvPr id="4" name="Slide Image Placeholder 3"/>
-          <p:cNvSpPr>
-            <a:spLocks noGrp="1" noRot="1" noChangeAspect="1"/>
-          </p:cNvSpPr>
-          <p:nvPr>
-            <p:ph type="sldImg" idx="2"/>
-          </p:nvPr>
-        </p:nvSpPr>
-        <p:spPr>
-          <a:xfrm>
-            <a:off x="685800" y="1143000"/>
-            <a:ext cx="5486400" cy="3086100"/>
-          </a:xfrm>
-          <a:prstGeom prst="rect">
-            <a:avLst/>
-          </a:prstGeom>
-          <a:noFill/>
-          <a:ln w="12700">
-            <a:solidFill>
-              <a:prstClr val="black"/>
-            </a:solidFill>
-          </a:ln>
-        </p:spPr>
-        <p:txBody>
-          <a:bodyPr vert="horz" lIns="91440" tIns="45720" rIns="91440" bIns="45720" rtlCol="0" anchor="ctr"/>
-          <a:lstStyle/>
-          <a:p>
-            <a:endParaRPr lang="en-US"/>
-          </a:p>
-        </p:txBody>
-      </p:sp>
-      <p:sp>
-        <p:nvSpPr>
-          <p:cNvPr id="5" name="Notes Placeholder 4"/>
-          <p:cNvSpPr>
-            <a:spLocks noGrp="1"/>
-          </p:cNvSpPr>
-          <p:nvPr>
-            <p:ph type="body" sz="quarter" idx="3"/>
-          </p:nvPr>
-        </p:nvSpPr>
-        <p:spPr>
-          <a:xfrm>
-            <a:off x="685800" y="4400550"/>
-            <a:ext cx="5486400" cy="3600450"/>
-          </a:xfrm>
-          <a:prstGeom prst="rect">
-            <a:avLst/>
-          </a:prstGeom>
-        </p:spPr>
-        <p:txBody>
-          <a:bodyPr vert="horz" lIns="91440" tIns="45720" rIns="91440" bIns="45720" rtlCol="0"/>
-          <a:lstStyle/>
-          <a:p>
-            <a:pPr lvl="0"/>
-            <a:r>
-              <a:rPr lang="en-US"/>
-              <a:t>Click to edit Master text styles</a:t>
-            </a:r>
-          </a:p>
-          <a:p>
-            <a:pPr lvl="1"/>
-            <a:r>
-              <a:rPr lang="en-US"/>
-              <a:t>Second level</a:t>
-            </a:r>
-          </a:p>
-          <a:p>
-            <a:pPr lvl="2"/>
-            <a:r>
-              <a:rPr lang="en-US"/>
-              <a:t>Third level</a:t>
-            </a:r>
-          </a:p>
-          <a:p>
-            <a:pPr lvl="3"/>
-            <a:r>
-              <a:rPr lang="en-US"/>
-              <a:t>Fourth level</a:t>
-            </a:r>
-          </a:p>
-          <a:p>
-            <a:pPr lvl="4"/>
-            <a:r>
-              <a:rPr lang="en-US"/>
-              <a:t>Fifth level</a:t>
-            </a:r>
-          </a:p>
-        </p:txBody>
-      </p:sp>
-      <p:sp>
-        <p:nvSpPr>
-          <p:cNvPr id="6" name="Footer Placeholder 5"/>
-          <p:cNvSpPr>
-            <a:spLocks noGrp="1"/>
-          </p:cNvSpPr>
-          <p:nvPr>
-            <p:ph type="ftr" sz="quarter" idx="4"/>
-          </p:nvPr>
-        </p:nvSpPr>
-        <p:spPr>
-          <a:xfrm>
-            <a:off x="0" y="8685213"/>
-            <a:ext cx="2971800" cy="458787"/>
-          </a:xfrm>
-          <a:prstGeom prst="rect">
-            <a:avLst/>
-          </a:prstGeom>
-        </p:spPr>
-        <p:txBody>
-          <a:bodyPr vert="horz" lIns="91440" tIns="45720" rIns="91440" bIns="45720" rtlCol="0" anchor="b"/>
-          <a:lstStyle>
-            <a:lvl1pPr algn="l">
-              <a:defRPr sz="1200"/>
-            </a:lvl1pPr>
-          </a:lstStyle>
-          <a:p>
-            <a:endParaRPr lang="en-US"/>
-          </a:p>
-        </p:txBody>
-      </p:sp>
-      <p:sp>
-        <p:nvSpPr>
-          <p:cNvPr id="7" name="Slide Number Placeholder 6"/>
-          <p:cNvSpPr>
-            <a:spLocks noGrp="1"/>
-          </p:cNvSpPr>
-          <p:nvPr>
-            <p:ph type="sldNum" sz="quarter" idx="5"/>
-          </p:nvPr>
-        </p:nvSpPr>
-        <p:spPr>
-          <a:xfrm>
-            <a:off x="3884613" y="8685213"/>
-            <a:ext cx="2971800" cy="458787"/>
-          </a:xfrm>
-          <a:prstGeom prst="rect">
-            <a:avLst/>
-          </a:prstGeom>
-        </p:spPr>
-        <p:txBody>
-          <a:bodyPr vert="horz" lIns="91440" tIns="45720" rIns="91440" bIns="45720" rtlCol="0" anchor="b"/>
-          <a:lstStyle>
-            <a:lvl1pPr algn="r">
-              <a:defRPr sz="1200"/>
-            </a:lvl1pPr>
-          </a:lstStyle>
-          <a:p>
-            <a:fld id="{CE5E9CC1-C706-0F49-92D6-E571CC5EEA8F}" type="slidenum">
-              <a:rPr lang="en-US"/>
-              <a:t>‹#›</a:t>
-            </a:fld>
-            <a:endParaRPr lang="en-US"/>
-          </a:p>
-        </p:txBody>
-      </p:sp>
     </p:spTree>
     <p:extLst>
       <p:ext uri="{BB962C8B-B14F-4D97-AF65-F5344CB8AC3E}">
-        <p14:creationId xmlns:p14="http://schemas.microsoft.com/office/powerpoint/2010/main" val="1024086991"/>
+        <p14:creationId xmlns:p14="http://schemas.microsoft.com/office/powerpoint/2010/main" val="3447340782"/>
       </p:ext>
     </p:extLst>
   </p:cSld>
@@ -516,10 +297,6 @@
           <a:bodyPr/>
           <a:lstStyle/>
           <a:p>
-            <a:r>
-              <a:rPr lang="en-US" dirty="0"/>
-              <a:t/>
-            </a:r>
             <a:endParaRPr lang="en-US" dirty="0"/>
           </a:p>
         </p:txBody>
@@ -604,10 +381,6 @@
           <a:bodyPr/>
           <a:lstStyle/>
           <a:p>
-            <a:r>
-              <a:rPr lang="en-US" dirty="0"/>
-              <a:t/>
-            </a:r>
             <a:endParaRPr lang="en-US" dirty="0"/>
           </a:p>
         </p:txBody>
@@ -692,10 +465,6 @@
           <a:bodyPr/>
           <a:lstStyle/>
           <a:p>
-            <a:r>
-              <a:rPr lang="en-US" dirty="0"/>
-              <a:t/>
-            </a:r>
             <a:endParaRPr lang="en-US" dirty="0"/>
           </a:p>
         </p:txBody>
@@ -780,10 +549,6 @@
           <a:bodyPr/>
           <a:lstStyle/>
           <a:p>
-            <a:r>
-              <a:rPr lang="en-US" dirty="0"/>
-              <a:t/>
-            </a:r>
             <a:endParaRPr lang="en-US" dirty="0"/>
           </a:p>
         </p:txBody>
@@ -868,10 +633,6 @@
           <a:bodyPr/>
           <a:lstStyle/>
           <a:p>
-            <a:r>
-              <a:rPr lang="en-US" dirty="0"/>
-              <a:t/>
-            </a:r>
             <a:endParaRPr lang="en-US" dirty="0"/>
           </a:p>
         </p:txBody>
@@ -956,10 +717,6 @@
           <a:bodyPr/>
           <a:lstStyle/>
           <a:p>
-            <a:r>
-              <a:rPr lang="en-US" dirty="0"/>
-              <a:t/>
-            </a:r>
             <a:endParaRPr lang="en-US" dirty="0"/>
           </a:p>
         </p:txBody>
@@ -1044,10 +801,6 @@
           <a:bodyPr/>
           <a:lstStyle/>
           <a:p>
-            <a:r>
-              <a:rPr lang="en-US" dirty="0"/>
-              <a:t/>
-            </a:r>
             <a:endParaRPr lang="en-US" dirty="0"/>
           </a:p>
         </p:txBody>
@@ -1132,10 +885,6 @@
           <a:bodyPr/>
           <a:lstStyle/>
           <a:p>
-            <a:r>
-              <a:rPr lang="en-US" dirty="0"/>
-              <a:t/>
-            </a:r>
             <a:endParaRPr lang="en-US" dirty="0"/>
           </a:p>
         </p:txBody>
@@ -1220,10 +969,6 @@
           <a:bodyPr/>
           <a:lstStyle/>
           <a:p>
-            <a:r>
-              <a:rPr lang="en-US" dirty="0"/>
-              <a:t/>
-            </a:r>
             <a:endParaRPr lang="en-US" dirty="0"/>
           </a:p>
         </p:txBody>
@@ -1308,10 +1053,6 @@
           <a:bodyPr/>
           <a:lstStyle/>
           <a:p>
-            <a:r>
-              <a:rPr lang="en-US" dirty="0"/>
-              <a:t/>
-            </a:r>
             <a:endParaRPr lang="en-US" dirty="0"/>
           </a:p>
         </p:txBody>
@@ -1396,10 +1137,6 @@
           <a:bodyPr/>
           <a:lstStyle/>
           <a:p>
-            <a:r>
-              <a:rPr lang="en-US" dirty="0"/>
-              <a:t/>
-            </a:r>
             <a:endParaRPr lang="en-US" dirty="0"/>
           </a:p>
         </p:txBody>
@@ -1484,10 +1221,6 @@
           <a:bodyPr/>
           <a:lstStyle/>
           <a:p>
-            <a:r>
-              <a:rPr lang="en-US" dirty="0"/>
-              <a:t/>
-            </a:r>
             <a:endParaRPr lang="en-US" dirty="0"/>
           </a:p>
         </p:txBody>
@@ -1572,10 +1305,6 @@
           <a:bodyPr/>
           <a:lstStyle/>
           <a:p>
-            <a:r>
-              <a:rPr lang="en-US" dirty="0"/>
-              <a:t/>
-            </a:r>
             <a:endParaRPr lang="en-US" dirty="0"/>
           </a:p>
         </p:txBody>
@@ -1660,10 +1389,6 @@
           <a:bodyPr/>
           <a:lstStyle/>
           <a:p>
-            <a:r>
-              <a:rPr lang="en-US" dirty="0"/>
-              <a:t/>
-            </a:r>
             <a:endParaRPr lang="en-US" dirty="0"/>
           </a:p>
         </p:txBody>
@@ -1748,10 +1473,6 @@
           <a:bodyPr/>
           <a:lstStyle/>
           <a:p>
-            <a:r>
-              <a:rPr lang="en-US" dirty="0"/>
-              <a:t/>
-            </a:r>
             <a:endParaRPr lang="en-US" dirty="0"/>
           </a:p>
         </p:txBody>
@@ -1836,10 +1557,6 @@
           <a:bodyPr/>
           <a:lstStyle/>
           <a:p>
-            <a:r>
-              <a:rPr lang="en-US" dirty="0"/>
-              <a:t/>
-            </a:r>
             <a:endParaRPr lang="en-US" dirty="0"/>
           </a:p>
         </p:txBody>
@@ -1924,10 +1641,6 @@
           <a:bodyPr/>
           <a:lstStyle/>
           <a:p>
-            <a:r>
-              <a:rPr lang="en-US" dirty="0"/>
-              <a:t/>
-            </a:r>
             <a:endParaRPr lang="en-US" dirty="0"/>
           </a:p>
         </p:txBody>
@@ -2001,6 +1714,11 @@
 <file path=ppt/slideMasters/slideMaster1.xml><?xml version="1.0" encoding="utf-8"?>
 <p:sldMaster xmlns:a="http://schemas.openxmlformats.org/drawingml/2006/main" xmlns:r="http://schemas.openxmlformats.org/officeDocument/2006/relationships" xmlns:p="http://schemas.openxmlformats.org/presentationml/2006/main">
   <p:cSld>
+    <p:bg>
+      <p:bgRef idx="1001">
+        <a:schemeClr val="bg1"/>
+      </p:bgRef>
+    </p:bg>
     <p:spTree>
       <p:nvGrpSpPr>
         <p:cNvPr id="1" name=""/>
@@ -2334,14 +2052,14 @@
       </p:sp>
       <p:pic>
         <p:nvPicPr>
-          <p:cNvPr id="4" name="Image 0" descr="/home/workdir/artifacts/media/hero.png">    </p:cNvPr>
+          <p:cNvPr id="4" name="Image 0" descr="/home/workdir/artifacts/media/hero.png"/>
           <p:cNvPicPr>
             <a:picLocks noChangeAspect="1"/>
           </p:cNvPicPr>
           <p:nvPr/>
         </p:nvPicPr>
         <p:blipFill>
-          <a:blip r:embed="rId1"/>
+          <a:blip r:embed="rId3"/>
           <a:stretch>
             <a:fillRect/>
           </a:stretch>
@@ -2397,11 +2115,11 @@
           <a:bodyPr wrap="square" lIns="0" tIns="0" rIns="0" bIns="0" rtlCol="0" anchor="ctr"/>
           <a:lstStyle/>
           <a:p>
-            <a:pPr indent="0" marL="0">
-              <a:buNone/>
-            </a:pPr>
-            <a:r>
-              <a:rPr lang="en-US" sz="1200" b="1" spc="110" kern="0" dirty="0">
+            <a:pPr marL="0" indent="0">
+              <a:buNone/>
+            </a:pPr>
+            <a:r>
+              <a:rPr lang="en-US" sz="1200" b="1" kern="0" spc="110" dirty="0">
                 <a:solidFill>
                   <a:srgbClr val="6FCFC0"/>
                 </a:solidFill>
@@ -2436,7 +2154,7 @@
           <a:bodyPr wrap="square" lIns="0" tIns="0" rIns="0" bIns="0" rtlCol="0" anchor="ctr"/>
           <a:lstStyle/>
           <a:p>
-            <a:pPr indent="0" marL="0">
+            <a:pPr marL="0" indent="0">
               <a:buNone/>
             </a:pPr>
             <a:r>
@@ -2453,7 +2171,7 @@
             <a:endParaRPr lang="en-US" sz="3600" dirty="0"/>
           </a:p>
           <a:p>
-            <a:pPr indent="0" marL="0">
+            <a:pPr marL="0" indent="0">
               <a:buNone/>
             </a:pPr>
             <a:r>
@@ -2492,7 +2210,7 @@
           <a:bodyPr wrap="square" lIns="0" tIns="0" rIns="0" bIns="0" rtlCol="0" anchor="ctr"/>
           <a:lstStyle/>
           <a:p>
-            <a:pPr indent="0" marL="0">
+            <a:pPr marL="0" indent="0">
               <a:buNone/>
             </a:pPr>
             <a:r>
@@ -2531,7 +2249,7 @@
           <a:bodyPr wrap="square" lIns="0" tIns="0" rIns="0" bIns="0" rtlCol="0" anchor="ctr"/>
           <a:lstStyle/>
           <a:p>
-            <a:pPr indent="0" marL="0">
+            <a:pPr marL="0" indent="0">
               <a:buNone/>
             </a:pPr>
             <a:r>
@@ -2548,7 +2266,7 @@
             <a:endParaRPr lang="en-US" sz="1300" dirty="0"/>
           </a:p>
           <a:p>
-            <a:pPr indent="0" marL="0">
+            <a:pPr marL="0" indent="0">
               <a:buNone/>
             </a:pPr>
             <a:r>
@@ -2587,7 +2305,7 @@
           <a:bodyPr wrap="square" lIns="0" tIns="0" rIns="0" bIns="0" rtlCol="0" anchor="ctr"/>
           <a:lstStyle/>
           <a:p>
-            <a:pPr indent="0" marL="0">
+            <a:pPr marL="0" indent="0">
               <a:buNone/>
             </a:pPr>
             <a:r>
@@ -2626,7 +2344,7 @@
           <a:bodyPr wrap="square" lIns="0" tIns="0" rIns="0" bIns="0" rtlCol="0" anchor="ctr"/>
           <a:lstStyle/>
           <a:p>
-            <a:pPr algn="r" indent="0" marL="0">
+            <a:pPr marL="0" indent="0" algn="r">
               <a:buNone/>
             </a:pPr>
             <a:r>
@@ -2710,11 +2428,11 @@
           <a:bodyPr wrap="square" lIns="0" tIns="0" rIns="0" bIns="0" rtlCol="0" anchor="ctr"/>
           <a:lstStyle/>
           <a:p>
-            <a:pPr indent="0" marL="0">
-              <a:buNone/>
-            </a:pPr>
-            <a:r>
-              <a:rPr lang="en-US" sz="1100" b="1" spc="60" kern="0" dirty="0">
+            <a:pPr marL="0" indent="0">
+              <a:buNone/>
+            </a:pPr>
+            <a:r>
+              <a:rPr lang="en-US" sz="1100" b="1" kern="0" spc="60" dirty="0">
                 <a:solidFill>
                   <a:srgbClr val="6FCFC0"/>
                 </a:solidFill>
@@ -2749,7 +2467,7 @@
           <a:bodyPr wrap="square" lIns="0" tIns="0" rIns="0" bIns="0" rtlCol="0" anchor="ctr"/>
           <a:lstStyle/>
           <a:p>
-            <a:pPr indent="0" marL="0">
+            <a:pPr marL="0" indent="0">
               <a:buNone/>
             </a:pPr>
             <a:r>
@@ -2769,14 +2487,14 @@
       </p:sp>
       <p:pic>
         <p:nvPicPr>
-          <p:cNvPr id="5" name="Image 0" descr="/home/workdir/artifacts/figures/09_train_test.png">    </p:cNvPr>
+          <p:cNvPr id="5" name="Image 0" descr="/home/workdir/artifacts/figures/09_train_test.png"/>
           <p:cNvPicPr>
             <a:picLocks noChangeAspect="1"/>
           </p:cNvPicPr>
           <p:nvPr/>
         </p:nvPicPr>
         <p:blipFill>
-          <a:blip r:embed="rId1"/>
+          <a:blip r:embed="rId3"/>
           <a:stretch>
             <a:fillRect/>
           </a:stretch>
@@ -2812,7 +2530,7 @@
           <a:bodyPr wrap="square" lIns="0" tIns="0" rIns="0" bIns="0" rtlCol="0" anchor="ctr"/>
           <a:lstStyle/>
           <a:p>
-            <a:pPr indent="0" marL="0">
+            <a:pPr marL="0" indent="0">
               <a:buNone/>
             </a:pPr>
             <a:r>
@@ -2851,7 +2569,7 @@
           <a:bodyPr wrap="square" lIns="0" tIns="0" rIns="0" bIns="0" rtlCol="0" anchor="ctr"/>
           <a:lstStyle/>
           <a:p>
-            <a:pPr indent="0" marL="0">
+            <a:pPr marL="0" indent="0">
               <a:buNone/>
             </a:pPr>
             <a:r>
@@ -2890,7 +2608,7 @@
           <a:bodyPr wrap="square" lIns="0" tIns="0" rIns="0" bIns="0" rtlCol="0" anchor="ctr"/>
           <a:lstStyle/>
           <a:p>
-            <a:pPr indent="0" marL="0">
+            <a:pPr marL="0" indent="0">
               <a:buNone/>
             </a:pPr>
             <a:r>
@@ -2951,7 +2669,7 @@
           <a:bodyPr wrap="square" lIns="0" tIns="0" rIns="0" bIns="0" rtlCol="0" anchor="ctr"/>
           <a:lstStyle/>
           <a:p>
-            <a:pPr indent="0" marL="0">
+            <a:pPr marL="0" indent="0">
               <a:buNone/>
             </a:pPr>
             <a:r>
@@ -2990,7 +2708,7 @@
           <a:bodyPr wrap="square" lIns="0" tIns="0" rIns="0" bIns="0" rtlCol="0" anchor="ctr"/>
           <a:lstStyle/>
           <a:p>
-            <a:pPr indent="0" marL="0">
+            <a:pPr marL="0" indent="0">
               <a:buNone/>
             </a:pPr>
             <a:r>
@@ -3051,7 +2769,7 @@
           <a:bodyPr wrap="square" lIns="0" tIns="0" rIns="0" bIns="0" rtlCol="0" anchor="ctr"/>
           <a:lstStyle/>
           <a:p>
-            <a:pPr indent="0" marL="0">
+            <a:pPr marL="0" indent="0">
               <a:buNone/>
             </a:pPr>
             <a:r>
@@ -3090,7 +2808,7 @@
           <a:bodyPr wrap="square" lIns="0" tIns="0" rIns="0" bIns="0" rtlCol="0" anchor="ctr"/>
           <a:lstStyle/>
           <a:p>
-            <a:pPr indent="0" marL="0">
+            <a:pPr marL="0" indent="0">
               <a:buNone/>
             </a:pPr>
             <a:r>
@@ -3151,7 +2869,7 @@
           <a:bodyPr wrap="square" lIns="0" tIns="0" rIns="0" bIns="0" rtlCol="0" anchor="ctr"/>
           <a:lstStyle/>
           <a:p>
-            <a:pPr indent="0" marL="0">
+            <a:pPr marL="0" indent="0">
               <a:buNone/>
             </a:pPr>
             <a:r>
@@ -3190,7 +2908,7 @@
           <a:bodyPr wrap="square" lIns="0" tIns="0" rIns="0" bIns="0" rtlCol="0" anchor="ctr"/>
           <a:lstStyle/>
           <a:p>
-            <a:pPr indent="0" marL="0">
+            <a:pPr marL="0" indent="0">
               <a:buNone/>
             </a:pPr>
             <a:r>
@@ -3251,7 +2969,7 @@
           <a:bodyPr wrap="square" lIns="0" tIns="0" rIns="0" bIns="0" rtlCol="0" anchor="ctr"/>
           <a:lstStyle/>
           <a:p>
-            <a:pPr indent="0" marL="0">
+            <a:pPr marL="0" indent="0">
               <a:buNone/>
             </a:pPr>
             <a:r>
@@ -3290,7 +3008,7 @@
           <a:bodyPr wrap="square" lIns="0" tIns="0" rIns="0" bIns="0" rtlCol="0" anchor="ctr"/>
           <a:lstStyle/>
           <a:p>
-            <a:pPr indent="0" marL="0">
+            <a:pPr marL="0" indent="0">
               <a:buNone/>
             </a:pPr>
             <a:r>
@@ -3329,7 +3047,7 @@
           <a:bodyPr wrap="square" lIns="0" tIns="0" rIns="0" bIns="0" rtlCol="0" anchor="ctr"/>
           <a:lstStyle/>
           <a:p>
-            <a:pPr indent="0" marL="0">
+            <a:pPr marL="0" indent="0">
               <a:buNone/>
             </a:pPr>
             <a:r>
@@ -3368,7 +3086,7 @@
           <a:bodyPr wrap="square" lIns="0" tIns="0" rIns="0" bIns="0" rtlCol="0" anchor="ctr"/>
           <a:lstStyle/>
           <a:p>
-            <a:pPr algn="r" indent="0" marL="0">
+            <a:pPr marL="0" indent="0" algn="r">
               <a:buNone/>
             </a:pPr>
             <a:r>
@@ -3452,11 +3170,11 @@
           <a:bodyPr wrap="square" lIns="0" tIns="0" rIns="0" bIns="0" rtlCol="0" anchor="ctr"/>
           <a:lstStyle/>
           <a:p>
-            <a:pPr indent="0" marL="0">
-              <a:buNone/>
-            </a:pPr>
-            <a:r>
-              <a:rPr lang="en-US" sz="1100" b="1" spc="60" kern="0" dirty="0">
+            <a:pPr marL="0" indent="0">
+              <a:buNone/>
+            </a:pPr>
+            <a:r>
+              <a:rPr lang="en-US" sz="1100" b="1" kern="0" spc="60" dirty="0">
                 <a:solidFill>
                   <a:srgbClr val="E85D3A"/>
                 </a:solidFill>
@@ -3491,7 +3209,7 @@
           <a:bodyPr wrap="square" lIns="0" tIns="0" rIns="0" bIns="0" rtlCol="0" anchor="ctr"/>
           <a:lstStyle/>
           <a:p>
-            <a:pPr indent="0" marL="0">
+            <a:pPr marL="0" indent="0">
               <a:buNone/>
             </a:pPr>
             <a:r>
@@ -3530,7 +3248,7 @@
           </a:solidFill>
           <a:ln/>
           <a:effectLst>
-            <a:outerShdw sx="100000" sy="100000" kx="0" ky="0" algn="bl" rotWithShape="0" blurRad="101600" dist="25400" dir="8100000">
+            <a:outerShdw blurRad="101600" dist="25400" dir="8100000" algn="bl" rotWithShape="0">
               <a:srgbClr val="14332F">
                 <a:alpha val="8000"/>
               </a:srgbClr>
@@ -3559,7 +3277,7 @@
           <a:bodyPr wrap="square" lIns="0" tIns="0" rIns="0" bIns="0" rtlCol="0" anchor="ctr"/>
           <a:lstStyle/>
           <a:p>
-            <a:pPr indent="0" marL="0">
+            <a:pPr marL="0" indent="0">
               <a:buNone/>
             </a:pPr>
             <a:r>
@@ -3598,7 +3316,7 @@
           <a:bodyPr wrap="square" lIns="0" tIns="0" rIns="0" bIns="0" rtlCol="0" anchor="ctr"/>
           <a:lstStyle/>
           <a:p>
-            <a:pPr indent="0" marL="0">
+            <a:pPr marL="0" indent="0">
               <a:buNone/>
             </a:pPr>
             <a:r>
@@ -3637,7 +3355,7 @@
           <a:bodyPr wrap="square" lIns="0" tIns="0" rIns="0" bIns="0" rtlCol="0" anchor="ctr"/>
           <a:lstStyle/>
           <a:p>
-            <a:pPr indent="0" marL="0">
+            <a:pPr marL="0" indent="0">
               <a:buNone/>
             </a:pPr>
             <a:r>
@@ -3654,7 +3372,7 @@
             <a:endParaRPr lang="en-US" sz="1400" dirty="0"/>
           </a:p>
           <a:p>
-            <a:pPr indent="0" marL="0">
+            <a:pPr marL="0" indent="0">
               <a:buNone/>
             </a:pPr>
             <a:r>
@@ -3671,7 +3389,7 @@
             <a:endParaRPr lang="en-US" sz="1400" dirty="0"/>
           </a:p>
           <a:p>
-            <a:pPr indent="0" marL="0">
+            <a:pPr marL="0" indent="0">
               <a:buNone/>
             </a:pPr>
             <a:r>
@@ -3710,7 +3428,7 @@
           </a:solidFill>
           <a:ln/>
           <a:effectLst>
-            <a:outerShdw sx="100000" sy="100000" kx="0" ky="0" algn="bl" rotWithShape="0" blurRad="101600" dist="25400" dir="8100000">
+            <a:outerShdw blurRad="101600" dist="25400" dir="8100000" algn="bl" rotWithShape="0">
               <a:srgbClr val="14332F">
                 <a:alpha val="8000"/>
               </a:srgbClr>
@@ -3739,7 +3457,7 @@
           <a:bodyPr wrap="square" lIns="0" tIns="0" rIns="0" bIns="0" rtlCol="0" anchor="ctr"/>
           <a:lstStyle/>
           <a:p>
-            <a:pPr indent="0" marL="0">
+            <a:pPr marL="0" indent="0">
               <a:buNone/>
             </a:pPr>
             <a:r>
@@ -3778,7 +3496,7 @@
           <a:bodyPr wrap="square" lIns="0" tIns="0" rIns="0" bIns="0" rtlCol="0" anchor="ctr"/>
           <a:lstStyle/>
           <a:p>
-            <a:pPr indent="0" marL="0">
+            <a:pPr marL="0" indent="0">
               <a:buNone/>
             </a:pPr>
             <a:r>
@@ -3817,7 +3535,7 @@
           <a:bodyPr wrap="square" lIns="0" tIns="0" rIns="0" bIns="0" rtlCol="0" anchor="ctr"/>
           <a:lstStyle/>
           <a:p>
-            <a:pPr indent="0" marL="0">
+            <a:pPr marL="0" indent="0">
               <a:buNone/>
             </a:pPr>
             <a:r>
@@ -3834,7 +3552,7 @@
             <a:endParaRPr lang="en-US" sz="1400" dirty="0"/>
           </a:p>
           <a:p>
-            <a:pPr indent="0" marL="0">
+            <a:pPr marL="0" indent="0">
               <a:buNone/>
             </a:pPr>
             <a:r>
@@ -3851,7 +3569,7 @@
             <a:endParaRPr lang="en-US" sz="1400" dirty="0"/>
           </a:p>
           <a:p>
-            <a:pPr indent="0" marL="0">
+            <a:pPr marL="0" indent="0">
               <a:buNone/>
             </a:pPr>
             <a:r>
@@ -3890,7 +3608,7 @@
           </a:solidFill>
           <a:ln/>
           <a:effectLst>
-            <a:outerShdw sx="100000" sy="100000" kx="0" ky="0" algn="bl" rotWithShape="0" blurRad="101600" dist="25400" dir="8100000">
+            <a:outerShdw blurRad="101600" dist="25400" dir="8100000" algn="bl" rotWithShape="0">
               <a:srgbClr val="14332F">
                 <a:alpha val="8000"/>
               </a:srgbClr>
@@ -3919,7 +3637,7 @@
           <a:bodyPr wrap="square" lIns="0" tIns="0" rIns="0" bIns="0" rtlCol="0" anchor="ctr"/>
           <a:lstStyle/>
           <a:p>
-            <a:pPr indent="0" marL="0">
+            <a:pPr marL="0" indent="0">
               <a:buNone/>
             </a:pPr>
             <a:r>
@@ -3958,7 +3676,7 @@
           <a:bodyPr wrap="square" lIns="0" tIns="0" rIns="0" bIns="0" rtlCol="0" anchor="ctr"/>
           <a:lstStyle/>
           <a:p>
-            <a:pPr indent="0" marL="0">
+            <a:pPr marL="0" indent="0">
               <a:buNone/>
             </a:pPr>
             <a:r>
@@ -3997,7 +3715,7 @@
           <a:bodyPr wrap="square" lIns="0" tIns="0" rIns="0" bIns="0" rtlCol="0" anchor="ctr"/>
           <a:lstStyle/>
           <a:p>
-            <a:pPr indent="0" marL="0">
+            <a:pPr marL="0" indent="0">
               <a:buNone/>
             </a:pPr>
             <a:r>
@@ -4014,7 +3732,7 @@
             <a:endParaRPr lang="en-US" sz="1400" dirty="0"/>
           </a:p>
           <a:p>
-            <a:pPr indent="0" marL="0">
+            <a:pPr marL="0" indent="0">
               <a:buNone/>
             </a:pPr>
             <a:r>
@@ -4031,7 +3749,7 @@
             <a:endParaRPr lang="en-US" sz="1400" dirty="0"/>
           </a:p>
           <a:p>
-            <a:pPr indent="0" marL="0">
+            <a:pPr marL="0" indent="0">
               <a:buNone/>
             </a:pPr>
             <a:r>
@@ -4070,7 +3788,7 @@
           </a:solidFill>
           <a:ln/>
           <a:effectLst>
-            <a:outerShdw sx="100000" sy="100000" kx="0" ky="0" algn="bl" rotWithShape="0" blurRad="101600" dist="25400" dir="8100000">
+            <a:outerShdw blurRad="101600" dist="25400" dir="8100000" algn="bl" rotWithShape="0">
               <a:srgbClr val="14332F">
                 <a:alpha val="8000"/>
               </a:srgbClr>
@@ -4099,7 +3817,7 @@
           <a:bodyPr wrap="square" lIns="0" tIns="0" rIns="0" bIns="0" rtlCol="0" anchor="ctr"/>
           <a:lstStyle/>
           <a:p>
-            <a:pPr indent="0" marL="0">
+            <a:pPr marL="0" indent="0">
               <a:buNone/>
             </a:pPr>
             <a:r>
@@ -4138,7 +3856,7 @@
           <a:bodyPr wrap="square" lIns="0" tIns="0" rIns="0" bIns="0" rtlCol="0" anchor="ctr"/>
           <a:lstStyle/>
           <a:p>
-            <a:pPr indent="0" marL="0">
+            <a:pPr marL="0" indent="0">
               <a:buNone/>
             </a:pPr>
             <a:r>
@@ -4177,7 +3895,7 @@
           <a:bodyPr wrap="square" lIns="0" tIns="0" rIns="0" bIns="0" rtlCol="0" anchor="ctr"/>
           <a:lstStyle/>
           <a:p>
-            <a:pPr indent="0" marL="0">
+            <a:pPr marL="0" indent="0">
               <a:buNone/>
             </a:pPr>
             <a:r>
@@ -4194,7 +3912,7 @@
             <a:endParaRPr lang="en-US" sz="1400" dirty="0"/>
           </a:p>
           <a:p>
-            <a:pPr indent="0" marL="0">
+            <a:pPr marL="0" indent="0">
               <a:buNone/>
             </a:pPr>
             <a:r>
@@ -4233,7 +3951,7 @@
           <a:bodyPr wrap="square" lIns="0" tIns="0" rIns="0" bIns="0" rtlCol="0" anchor="ctr"/>
           <a:lstStyle/>
           <a:p>
-            <a:pPr indent="0" marL="0">
+            <a:pPr marL="0" indent="0">
               <a:buNone/>
             </a:pPr>
             <a:r>
@@ -4272,7 +3990,7 @@
           <a:bodyPr wrap="square" lIns="0" tIns="0" rIns="0" bIns="0" rtlCol="0" anchor="ctr"/>
           <a:lstStyle/>
           <a:p>
-            <a:pPr algn="r" indent="0" marL="0">
+            <a:pPr marL="0" indent="0" algn="r">
               <a:buNone/>
             </a:pPr>
             <a:r>
@@ -4356,11 +4074,11 @@
           <a:bodyPr wrap="square" lIns="0" tIns="0" rIns="0" bIns="0" rtlCol="0" anchor="ctr"/>
           <a:lstStyle/>
           <a:p>
-            <a:pPr indent="0" marL="0">
-              <a:buNone/>
-            </a:pPr>
-            <a:r>
-              <a:rPr lang="en-US" sz="1100" b="1" spc="60" kern="0" dirty="0">
+            <a:pPr marL="0" indent="0">
+              <a:buNone/>
+            </a:pPr>
+            <a:r>
+              <a:rPr lang="en-US" sz="1100" b="1" kern="0" spc="60" dirty="0">
                 <a:solidFill>
                   <a:srgbClr val="E85D3A"/>
                 </a:solidFill>
@@ -4395,7 +4113,7 @@
           <a:bodyPr wrap="square" lIns="0" tIns="0" rIns="0" bIns="0" rtlCol="0" anchor="ctr"/>
           <a:lstStyle/>
           <a:p>
-            <a:pPr indent="0" marL="0">
+            <a:pPr marL="0" indent="0">
               <a:buNone/>
             </a:pPr>
             <a:r>
@@ -4456,7 +4174,7 @@
           <a:bodyPr wrap="square" lIns="0" tIns="0" rIns="0" bIns="0" rtlCol="0" anchor="ctr"/>
           <a:lstStyle/>
           <a:p>
-            <a:pPr algn="ctr" indent="0" marL="0">
+            <a:pPr marL="0" indent="0" algn="ctr">
               <a:buNone/>
             </a:pPr>
             <a:r>
@@ -4495,7 +4213,7 @@
           <a:bodyPr wrap="square" lIns="0" tIns="0" rIns="0" bIns="0" rtlCol="0" anchor="ctr"/>
           <a:lstStyle/>
           <a:p>
-            <a:pPr algn="ctr" indent="0" marL="0">
+            <a:pPr marL="0" indent="0" algn="ctr">
               <a:buNone/>
             </a:pPr>
             <a:r>
@@ -4534,7 +4252,7 @@
           <a:bodyPr wrap="square" lIns="0" tIns="0" rIns="0" bIns="0" rtlCol="0" anchor="ctr"/>
           <a:lstStyle/>
           <a:p>
-            <a:pPr algn="ctr" indent="0" marL="0">
+            <a:pPr marL="0" indent="0" algn="ctr">
               <a:buNone/>
             </a:pPr>
             <a:r>
@@ -4615,7 +4333,7 @@
           <a:bodyPr wrap="square" lIns="0" tIns="0" rIns="0" bIns="0" rtlCol="0" anchor="ctr"/>
           <a:lstStyle/>
           <a:p>
-            <a:pPr algn="ctr" indent="0" marL="0">
+            <a:pPr marL="0" indent="0" algn="ctr">
               <a:buNone/>
             </a:pPr>
             <a:r>
@@ -4654,7 +4372,7 @@
           <a:bodyPr wrap="square" lIns="0" tIns="0" rIns="0" bIns="0" rtlCol="0" anchor="ctr"/>
           <a:lstStyle/>
           <a:p>
-            <a:pPr algn="ctr" indent="0" marL="0">
+            <a:pPr marL="0" indent="0" algn="ctr">
               <a:buNone/>
             </a:pPr>
             <a:r>
@@ -4693,7 +4411,7 @@
           <a:bodyPr wrap="square" lIns="0" tIns="0" rIns="0" bIns="0" rtlCol="0" anchor="ctr"/>
           <a:lstStyle/>
           <a:p>
-            <a:pPr algn="ctr" indent="0" marL="0">
+            <a:pPr marL="0" indent="0" algn="ctr">
               <a:buNone/>
             </a:pPr>
             <a:r>
@@ -4774,7 +4492,7 @@
           <a:bodyPr wrap="square" lIns="0" tIns="0" rIns="0" bIns="0" rtlCol="0" anchor="ctr"/>
           <a:lstStyle/>
           <a:p>
-            <a:pPr algn="ctr" indent="0" marL="0">
+            <a:pPr marL="0" indent="0" algn="ctr">
               <a:buNone/>
             </a:pPr>
             <a:r>
@@ -4813,7 +4531,7 @@
           <a:bodyPr wrap="square" lIns="0" tIns="0" rIns="0" bIns="0" rtlCol="0" anchor="ctr"/>
           <a:lstStyle/>
           <a:p>
-            <a:pPr algn="ctr" indent="0" marL="0">
+            <a:pPr marL="0" indent="0" algn="ctr">
               <a:buNone/>
             </a:pPr>
             <a:r>
@@ -4852,7 +4570,7 @@
           <a:bodyPr wrap="square" lIns="0" tIns="0" rIns="0" bIns="0" rtlCol="0" anchor="ctr"/>
           <a:lstStyle/>
           <a:p>
-            <a:pPr algn="ctr" indent="0" marL="0">
+            <a:pPr marL="0" indent="0" algn="ctr">
               <a:buNone/>
             </a:pPr>
             <a:r>
@@ -4933,7 +4651,7 @@
           <a:bodyPr wrap="square" lIns="0" tIns="0" rIns="0" bIns="0" rtlCol="0" anchor="ctr"/>
           <a:lstStyle/>
           <a:p>
-            <a:pPr algn="ctr" indent="0" marL="0">
+            <a:pPr marL="0" indent="0" algn="ctr">
               <a:buNone/>
             </a:pPr>
             <a:r>
@@ -4972,7 +4690,7 @@
           <a:bodyPr wrap="square" lIns="0" tIns="0" rIns="0" bIns="0" rtlCol="0" anchor="ctr"/>
           <a:lstStyle/>
           <a:p>
-            <a:pPr algn="ctr" indent="0" marL="0">
+            <a:pPr marL="0" indent="0" algn="ctr">
               <a:buNone/>
             </a:pPr>
             <a:r>
@@ -5011,7 +4729,7 @@
           <a:bodyPr wrap="square" lIns="0" tIns="0" rIns="0" bIns="0" rtlCol="0" anchor="ctr"/>
           <a:lstStyle/>
           <a:p>
-            <a:pPr algn="ctr" indent="0" marL="0">
+            <a:pPr marL="0" indent="0" algn="ctr">
               <a:buNone/>
             </a:pPr>
             <a:r>
@@ -5050,7 +4768,7 @@
           </a:solidFill>
           <a:ln/>
           <a:effectLst>
-            <a:outerShdw sx="100000" sy="100000" kx="0" ky="0" algn="bl" rotWithShape="0" blurRad="101600" dist="25400" dir="8100000">
+            <a:outerShdw blurRad="101600" dist="25400" dir="8100000" algn="bl" rotWithShape="0">
               <a:srgbClr val="14332F">
                 <a:alpha val="8000"/>
               </a:srgbClr>
@@ -5079,7 +4797,7 @@
           <a:bodyPr wrap="square" lIns="0" tIns="0" rIns="0" bIns="0" rtlCol="0" anchor="ctr"/>
           <a:lstStyle/>
           <a:p>
-            <a:pPr indent="0" marL="0">
+            <a:pPr marL="0" indent="0">
               <a:buNone/>
             </a:pPr>
             <a:r>
@@ -5118,7 +4836,7 @@
           <a:bodyPr wrap="square" lIns="0" tIns="0" rIns="0" bIns="0" rtlCol="0" anchor="ctr"/>
           <a:lstStyle/>
           <a:p>
-            <a:pPr indent="0" marL="0">
+            <a:pPr marL="0" indent="0">
               <a:buNone/>
             </a:pPr>
             <a:r>
@@ -5135,7 +4853,7 @@
             <a:endParaRPr lang="en-US" sz="1300" dirty="0"/>
           </a:p>
           <a:p>
-            <a:pPr indent="0" marL="0">
+            <a:pPr marL="0" indent="0">
               <a:buNone/>
             </a:pPr>
             <a:r>
@@ -5152,7 +4870,7 @@
             <a:endParaRPr lang="en-US" sz="1300" dirty="0"/>
           </a:p>
           <a:p>
-            <a:pPr indent="0" marL="0">
+            <a:pPr marL="0" indent="0">
               <a:buNone/>
             </a:pPr>
             <a:r>
@@ -5191,7 +4909,7 @@
           <a:bodyPr wrap="square" lIns="0" tIns="0" rIns="0" bIns="0" rtlCol="0" anchor="ctr"/>
           <a:lstStyle/>
           <a:p>
-            <a:pPr indent="0" marL="0">
+            <a:pPr marL="0" indent="0">
               <a:buNone/>
             </a:pPr>
             <a:r>
@@ -5208,7 +4926,7 @@
             <a:endParaRPr lang="en-US" sz="1400" dirty="0"/>
           </a:p>
           <a:p>
-            <a:pPr indent="0" marL="0">
+            <a:pPr marL="0" indent="0">
               <a:buNone/>
             </a:pPr>
             <a:r>
@@ -5225,7 +4943,7 @@
             <a:endParaRPr lang="en-US" sz="1400" dirty="0"/>
           </a:p>
           <a:p>
-            <a:pPr indent="0" marL="0">
+            <a:pPr marL="0" indent="0">
               <a:buNone/>
             </a:pPr>
             <a:r>
@@ -5264,7 +4982,7 @@
           </a:solidFill>
           <a:ln/>
           <a:effectLst>
-            <a:outerShdw sx="100000" sy="100000" kx="0" ky="0" algn="bl" rotWithShape="0" blurRad="101600" dist="25400" dir="8100000">
+            <a:outerShdw blurRad="101600" dist="25400" dir="8100000" algn="bl" rotWithShape="0">
               <a:srgbClr val="14332F">
                 <a:alpha val="8000"/>
               </a:srgbClr>
@@ -5293,7 +5011,7 @@
           <a:bodyPr wrap="square" lIns="0" tIns="0" rIns="0" bIns="0" rtlCol="0" anchor="ctr"/>
           <a:lstStyle/>
           <a:p>
-            <a:pPr indent="0" marL="0">
+            <a:pPr marL="0" indent="0">
               <a:buNone/>
             </a:pPr>
             <a:r>
@@ -5480,7 +5198,7 @@
           <a:bodyPr wrap="square" lIns="0" tIns="0" rIns="0" bIns="0" rtlCol="0" anchor="ctr"/>
           <a:lstStyle/>
           <a:p>
-            <a:pPr indent="0" marL="0">
+            <a:pPr marL="0" indent="0">
               <a:buNone/>
             </a:pPr>
             <a:r>
@@ -5519,7 +5237,7 @@
           <a:bodyPr wrap="square" lIns="0" tIns="0" rIns="0" bIns="0" rtlCol="0" anchor="ctr"/>
           <a:lstStyle/>
           <a:p>
-            <a:pPr algn="r" indent="0" marL="0">
+            <a:pPr marL="0" indent="0" algn="r">
               <a:buNone/>
             </a:pPr>
             <a:r>
@@ -5603,11 +5321,11 @@
           <a:bodyPr wrap="square" lIns="0" tIns="0" rIns="0" bIns="0" rtlCol="0" anchor="ctr"/>
           <a:lstStyle/>
           <a:p>
-            <a:pPr indent="0" marL="0">
-              <a:buNone/>
-            </a:pPr>
-            <a:r>
-              <a:rPr lang="en-US" sz="1100" b="1" spc="60" kern="0" dirty="0">
+            <a:pPr marL="0" indent="0">
+              <a:buNone/>
+            </a:pPr>
+            <a:r>
+              <a:rPr lang="en-US" sz="1100" b="1" kern="0" spc="60" dirty="0">
                 <a:solidFill>
                   <a:srgbClr val="6FCFC0"/>
                 </a:solidFill>
@@ -5642,7 +5360,7 @@
           <a:bodyPr wrap="square" lIns="0" tIns="0" rIns="0" bIns="0" rtlCol="0" anchor="ctr"/>
           <a:lstStyle/>
           <a:p>
-            <a:pPr indent="0" marL="0">
+            <a:pPr marL="0" indent="0">
               <a:buNone/>
             </a:pPr>
             <a:r>
@@ -5703,7 +5421,7 @@
           <a:bodyPr wrap="square" lIns="0" tIns="0" rIns="0" bIns="0" rtlCol="0" anchor="ctr"/>
           <a:lstStyle/>
           <a:p>
-            <a:pPr indent="0" marL="0">
+            <a:pPr marL="0" indent="0">
               <a:buNone/>
             </a:pPr>
             <a:r>
@@ -5742,7 +5460,7 @@
           <a:bodyPr wrap="square" lIns="0" tIns="0" rIns="0" bIns="0" rtlCol="0" anchor="ctr"/>
           <a:lstStyle/>
           <a:p>
-            <a:pPr indent="0" marL="0">
+            <a:pPr marL="0" indent="0">
               <a:buNone/>
             </a:pPr>
             <a:r>
@@ -5759,7 +5477,7 @@
             <a:endParaRPr lang="en-US" sz="1800" dirty="0"/>
           </a:p>
           <a:p>
-            <a:pPr indent="0" marL="0">
+            <a:pPr marL="0" indent="0">
               <a:buNone/>
             </a:pPr>
             <a:r>
@@ -5798,7 +5516,7 @@
           <a:bodyPr wrap="square" lIns="0" tIns="0" rIns="0" bIns="0" rtlCol="0" anchor="ctr"/>
           <a:lstStyle/>
           <a:p>
-            <a:pPr indent="0" marL="0">
+            <a:pPr marL="0" indent="0">
               <a:buNone/>
             </a:pPr>
             <a:r>
@@ -5859,7 +5577,7 @@
           <a:bodyPr wrap="square" lIns="0" tIns="0" rIns="0" bIns="0" rtlCol="0" anchor="ctr"/>
           <a:lstStyle/>
           <a:p>
-            <a:pPr indent="0" marL="0">
+            <a:pPr marL="0" indent="0">
               <a:buNone/>
             </a:pPr>
             <a:r>
@@ -5898,7 +5616,7 @@
           <a:bodyPr wrap="square" lIns="0" tIns="0" rIns="0" bIns="0" rtlCol="0" anchor="ctr"/>
           <a:lstStyle/>
           <a:p>
-            <a:pPr indent="0" marL="0">
+            <a:pPr marL="0" indent="0">
               <a:buNone/>
             </a:pPr>
             <a:r>
@@ -5915,7 +5633,7 @@
             <a:endParaRPr lang="en-US" sz="1600" dirty="0"/>
           </a:p>
           <a:p>
-            <a:pPr indent="0" marL="0">
+            <a:pPr marL="0" indent="0">
               <a:buNone/>
             </a:pPr>
             <a:r>
@@ -5954,7 +5672,7 @@
           <a:bodyPr wrap="square" lIns="0" tIns="0" rIns="0" bIns="0" rtlCol="0" anchor="ctr"/>
           <a:lstStyle/>
           <a:p>
-            <a:pPr indent="0" marL="0">
+            <a:pPr marL="0" indent="0">
               <a:buNone/>
             </a:pPr>
             <a:r>
@@ -6015,7 +5733,7 @@
           <a:bodyPr wrap="square" lIns="0" tIns="0" rIns="0" bIns="0" rtlCol="0" anchor="ctr"/>
           <a:lstStyle/>
           <a:p>
-            <a:pPr indent="0" marL="0">
+            <a:pPr marL="0" indent="0">
               <a:buNone/>
             </a:pPr>
             <a:r>
@@ -6054,7 +5772,7 @@
           <a:bodyPr wrap="square" lIns="0" tIns="0" rIns="0" bIns="0" rtlCol="0" anchor="ctr"/>
           <a:lstStyle/>
           <a:p>
-            <a:pPr indent="0" marL="0">
+            <a:pPr marL="0" indent="0">
               <a:buNone/>
             </a:pPr>
             <a:r>
@@ -6071,7 +5789,7 @@
             <a:endParaRPr lang="en-US" sz="1400" dirty="0"/>
           </a:p>
           <a:p>
-            <a:pPr indent="0" marL="0">
+            <a:pPr marL="0" indent="0">
               <a:buNone/>
             </a:pPr>
             <a:r>
@@ -6088,7 +5806,7 @@
             <a:endParaRPr lang="en-US" sz="1400" dirty="0"/>
           </a:p>
           <a:p>
-            <a:pPr indent="0" marL="0">
+            <a:pPr marL="0" indent="0">
               <a:buNone/>
             </a:pPr>
             <a:r>
@@ -6105,7 +5823,7 @@
             <a:endParaRPr lang="en-US" sz="1400" dirty="0"/>
           </a:p>
           <a:p>
-            <a:pPr indent="0" marL="0">
+            <a:pPr marL="0" indent="0">
               <a:buNone/>
             </a:pPr>
             <a:r>
@@ -6144,7 +5862,7 @@
           <a:bodyPr wrap="square" lIns="0" tIns="0" rIns="0" bIns="0" rtlCol="0" anchor="ctr"/>
           <a:lstStyle/>
           <a:p>
-            <a:pPr indent="0" marL="0">
+            <a:pPr marL="0" indent="0">
               <a:buNone/>
             </a:pPr>
             <a:r>
@@ -6183,7 +5901,7 @@
           <a:bodyPr wrap="square" lIns="0" tIns="0" rIns="0" bIns="0" rtlCol="0" anchor="ctr"/>
           <a:lstStyle/>
           <a:p>
-            <a:pPr algn="r" indent="0" marL="0">
+            <a:pPr marL="0" indent="0" algn="r">
               <a:buNone/>
             </a:pPr>
             <a:r>
@@ -6267,11 +5985,11 @@
           <a:bodyPr wrap="square" lIns="0" tIns="0" rIns="0" bIns="0" rtlCol="0" anchor="ctr"/>
           <a:lstStyle/>
           <a:p>
-            <a:pPr indent="0" marL="0">
-              <a:buNone/>
-            </a:pPr>
-            <a:r>
-              <a:rPr lang="en-US" sz="1100" b="1" spc="60" kern="0" dirty="0">
+            <a:pPr marL="0" indent="0">
+              <a:buNone/>
+            </a:pPr>
+            <a:r>
+              <a:rPr lang="en-US" sz="1100" b="1" kern="0" spc="60" dirty="0">
                 <a:solidFill>
                   <a:srgbClr val="E85D3A"/>
                 </a:solidFill>
@@ -6306,7 +6024,7 @@
           <a:bodyPr wrap="square" lIns="0" tIns="0" rIns="0" bIns="0" rtlCol="0" anchor="ctr"/>
           <a:lstStyle/>
           <a:p>
-            <a:pPr indent="0" marL="0">
+            <a:pPr marL="0" indent="0">
               <a:buNone/>
             </a:pPr>
             <a:r>
@@ -6345,7 +6063,7 @@
           </a:solidFill>
           <a:ln/>
           <a:effectLst>
-            <a:outerShdw sx="100000" sy="100000" kx="0" ky="0" algn="bl" rotWithShape="0" blurRad="101600" dist="25400" dir="8100000">
+            <a:outerShdw blurRad="101600" dist="25400" dir="8100000" algn="bl" rotWithShape="0">
               <a:srgbClr val="14332F">
                 <a:alpha val="8000"/>
               </a:srgbClr>
@@ -6374,7 +6092,7 @@
           <a:bodyPr wrap="square" lIns="0" tIns="0" rIns="0" bIns="0" rtlCol="0" anchor="ctr"/>
           <a:lstStyle/>
           <a:p>
-            <a:pPr indent="0" marL="0">
+            <a:pPr marL="0" indent="0">
               <a:buNone/>
             </a:pPr>
             <a:r>
@@ -6413,7 +6131,7 @@
           <a:bodyPr wrap="square" lIns="0" tIns="0" rIns="0" bIns="0" rtlCol="0" anchor="ctr"/>
           <a:lstStyle/>
           <a:p>
-            <a:pPr indent="0" marL="0">
+            <a:pPr marL="0" indent="0">
               <a:buNone/>
             </a:pPr>
             <a:r>
@@ -6579,7 +6297,7 @@
           </a:solidFill>
           <a:ln/>
           <a:effectLst>
-            <a:outerShdw sx="100000" sy="100000" kx="0" ky="0" algn="bl" rotWithShape="0" blurRad="101600" dist="25400" dir="8100000">
+            <a:outerShdw blurRad="101600" dist="25400" dir="8100000" algn="bl" rotWithShape="0">
               <a:srgbClr val="14332F">
                 <a:alpha val="8000"/>
               </a:srgbClr>
@@ -6608,7 +6326,7 @@
           <a:bodyPr wrap="square" lIns="0" tIns="0" rIns="0" bIns="0" rtlCol="0" anchor="ctr"/>
           <a:lstStyle/>
           <a:p>
-            <a:pPr indent="0" marL="0">
+            <a:pPr marL="0" indent="0">
               <a:buNone/>
             </a:pPr>
             <a:r>
@@ -6647,7 +6365,7 @@
           <a:bodyPr wrap="square" lIns="0" tIns="0" rIns="0" bIns="0" rtlCol="0" anchor="ctr"/>
           <a:lstStyle/>
           <a:p>
-            <a:pPr indent="0" marL="0">
+            <a:pPr marL="0" indent="0">
               <a:buNone/>
             </a:pPr>
             <a:r>
@@ -6813,7 +6531,7 @@
           <a:bodyPr wrap="square" lIns="0" tIns="0" rIns="0" bIns="0" rtlCol="0" anchor="ctr"/>
           <a:lstStyle/>
           <a:p>
-            <a:pPr indent="0" marL="0">
+            <a:pPr marL="0" indent="0">
               <a:buNone/>
             </a:pPr>
             <a:r>
@@ -6852,7 +6570,7 @@
           <a:bodyPr wrap="square" lIns="0" tIns="0" rIns="0" bIns="0" rtlCol="0" anchor="ctr"/>
           <a:lstStyle/>
           <a:p>
-            <a:pPr algn="r" indent="0" marL="0">
+            <a:pPr marL="0" indent="0" algn="r">
               <a:buNone/>
             </a:pPr>
             <a:r>
@@ -6936,11 +6654,11 @@
           <a:bodyPr wrap="square" lIns="0" tIns="0" rIns="0" bIns="0" rtlCol="0" anchor="ctr"/>
           <a:lstStyle/>
           <a:p>
-            <a:pPr indent="0" marL="0">
-              <a:buNone/>
-            </a:pPr>
-            <a:r>
-              <a:rPr lang="en-US" sz="1100" b="1" spc="60" kern="0" dirty="0">
+            <a:pPr marL="0" indent="0">
+              <a:buNone/>
+            </a:pPr>
+            <a:r>
+              <a:rPr lang="en-US" sz="1100" b="1" kern="0" spc="60" dirty="0">
                 <a:solidFill>
                   <a:srgbClr val="E85D3A"/>
                 </a:solidFill>
@@ -6975,7 +6693,7 @@
           <a:bodyPr wrap="square" lIns="0" tIns="0" rIns="0" bIns="0" rtlCol="0" anchor="ctr"/>
           <a:lstStyle/>
           <a:p>
-            <a:pPr indent="0" marL="0">
+            <a:pPr marL="0" indent="0">
               <a:buNone/>
             </a:pPr>
             <a:r>
@@ -7014,7 +6732,7 @@
           </a:solidFill>
           <a:ln/>
           <a:effectLst>
-            <a:outerShdw sx="100000" sy="100000" kx="0" ky="0" algn="bl" rotWithShape="0" blurRad="101600" dist="25400" dir="8100000">
+            <a:outerShdw blurRad="101600" dist="25400" dir="8100000" algn="bl" rotWithShape="0">
               <a:srgbClr val="14332F">
                 <a:alpha val="8000"/>
               </a:srgbClr>
@@ -7043,7 +6761,7 @@
           <a:bodyPr wrap="square" lIns="0" tIns="0" rIns="0" bIns="0" rtlCol="0" anchor="ctr"/>
           <a:lstStyle/>
           <a:p>
-            <a:pPr indent="0" marL="0">
+            <a:pPr marL="0" indent="0">
               <a:buNone/>
             </a:pPr>
             <a:r>
@@ -7082,7 +6800,7 @@
           <a:bodyPr wrap="square" lIns="0" tIns="0" rIns="0" bIns="0" rtlCol="0" anchor="ctr"/>
           <a:lstStyle/>
           <a:p>
-            <a:pPr indent="0" marL="0">
+            <a:pPr marL="0" indent="0">
               <a:buNone/>
             </a:pPr>
             <a:r>
@@ -7121,7 +6839,7 @@
           <a:bodyPr wrap="square" lIns="0" tIns="0" rIns="0" bIns="0" rtlCol="0" anchor="ctr"/>
           <a:lstStyle/>
           <a:p>
-            <a:pPr indent="0" marL="0">
+            <a:pPr marL="0" indent="0">
               <a:buNone/>
             </a:pPr>
             <a:r>
@@ -7138,7 +6856,7 @@
             <a:endParaRPr lang="en-US" sz="1300" dirty="0"/>
           </a:p>
           <a:p>
-            <a:pPr indent="0" marL="0">
+            <a:pPr marL="0" indent="0">
               <a:buNone/>
             </a:pPr>
             <a:r>
@@ -7155,7 +6873,7 @@
             <a:endParaRPr lang="en-US" sz="1300" dirty="0"/>
           </a:p>
           <a:p>
-            <a:pPr indent="0" marL="0">
+            <a:pPr marL="0" indent="0">
               <a:buNone/>
             </a:pPr>
             <a:r>
@@ -7194,7 +6912,7 @@
           </a:solidFill>
           <a:ln/>
           <a:effectLst>
-            <a:outerShdw sx="100000" sy="100000" kx="0" ky="0" algn="bl" rotWithShape="0" blurRad="101600" dist="25400" dir="8100000">
+            <a:outerShdw blurRad="101600" dist="25400" dir="8100000" algn="bl" rotWithShape="0">
               <a:srgbClr val="14332F">
                 <a:alpha val="8000"/>
               </a:srgbClr>
@@ -7223,7 +6941,7 @@
           <a:bodyPr wrap="square" lIns="0" tIns="0" rIns="0" bIns="0" rtlCol="0" anchor="ctr"/>
           <a:lstStyle/>
           <a:p>
-            <a:pPr indent="0" marL="0">
+            <a:pPr marL="0" indent="0">
               <a:buNone/>
             </a:pPr>
             <a:r>
@@ -7262,7 +6980,7 @@
           <a:bodyPr wrap="square" lIns="0" tIns="0" rIns="0" bIns="0" rtlCol="0" anchor="ctr"/>
           <a:lstStyle/>
           <a:p>
-            <a:pPr indent="0" marL="0">
+            <a:pPr marL="0" indent="0">
               <a:buNone/>
             </a:pPr>
             <a:r>
@@ -7301,7 +7019,7 @@
           <a:bodyPr wrap="square" lIns="0" tIns="0" rIns="0" bIns="0" rtlCol="0" anchor="ctr"/>
           <a:lstStyle/>
           <a:p>
-            <a:pPr indent="0" marL="0">
+            <a:pPr marL="0" indent="0">
               <a:buNone/>
             </a:pPr>
             <a:r>
@@ -7318,7 +7036,7 @@
             <a:endParaRPr lang="en-US" sz="1300" dirty="0"/>
           </a:p>
           <a:p>
-            <a:pPr indent="0" marL="0">
+            <a:pPr marL="0" indent="0">
               <a:buNone/>
             </a:pPr>
             <a:r>
@@ -7335,7 +7053,7 @@
             <a:endParaRPr lang="en-US" sz="1300" dirty="0"/>
           </a:p>
           <a:p>
-            <a:pPr indent="0" marL="0">
+            <a:pPr marL="0" indent="0">
               <a:buNone/>
             </a:pPr>
             <a:r>
@@ -7374,7 +7092,7 @@
           </a:solidFill>
           <a:ln/>
           <a:effectLst>
-            <a:outerShdw sx="100000" sy="100000" kx="0" ky="0" algn="bl" rotWithShape="0" blurRad="101600" dist="25400" dir="8100000">
+            <a:outerShdw blurRad="101600" dist="25400" dir="8100000" algn="bl" rotWithShape="0">
               <a:srgbClr val="14332F">
                 <a:alpha val="8000"/>
               </a:srgbClr>
@@ -7403,7 +7121,7 @@
           <a:bodyPr wrap="square" lIns="0" tIns="0" rIns="0" bIns="0" rtlCol="0" anchor="ctr"/>
           <a:lstStyle/>
           <a:p>
-            <a:pPr indent="0" marL="0">
+            <a:pPr marL="0" indent="0">
               <a:buNone/>
             </a:pPr>
             <a:r>
@@ -7442,7 +7160,7 @@
           <a:bodyPr wrap="square" lIns="0" tIns="0" rIns="0" bIns="0" rtlCol="0" anchor="ctr"/>
           <a:lstStyle/>
           <a:p>
-            <a:pPr indent="0" marL="0">
+            <a:pPr marL="0" indent="0">
               <a:buNone/>
             </a:pPr>
             <a:r>
@@ -7481,7 +7199,7 @@
           <a:bodyPr wrap="square" lIns="0" tIns="0" rIns="0" bIns="0" rtlCol="0" anchor="ctr"/>
           <a:lstStyle/>
           <a:p>
-            <a:pPr indent="0" marL="0">
+            <a:pPr marL="0" indent="0">
               <a:buNone/>
             </a:pPr>
             <a:r>
@@ -7498,7 +7216,7 @@
             <a:endParaRPr lang="en-US" sz="1300" dirty="0"/>
           </a:p>
           <a:p>
-            <a:pPr indent="0" marL="0">
+            <a:pPr marL="0" indent="0">
               <a:buNone/>
             </a:pPr>
             <a:r>
@@ -7515,7 +7233,7 @@
             <a:endParaRPr lang="en-US" sz="1300" dirty="0"/>
           </a:p>
           <a:p>
-            <a:pPr indent="0" marL="0">
+            <a:pPr marL="0" indent="0">
               <a:buNone/>
             </a:pPr>
             <a:r>
@@ -7554,7 +7272,7 @@
           </a:solidFill>
           <a:ln/>
           <a:effectLst>
-            <a:outerShdw sx="100000" sy="100000" kx="0" ky="0" algn="bl" rotWithShape="0" blurRad="101600" dist="25400" dir="8100000">
+            <a:outerShdw blurRad="101600" dist="25400" dir="8100000" algn="bl" rotWithShape="0">
               <a:srgbClr val="14332F">
                 <a:alpha val="8000"/>
               </a:srgbClr>
@@ -7583,7 +7301,7 @@
           <a:bodyPr wrap="square" lIns="0" tIns="0" rIns="0" bIns="0" rtlCol="0" anchor="ctr"/>
           <a:lstStyle/>
           <a:p>
-            <a:pPr indent="0" marL="0">
+            <a:pPr marL="0" indent="0">
               <a:buNone/>
             </a:pPr>
             <a:r>
@@ -7622,7 +7340,7 @@
           <a:bodyPr wrap="square" lIns="0" tIns="0" rIns="0" bIns="0" rtlCol="0" anchor="ctr"/>
           <a:lstStyle/>
           <a:p>
-            <a:pPr indent="0" marL="0">
+            <a:pPr marL="0" indent="0">
               <a:buNone/>
             </a:pPr>
             <a:r>
@@ -7661,7 +7379,7 @@
           <a:bodyPr wrap="square" lIns="0" tIns="0" rIns="0" bIns="0" rtlCol="0" anchor="ctr"/>
           <a:lstStyle/>
           <a:p>
-            <a:pPr indent="0" marL="0">
+            <a:pPr marL="0" indent="0">
               <a:buNone/>
             </a:pPr>
             <a:r>
@@ -7678,7 +7396,7 @@
             <a:endParaRPr lang="en-US" sz="1300" dirty="0"/>
           </a:p>
           <a:p>
-            <a:pPr indent="0" marL="0">
+            <a:pPr marL="0" indent="0">
               <a:buNone/>
             </a:pPr>
             <a:r>
@@ -7695,7 +7413,7 @@
             <a:endParaRPr lang="en-US" sz="1300" dirty="0"/>
           </a:p>
           <a:p>
-            <a:pPr indent="0" marL="0">
+            <a:pPr marL="0" indent="0">
               <a:buNone/>
             </a:pPr>
             <a:r>
@@ -7734,7 +7452,7 @@
           </a:solidFill>
           <a:ln/>
           <a:effectLst>
-            <a:outerShdw sx="100000" sy="100000" kx="0" ky="0" algn="bl" rotWithShape="0" blurRad="101600" dist="25400" dir="8100000">
+            <a:outerShdw blurRad="101600" dist="25400" dir="8100000" algn="bl" rotWithShape="0">
               <a:srgbClr val="14332F">
                 <a:alpha val="8000"/>
               </a:srgbClr>
@@ -7763,7 +7481,7 @@
           <a:bodyPr wrap="square" lIns="0" tIns="0" rIns="0" bIns="0" rtlCol="0" anchor="ctr"/>
           <a:lstStyle/>
           <a:p>
-            <a:pPr indent="0" marL="0">
+            <a:pPr marL="0" indent="0">
               <a:buNone/>
             </a:pPr>
             <a:r>
@@ -7802,7 +7520,7 @@
           <a:bodyPr wrap="square" lIns="0" tIns="0" rIns="0" bIns="0" rtlCol="0" anchor="ctr"/>
           <a:lstStyle/>
           <a:p>
-            <a:pPr indent="0" marL="0">
+            <a:pPr marL="0" indent="0">
               <a:buNone/>
             </a:pPr>
             <a:r>
@@ -7819,7 +7537,7 @@
             <a:endParaRPr lang="en-US" sz="1400" dirty="0"/>
           </a:p>
           <a:p>
-            <a:pPr indent="0" marL="0">
+            <a:pPr marL="0" indent="0">
               <a:buNone/>
             </a:pPr>
             <a:r>
@@ -7858,7 +7576,7 @@
           <a:bodyPr wrap="square" lIns="0" tIns="0" rIns="0" bIns="0" rtlCol="0" anchor="ctr"/>
           <a:lstStyle/>
           <a:p>
-            <a:pPr indent="0" marL="0">
+            <a:pPr marL="0" indent="0">
               <a:buNone/>
             </a:pPr>
             <a:r>
@@ -7897,7 +7615,7 @@
           <a:bodyPr wrap="square" lIns="0" tIns="0" rIns="0" bIns="0" rtlCol="0" anchor="ctr"/>
           <a:lstStyle/>
           <a:p>
-            <a:pPr algn="r" indent="0" marL="0">
+            <a:pPr marL="0" indent="0" algn="r">
               <a:buNone/>
             </a:pPr>
             <a:r>
@@ -7981,11 +7699,11 @@
           <a:bodyPr wrap="square" lIns="0" tIns="0" rIns="0" bIns="0" rtlCol="0" anchor="ctr"/>
           <a:lstStyle/>
           <a:p>
-            <a:pPr indent="0" marL="0">
-              <a:buNone/>
-            </a:pPr>
-            <a:r>
-              <a:rPr lang="en-US" sz="1100" b="1" spc="60" kern="0" dirty="0">
+            <a:pPr marL="0" indent="0">
+              <a:buNone/>
+            </a:pPr>
+            <a:r>
+              <a:rPr lang="en-US" sz="1100" b="1" kern="0" spc="60" dirty="0">
                 <a:solidFill>
                   <a:srgbClr val="E85D3A"/>
                 </a:solidFill>
@@ -8020,7 +7738,7 @@
           <a:bodyPr wrap="square" lIns="0" tIns="0" rIns="0" bIns="0" rtlCol="0" anchor="ctr"/>
           <a:lstStyle/>
           <a:p>
-            <a:pPr indent="0" marL="0">
+            <a:pPr marL="0" indent="0">
               <a:buNone/>
             </a:pPr>
             <a:r>
@@ -8059,7 +7777,7 @@
           </a:solidFill>
           <a:ln/>
           <a:effectLst>
-            <a:outerShdw sx="100000" sy="100000" kx="0" ky="0" algn="bl" rotWithShape="0" blurRad="101600" dist="25400" dir="8100000">
+            <a:outerShdw blurRad="101600" dist="25400" dir="8100000" algn="bl" rotWithShape="0">
               <a:srgbClr val="14332F">
                 <a:alpha val="8000"/>
               </a:srgbClr>
@@ -8088,7 +7806,7 @@
           <a:bodyPr wrap="square" lIns="0" tIns="0" rIns="0" bIns="0" rtlCol="0" anchor="ctr"/>
           <a:lstStyle/>
           <a:p>
-            <a:pPr indent="0" marL="0">
+            <a:pPr marL="0" indent="0">
               <a:buNone/>
             </a:pPr>
             <a:r>
@@ -8127,7 +7845,7 @@
           <a:bodyPr wrap="square" lIns="0" tIns="0" rIns="0" bIns="0" rtlCol="0" anchor="ctr"/>
           <a:lstStyle/>
           <a:p>
-            <a:pPr indent="0" marL="0">
+            <a:pPr marL="0" indent="0">
               <a:buNone/>
             </a:pPr>
             <a:r>
@@ -8144,7 +7862,7 @@
             <a:endParaRPr lang="en-US" sz="2000" dirty="0"/>
           </a:p>
           <a:p>
-            <a:pPr indent="0" marL="0">
+            <a:pPr marL="0" indent="0">
               <a:buNone/>
             </a:pPr>
             <a:r>
@@ -8310,7 +8028,7 @@
           </a:solidFill>
           <a:ln/>
           <a:effectLst>
-            <a:outerShdw sx="100000" sy="100000" kx="0" ky="0" algn="bl" rotWithShape="0" blurRad="101600" dist="25400" dir="8100000">
+            <a:outerShdw blurRad="101600" dist="25400" dir="8100000" algn="bl" rotWithShape="0">
               <a:srgbClr val="14332F">
                 <a:alpha val="8000"/>
               </a:srgbClr>
@@ -8339,7 +8057,7 @@
           <a:bodyPr wrap="square" lIns="0" tIns="0" rIns="0" bIns="0" rtlCol="0" anchor="ctr"/>
           <a:lstStyle/>
           <a:p>
-            <a:pPr indent="0" marL="0">
+            <a:pPr marL="0" indent="0">
               <a:buNone/>
             </a:pPr>
             <a:r>
@@ -8398,7 +8116,7 @@
           <a:bodyPr wrap="square" lIns="0" tIns="0" rIns="0" bIns="0" rtlCol="0" anchor="ctr"/>
           <a:lstStyle/>
           <a:p>
-            <a:pPr algn="ctr" indent="0" marL="0">
+            <a:pPr marL="0" indent="0" algn="ctr">
               <a:buNone/>
             </a:pPr>
             <a:r>
@@ -8437,7 +8155,7 @@
           <a:bodyPr wrap="square" lIns="0" tIns="0" rIns="0" bIns="0" rtlCol="0" anchor="ctr"/>
           <a:lstStyle/>
           <a:p>
-            <a:pPr indent="0" marL="0">
+            <a:pPr marL="0" indent="0">
               <a:buNone/>
             </a:pPr>
             <a:r>
@@ -8496,7 +8214,7 @@
           <a:bodyPr wrap="square" lIns="0" tIns="0" rIns="0" bIns="0" rtlCol="0" anchor="ctr"/>
           <a:lstStyle/>
           <a:p>
-            <a:pPr algn="ctr" indent="0" marL="0">
+            <a:pPr marL="0" indent="0" algn="ctr">
               <a:buNone/>
             </a:pPr>
             <a:r>
@@ -8535,7 +8253,7 @@
           <a:bodyPr wrap="square" lIns="0" tIns="0" rIns="0" bIns="0" rtlCol="0" anchor="ctr"/>
           <a:lstStyle/>
           <a:p>
-            <a:pPr indent="0" marL="0">
+            <a:pPr marL="0" indent="0">
               <a:buNone/>
             </a:pPr>
             <a:r>
@@ -8594,7 +8312,7 @@
           <a:bodyPr wrap="square" lIns="0" tIns="0" rIns="0" bIns="0" rtlCol="0" anchor="ctr"/>
           <a:lstStyle/>
           <a:p>
-            <a:pPr algn="ctr" indent="0" marL="0">
+            <a:pPr marL="0" indent="0" algn="ctr">
               <a:buNone/>
             </a:pPr>
             <a:r>
@@ -8633,7 +8351,7 @@
           <a:bodyPr wrap="square" lIns="0" tIns="0" rIns="0" bIns="0" rtlCol="0" anchor="ctr"/>
           <a:lstStyle/>
           <a:p>
-            <a:pPr indent="0" marL="0">
+            <a:pPr marL="0" indent="0">
               <a:buNone/>
             </a:pPr>
             <a:r>
@@ -8692,7 +8410,7 @@
           <a:bodyPr wrap="square" lIns="0" tIns="0" rIns="0" bIns="0" rtlCol="0" anchor="ctr"/>
           <a:lstStyle/>
           <a:p>
-            <a:pPr algn="ctr" indent="0" marL="0">
+            <a:pPr marL="0" indent="0" algn="ctr">
               <a:buNone/>
             </a:pPr>
             <a:r>
@@ -8731,7 +8449,7 @@
           <a:bodyPr wrap="square" lIns="0" tIns="0" rIns="0" bIns="0" rtlCol="0" anchor="ctr"/>
           <a:lstStyle/>
           <a:p>
-            <a:pPr indent="0" marL="0">
+            <a:pPr marL="0" indent="0">
               <a:buNone/>
             </a:pPr>
             <a:r>
@@ -8790,7 +8508,7 @@
           <a:bodyPr wrap="square" lIns="0" tIns="0" rIns="0" bIns="0" rtlCol="0" anchor="ctr"/>
           <a:lstStyle/>
           <a:p>
-            <a:pPr algn="ctr" indent="0" marL="0">
+            <a:pPr marL="0" indent="0" algn="ctr">
               <a:buNone/>
             </a:pPr>
             <a:r>
@@ -8829,7 +8547,7 @@
           <a:bodyPr wrap="square" lIns="0" tIns="0" rIns="0" bIns="0" rtlCol="0" anchor="ctr"/>
           <a:lstStyle/>
           <a:p>
-            <a:pPr indent="0" marL="0">
+            <a:pPr marL="0" indent="0">
               <a:buNone/>
             </a:pPr>
             <a:r>
@@ -8868,7 +8586,7 @@
           <a:bodyPr wrap="square" lIns="0" tIns="0" rIns="0" bIns="0" rtlCol="0" anchor="ctr"/>
           <a:lstStyle/>
           <a:p>
-            <a:pPr indent="0" marL="0">
+            <a:pPr marL="0" indent="0">
               <a:buNone/>
             </a:pPr>
             <a:r>
@@ -8907,7 +8625,7 @@
           <a:bodyPr wrap="square" lIns="0" tIns="0" rIns="0" bIns="0" rtlCol="0" anchor="ctr"/>
           <a:lstStyle/>
           <a:p>
-            <a:pPr algn="r" indent="0" marL="0">
+            <a:pPr marL="0" indent="0" algn="r">
               <a:buNone/>
             </a:pPr>
             <a:r>
@@ -8991,11 +8709,11 @@
           <a:bodyPr wrap="square" lIns="0" tIns="0" rIns="0" bIns="0" rtlCol="0" anchor="ctr"/>
           <a:lstStyle/>
           <a:p>
-            <a:pPr indent="0" marL="0">
-              <a:buNone/>
-            </a:pPr>
-            <a:r>
-              <a:rPr lang="en-US" sz="1100" b="1" spc="60" kern="0" dirty="0">
+            <a:pPr marL="0" indent="0">
+              <a:buNone/>
+            </a:pPr>
+            <a:r>
+              <a:rPr lang="en-US" sz="1100" b="1" kern="0" spc="60" dirty="0">
                 <a:solidFill>
                   <a:srgbClr val="6FCFC0"/>
                 </a:solidFill>
@@ -9030,7 +8748,7 @@
           <a:bodyPr wrap="square" lIns="0" tIns="0" rIns="0" bIns="0" rtlCol="0" anchor="ctr"/>
           <a:lstStyle/>
           <a:p>
-            <a:pPr indent="0" marL="0">
+            <a:pPr marL="0" indent="0">
               <a:buNone/>
             </a:pPr>
             <a:r>
@@ -9091,7 +8809,7 @@
           <a:bodyPr wrap="square" lIns="0" tIns="0" rIns="0" bIns="0" rtlCol="0" anchor="ctr"/>
           <a:lstStyle/>
           <a:p>
-            <a:pPr indent="0" marL="0">
+            <a:pPr marL="0" indent="0">
               <a:buNone/>
             </a:pPr>
             <a:r>
@@ -9130,7 +8848,7 @@
           <a:bodyPr wrap="square" lIns="0" tIns="0" rIns="0" bIns="0" rtlCol="0" anchor="t"/>
           <a:lstStyle/>
           <a:p>
-            <a:pPr indent="0" marL="0">
+            <a:pPr marL="0" indent="0">
               <a:buNone/>
             </a:pPr>
             <a:r>
@@ -9147,7 +8865,7 @@
             <a:endParaRPr lang="en-US" sz="1500" dirty="0"/>
           </a:p>
           <a:p>
-            <a:pPr indent="0" marL="0">
+            <a:pPr marL="0" indent="0">
               <a:buNone/>
             </a:pPr>
             <a:r>
@@ -9164,7 +8882,7 @@
             <a:endParaRPr lang="en-US" sz="1500" dirty="0"/>
           </a:p>
           <a:p>
-            <a:pPr indent="0" marL="0">
+            <a:pPr marL="0" indent="0">
               <a:buNone/>
             </a:pPr>
             <a:r>
@@ -9181,7 +8899,7 @@
             <a:endParaRPr lang="en-US" sz="1500" dirty="0"/>
           </a:p>
           <a:p>
-            <a:pPr indent="0" marL="0">
+            <a:pPr marL="0" indent="0">
               <a:buNone/>
             </a:pPr>
             <a:r>
@@ -9198,7 +8916,7 @@
             <a:endParaRPr lang="en-US" sz="1500" dirty="0"/>
           </a:p>
           <a:p>
-            <a:pPr indent="0" marL="0">
+            <a:pPr marL="0" indent="0">
               <a:buNone/>
             </a:pPr>
             <a:r>
@@ -9259,7 +8977,7 @@
           <a:bodyPr wrap="square" lIns="0" tIns="0" rIns="0" bIns="0" rtlCol="0" anchor="ctr"/>
           <a:lstStyle/>
           <a:p>
-            <a:pPr indent="0" marL="0">
+            <a:pPr marL="0" indent="0">
               <a:buNone/>
             </a:pPr>
             <a:r>
@@ -9298,7 +9016,7 @@
           <a:bodyPr wrap="square" lIns="0" tIns="0" rIns="0" bIns="0" rtlCol="0" anchor="t"/>
           <a:lstStyle/>
           <a:p>
-            <a:pPr indent="0" marL="0">
+            <a:pPr marL="0" indent="0">
               <a:buNone/>
             </a:pPr>
             <a:r>
@@ -9315,7 +9033,7 @@
             <a:endParaRPr lang="en-US" sz="1500" dirty="0"/>
           </a:p>
           <a:p>
-            <a:pPr indent="0" marL="0">
+            <a:pPr marL="0" indent="0">
               <a:buNone/>
             </a:pPr>
             <a:r>
@@ -9332,7 +9050,7 @@
             <a:endParaRPr lang="en-US" sz="1500" dirty="0"/>
           </a:p>
           <a:p>
-            <a:pPr indent="0" marL="0">
+            <a:pPr marL="0" indent="0">
               <a:buNone/>
             </a:pPr>
             <a:r>
@@ -9349,7 +9067,7 @@
             <a:endParaRPr lang="en-US" sz="1500" dirty="0"/>
           </a:p>
           <a:p>
-            <a:pPr indent="0" marL="0">
+            <a:pPr marL="0" indent="0">
               <a:buNone/>
             </a:pPr>
             <a:r>
@@ -9410,7 +9128,7 @@
           <a:bodyPr wrap="square" lIns="0" tIns="0" rIns="0" bIns="0" rtlCol="0" anchor="ctr"/>
           <a:lstStyle/>
           <a:p>
-            <a:pPr indent="0" marL="0">
+            <a:pPr marL="0" indent="0">
               <a:buNone/>
             </a:pPr>
             <a:r>
@@ -9449,7 +9167,7 @@
           <a:bodyPr wrap="square" lIns="0" tIns="0" rIns="0" bIns="0" rtlCol="0" anchor="t"/>
           <a:lstStyle/>
           <a:p>
-            <a:pPr indent="0" marL="0">
+            <a:pPr marL="0" indent="0">
               <a:buNone/>
             </a:pPr>
             <a:r>
@@ -9466,7 +9184,7 @@
             <a:endParaRPr lang="en-US" sz="1500" dirty="0"/>
           </a:p>
           <a:p>
-            <a:pPr indent="0" marL="0">
+            <a:pPr marL="0" indent="0">
               <a:buNone/>
             </a:pPr>
             <a:r>
@@ -9483,7 +9201,7 @@
             <a:endParaRPr lang="en-US" sz="1500" dirty="0"/>
           </a:p>
           <a:p>
-            <a:pPr indent="0" marL="0">
+            <a:pPr marL="0" indent="0">
               <a:buNone/>
             </a:pPr>
             <a:r>
@@ -9500,7 +9218,7 @@
             <a:endParaRPr lang="en-US" sz="1500" dirty="0"/>
           </a:p>
           <a:p>
-            <a:pPr indent="0" marL="0">
+            <a:pPr marL="0" indent="0">
               <a:buNone/>
             </a:pPr>
             <a:r>
@@ -9539,7 +9257,7 @@
           <a:bodyPr wrap="square" lIns="0" tIns="0" rIns="0" bIns="0" rtlCol="0" anchor="ctr"/>
           <a:lstStyle/>
           <a:p>
-            <a:pPr algn="ctr" indent="0" marL="0">
+            <a:pPr marL="0" indent="0" algn="ctr">
               <a:buNone/>
             </a:pPr>
             <a:r>
@@ -9578,7 +9296,7 @@
           <a:bodyPr wrap="square" lIns="0" tIns="0" rIns="0" bIns="0" rtlCol="0" anchor="ctr"/>
           <a:lstStyle/>
           <a:p>
-            <a:pPr indent="0" marL="0">
+            <a:pPr marL="0" indent="0">
               <a:buNone/>
             </a:pPr>
             <a:r>
@@ -9617,7 +9335,7 @@
           <a:bodyPr wrap="square" lIns="0" tIns="0" rIns="0" bIns="0" rtlCol="0" anchor="ctr"/>
           <a:lstStyle/>
           <a:p>
-            <a:pPr algn="r" indent="0" marL="0">
+            <a:pPr marL="0" indent="0" algn="r">
               <a:buNone/>
             </a:pPr>
             <a:r>
@@ -9701,11 +9419,11 @@
           <a:bodyPr wrap="square" lIns="0" tIns="0" rIns="0" bIns="0" rtlCol="0" anchor="ctr"/>
           <a:lstStyle/>
           <a:p>
-            <a:pPr indent="0" marL="0">
-              <a:buNone/>
-            </a:pPr>
-            <a:r>
-              <a:rPr lang="en-US" sz="1100" b="1" spc="60" kern="0" dirty="0">
+            <a:pPr marL="0" indent="0">
+              <a:buNone/>
+            </a:pPr>
+            <a:r>
+              <a:rPr lang="en-US" sz="1100" b="1" kern="0" spc="60" dirty="0">
                 <a:solidFill>
                   <a:srgbClr val="E85D3A"/>
                 </a:solidFill>
@@ -9740,7 +9458,7 @@
           <a:bodyPr wrap="square" lIns="0" tIns="0" rIns="0" bIns="0" rtlCol="0" anchor="ctr"/>
           <a:lstStyle/>
           <a:p>
-            <a:pPr indent="0" marL="0">
+            <a:pPr marL="0" indent="0">
               <a:buNone/>
             </a:pPr>
             <a:r>
@@ -9779,7 +9497,7 @@
           </a:solidFill>
           <a:ln/>
           <a:effectLst>
-            <a:outerShdw sx="100000" sy="100000" kx="0" ky="0" algn="bl" rotWithShape="0" blurRad="101600" dist="25400" dir="8100000">
+            <a:outerShdw blurRad="101600" dist="25400" dir="8100000" algn="bl" rotWithShape="0">
               <a:srgbClr val="14332F">
                 <a:alpha val="8000"/>
               </a:srgbClr>
@@ -9830,7 +9548,7 @@
           <a:bodyPr wrap="square" lIns="0" tIns="0" rIns="0" bIns="0" rtlCol="0" anchor="ctr"/>
           <a:lstStyle/>
           <a:p>
-            <a:pPr algn="ctr" indent="0" marL="0">
+            <a:pPr marL="0" indent="0" algn="ctr">
               <a:buNone/>
             </a:pPr>
             <a:r>
@@ -9869,7 +9587,7 @@
           <a:bodyPr wrap="square" lIns="0" tIns="0" rIns="0" bIns="0" rtlCol="0" anchor="ctr"/>
           <a:lstStyle/>
           <a:p>
-            <a:pPr indent="0" marL="0">
+            <a:pPr marL="0" indent="0">
               <a:buNone/>
             </a:pPr>
             <a:r>
@@ -9908,7 +9626,7 @@
           <a:bodyPr wrap="square" lIns="0" tIns="0" rIns="0" bIns="0" rtlCol="0" anchor="ctr"/>
           <a:lstStyle/>
           <a:p>
-            <a:pPr indent="0" marL="0">
+            <a:pPr marL="0" indent="0">
               <a:buNone/>
             </a:pPr>
             <a:r>
@@ -9947,7 +9665,7 @@
           <a:bodyPr wrap="square" lIns="0" tIns="0" rIns="0" bIns="0" rtlCol="0" anchor="ctr"/>
           <a:lstStyle/>
           <a:p>
-            <a:pPr algn="r" indent="0" marL="0">
+            <a:pPr marL="0" indent="0" algn="r">
               <a:buNone/>
             </a:pPr>
             <a:r>
@@ -9986,7 +9704,7 @@
           </a:solidFill>
           <a:ln/>
           <a:effectLst>
-            <a:outerShdw sx="100000" sy="100000" kx="0" ky="0" algn="bl" rotWithShape="0" blurRad="101600" dist="25400" dir="8100000">
+            <a:outerShdw blurRad="101600" dist="25400" dir="8100000" algn="bl" rotWithShape="0">
               <a:srgbClr val="14332F">
                 <a:alpha val="8000"/>
               </a:srgbClr>
@@ -10037,7 +9755,7 @@
           <a:bodyPr wrap="square" lIns="0" tIns="0" rIns="0" bIns="0" rtlCol="0" anchor="ctr"/>
           <a:lstStyle/>
           <a:p>
-            <a:pPr algn="ctr" indent="0" marL="0">
+            <a:pPr marL="0" indent="0" algn="ctr">
               <a:buNone/>
             </a:pPr>
             <a:r>
@@ -10076,7 +9794,7 @@
           <a:bodyPr wrap="square" lIns="0" tIns="0" rIns="0" bIns="0" rtlCol="0" anchor="ctr"/>
           <a:lstStyle/>
           <a:p>
-            <a:pPr indent="0" marL="0">
+            <a:pPr marL="0" indent="0">
               <a:buNone/>
             </a:pPr>
             <a:r>
@@ -10115,7 +9833,7 @@
           <a:bodyPr wrap="square" lIns="0" tIns="0" rIns="0" bIns="0" rtlCol="0" anchor="ctr"/>
           <a:lstStyle/>
           <a:p>
-            <a:pPr indent="0" marL="0">
+            <a:pPr marL="0" indent="0">
               <a:buNone/>
             </a:pPr>
             <a:r>
@@ -10154,7 +9872,7 @@
           <a:bodyPr wrap="square" lIns="0" tIns="0" rIns="0" bIns="0" rtlCol="0" anchor="ctr"/>
           <a:lstStyle/>
           <a:p>
-            <a:pPr algn="r" indent="0" marL="0">
+            <a:pPr marL="0" indent="0" algn="r">
               <a:buNone/>
             </a:pPr>
             <a:r>
@@ -10193,7 +9911,7 @@
           </a:solidFill>
           <a:ln/>
           <a:effectLst>
-            <a:outerShdw sx="100000" sy="100000" kx="0" ky="0" algn="bl" rotWithShape="0" blurRad="101600" dist="25400" dir="8100000">
+            <a:outerShdw blurRad="101600" dist="25400" dir="8100000" algn="bl" rotWithShape="0">
               <a:srgbClr val="14332F">
                 <a:alpha val="8000"/>
               </a:srgbClr>
@@ -10244,7 +9962,7 @@
           <a:bodyPr wrap="square" lIns="0" tIns="0" rIns="0" bIns="0" rtlCol="0" anchor="ctr"/>
           <a:lstStyle/>
           <a:p>
-            <a:pPr algn="ctr" indent="0" marL="0">
+            <a:pPr marL="0" indent="0" algn="ctr">
               <a:buNone/>
             </a:pPr>
             <a:r>
@@ -10283,7 +10001,7 @@
           <a:bodyPr wrap="square" lIns="0" tIns="0" rIns="0" bIns="0" rtlCol="0" anchor="ctr"/>
           <a:lstStyle/>
           <a:p>
-            <a:pPr indent="0" marL="0">
+            <a:pPr marL="0" indent="0">
               <a:buNone/>
             </a:pPr>
             <a:r>
@@ -10322,7 +10040,7 @@
           <a:bodyPr wrap="square" lIns="0" tIns="0" rIns="0" bIns="0" rtlCol="0" anchor="ctr"/>
           <a:lstStyle/>
           <a:p>
-            <a:pPr indent="0" marL="0">
+            <a:pPr marL="0" indent="0">
               <a:buNone/>
             </a:pPr>
             <a:r>
@@ -10361,7 +10079,7 @@
           <a:bodyPr wrap="square" lIns="0" tIns="0" rIns="0" bIns="0" rtlCol="0" anchor="ctr"/>
           <a:lstStyle/>
           <a:p>
-            <a:pPr algn="r" indent="0" marL="0">
+            <a:pPr marL="0" indent="0" algn="r">
               <a:buNone/>
             </a:pPr>
             <a:r>
@@ -10400,7 +10118,7 @@
           </a:solidFill>
           <a:ln/>
           <a:effectLst>
-            <a:outerShdw sx="100000" sy="100000" kx="0" ky="0" algn="bl" rotWithShape="0" blurRad="101600" dist="25400" dir="8100000">
+            <a:outerShdw blurRad="101600" dist="25400" dir="8100000" algn="bl" rotWithShape="0">
               <a:srgbClr val="14332F">
                 <a:alpha val="8000"/>
               </a:srgbClr>
@@ -10451,7 +10169,7 @@
           <a:bodyPr wrap="square" lIns="0" tIns="0" rIns="0" bIns="0" rtlCol="0" anchor="ctr"/>
           <a:lstStyle/>
           <a:p>
-            <a:pPr algn="ctr" indent="0" marL="0">
+            <a:pPr marL="0" indent="0" algn="ctr">
               <a:buNone/>
             </a:pPr>
             <a:r>
@@ -10490,7 +10208,7 @@
           <a:bodyPr wrap="square" lIns="0" tIns="0" rIns="0" bIns="0" rtlCol="0" anchor="ctr"/>
           <a:lstStyle/>
           <a:p>
-            <a:pPr indent="0" marL="0">
+            <a:pPr marL="0" indent="0">
               <a:buNone/>
             </a:pPr>
             <a:r>
@@ -10529,7 +10247,7 @@
           <a:bodyPr wrap="square" lIns="0" tIns="0" rIns="0" bIns="0" rtlCol="0" anchor="ctr"/>
           <a:lstStyle/>
           <a:p>
-            <a:pPr indent="0" marL="0">
+            <a:pPr marL="0" indent="0">
               <a:buNone/>
             </a:pPr>
             <a:r>
@@ -10568,7 +10286,7 @@
           <a:bodyPr wrap="square" lIns="0" tIns="0" rIns="0" bIns="0" rtlCol="0" anchor="ctr"/>
           <a:lstStyle/>
           <a:p>
-            <a:pPr algn="r" indent="0" marL="0">
+            <a:pPr marL="0" indent="0" algn="r">
               <a:buNone/>
             </a:pPr>
             <a:r>
@@ -10607,7 +10325,7 @@
           </a:solidFill>
           <a:ln/>
           <a:effectLst>
-            <a:outerShdw sx="100000" sy="100000" kx="0" ky="0" algn="bl" rotWithShape="0" blurRad="101600" dist="25400" dir="8100000">
+            <a:outerShdw blurRad="101600" dist="25400" dir="8100000" algn="bl" rotWithShape="0">
               <a:srgbClr val="14332F">
                 <a:alpha val="8000"/>
               </a:srgbClr>
@@ -10658,7 +10376,7 @@
           <a:bodyPr wrap="square" lIns="0" tIns="0" rIns="0" bIns="0" rtlCol="0" anchor="ctr"/>
           <a:lstStyle/>
           <a:p>
-            <a:pPr algn="ctr" indent="0" marL="0">
+            <a:pPr marL="0" indent="0" algn="ctr">
               <a:buNone/>
             </a:pPr>
             <a:r>
@@ -10697,7 +10415,7 @@
           <a:bodyPr wrap="square" lIns="0" tIns="0" rIns="0" bIns="0" rtlCol="0" anchor="ctr"/>
           <a:lstStyle/>
           <a:p>
-            <a:pPr indent="0" marL="0">
+            <a:pPr marL="0" indent="0">
               <a:buNone/>
             </a:pPr>
             <a:r>
@@ -10736,7 +10454,7 @@
           <a:bodyPr wrap="square" lIns="0" tIns="0" rIns="0" bIns="0" rtlCol="0" anchor="ctr"/>
           <a:lstStyle/>
           <a:p>
-            <a:pPr indent="0" marL="0">
+            <a:pPr marL="0" indent="0">
               <a:buNone/>
             </a:pPr>
             <a:r>
@@ -10775,7 +10493,7 @@
           <a:bodyPr wrap="square" lIns="0" tIns="0" rIns="0" bIns="0" rtlCol="0" anchor="ctr"/>
           <a:lstStyle/>
           <a:p>
-            <a:pPr algn="r" indent="0" marL="0">
+            <a:pPr marL="0" indent="0" algn="r">
               <a:buNone/>
             </a:pPr>
             <a:r>
@@ -10814,7 +10532,7 @@
           </a:solidFill>
           <a:ln/>
           <a:effectLst>
-            <a:outerShdw sx="100000" sy="100000" kx="0" ky="0" algn="bl" rotWithShape="0" blurRad="101600" dist="25400" dir="8100000">
+            <a:outerShdw blurRad="101600" dist="25400" dir="8100000" algn="bl" rotWithShape="0">
               <a:srgbClr val="14332F">
                 <a:alpha val="8000"/>
               </a:srgbClr>
@@ -10865,7 +10583,7 @@
           <a:bodyPr wrap="square" lIns="0" tIns="0" rIns="0" bIns="0" rtlCol="0" anchor="ctr"/>
           <a:lstStyle/>
           <a:p>
-            <a:pPr algn="ctr" indent="0" marL="0">
+            <a:pPr marL="0" indent="0" algn="ctr">
               <a:buNone/>
             </a:pPr>
             <a:r>
@@ -10904,7 +10622,7 @@
           <a:bodyPr wrap="square" lIns="0" tIns="0" rIns="0" bIns="0" rtlCol="0" anchor="ctr"/>
           <a:lstStyle/>
           <a:p>
-            <a:pPr indent="0" marL="0">
+            <a:pPr marL="0" indent="0">
               <a:buNone/>
             </a:pPr>
             <a:r>
@@ -10943,7 +10661,7 @@
           <a:bodyPr wrap="square" lIns="0" tIns="0" rIns="0" bIns="0" rtlCol="0" anchor="ctr"/>
           <a:lstStyle/>
           <a:p>
-            <a:pPr indent="0" marL="0">
+            <a:pPr marL="0" indent="0">
               <a:buNone/>
             </a:pPr>
             <a:r>
@@ -10982,7 +10700,7 @@
           <a:bodyPr wrap="square" lIns="0" tIns="0" rIns="0" bIns="0" rtlCol="0" anchor="ctr"/>
           <a:lstStyle/>
           <a:p>
-            <a:pPr algn="r" indent="0" marL="0">
+            <a:pPr marL="0" indent="0" algn="r">
               <a:buNone/>
             </a:pPr>
             <a:r>
@@ -11021,7 +10739,7 @@
           </a:solidFill>
           <a:ln/>
           <a:effectLst>
-            <a:outerShdw sx="100000" sy="100000" kx="0" ky="0" algn="bl" rotWithShape="0" blurRad="101600" dist="25400" dir="8100000">
+            <a:outerShdw blurRad="101600" dist="25400" dir="8100000" algn="bl" rotWithShape="0">
               <a:srgbClr val="14332F">
                 <a:alpha val="8000"/>
               </a:srgbClr>
@@ -11072,7 +10790,7 @@
           <a:bodyPr wrap="square" lIns="0" tIns="0" rIns="0" bIns="0" rtlCol="0" anchor="ctr"/>
           <a:lstStyle/>
           <a:p>
-            <a:pPr algn="ctr" indent="0" marL="0">
+            <a:pPr marL="0" indent="0" algn="ctr">
               <a:buNone/>
             </a:pPr>
             <a:r>
@@ -11111,7 +10829,7 @@
           <a:bodyPr wrap="square" lIns="0" tIns="0" rIns="0" bIns="0" rtlCol="0" anchor="ctr"/>
           <a:lstStyle/>
           <a:p>
-            <a:pPr indent="0" marL="0">
+            <a:pPr marL="0" indent="0">
               <a:buNone/>
             </a:pPr>
             <a:r>
@@ -11150,7 +10868,7 @@
           <a:bodyPr wrap="square" lIns="0" tIns="0" rIns="0" bIns="0" rtlCol="0" anchor="ctr"/>
           <a:lstStyle/>
           <a:p>
-            <a:pPr indent="0" marL="0">
+            <a:pPr marL="0" indent="0">
               <a:buNone/>
             </a:pPr>
             <a:r>
@@ -11189,7 +10907,7 @@
           <a:bodyPr wrap="square" lIns="0" tIns="0" rIns="0" bIns="0" rtlCol="0" anchor="ctr"/>
           <a:lstStyle/>
           <a:p>
-            <a:pPr algn="r" indent="0" marL="0">
+            <a:pPr marL="0" indent="0" algn="r">
               <a:buNone/>
             </a:pPr>
             <a:r>
@@ -11228,7 +10946,7 @@
           <a:bodyPr wrap="square" lIns="0" tIns="0" rIns="0" bIns="0" rtlCol="0" anchor="ctr"/>
           <a:lstStyle/>
           <a:p>
-            <a:pPr indent="0" marL="0">
+            <a:pPr marL="0" indent="0">
               <a:buNone/>
             </a:pPr>
             <a:r>
@@ -11267,7 +10985,7 @@
           <a:bodyPr wrap="square" lIns="0" tIns="0" rIns="0" bIns="0" rtlCol="0" anchor="ctr"/>
           <a:lstStyle/>
           <a:p>
-            <a:pPr algn="r" indent="0" marL="0">
+            <a:pPr marL="0" indent="0" algn="r">
               <a:buNone/>
             </a:pPr>
             <a:r>
@@ -11351,11 +11069,11 @@
           <a:bodyPr wrap="square" lIns="0" tIns="0" rIns="0" bIns="0" rtlCol="0" anchor="ctr"/>
           <a:lstStyle/>
           <a:p>
-            <a:pPr indent="0" marL="0">
-              <a:buNone/>
-            </a:pPr>
-            <a:r>
-              <a:rPr lang="en-US" sz="1100" b="1" spc="60" kern="0" dirty="0">
+            <a:pPr marL="0" indent="0">
+              <a:buNone/>
+            </a:pPr>
+            <a:r>
+              <a:rPr lang="en-US" sz="1100" b="1" kern="0" spc="60" dirty="0">
                 <a:solidFill>
                   <a:srgbClr val="E85D3A"/>
                 </a:solidFill>
@@ -11390,7 +11108,7 @@
           <a:bodyPr wrap="square" lIns="0" tIns="0" rIns="0" bIns="0" rtlCol="0" anchor="ctr"/>
           <a:lstStyle/>
           <a:p>
-            <a:pPr indent="0" marL="0">
+            <a:pPr marL="0" indent="0">
               <a:buNone/>
             </a:pPr>
             <a:r>
@@ -11429,7 +11147,7 @@
           </a:solidFill>
           <a:ln/>
           <a:effectLst>
-            <a:outerShdw sx="100000" sy="100000" kx="0" ky="0" algn="bl" rotWithShape="0" blurRad="101600" dist="25400" dir="8100000">
+            <a:outerShdw blurRad="101600" dist="25400" dir="8100000" algn="bl" rotWithShape="0">
               <a:srgbClr val="14332F">
                 <a:alpha val="8000"/>
               </a:srgbClr>
@@ -11478,7 +11196,7 @@
           <a:bodyPr wrap="square" lIns="0" tIns="0" rIns="0" bIns="0" rtlCol="0" anchor="ctr"/>
           <a:lstStyle/>
           <a:p>
-            <a:pPr indent="0" marL="0">
+            <a:pPr marL="0" indent="0">
               <a:buNone/>
             </a:pPr>
             <a:r>
@@ -11517,7 +11235,7 @@
           <a:bodyPr wrap="square" lIns="0" tIns="0" rIns="0" bIns="0" rtlCol="0" anchor="ctr"/>
           <a:lstStyle/>
           <a:p>
-            <a:pPr indent="0" marL="0">
+            <a:pPr marL="0" indent="0">
               <a:buNone/>
             </a:pPr>
             <a:r>
@@ -11556,7 +11274,7 @@
           <a:bodyPr wrap="square" lIns="0" tIns="0" rIns="0" bIns="0" rtlCol="0" anchor="ctr"/>
           <a:lstStyle/>
           <a:p>
-            <a:pPr indent="0" marL="0">
+            <a:pPr marL="0" indent="0">
               <a:buNone/>
             </a:pPr>
             <a:r>
@@ -11595,7 +11313,7 @@
           <a:bodyPr wrap="square" lIns="0" tIns="0" rIns="0" bIns="0" rtlCol="0" anchor="ctr"/>
           <a:lstStyle/>
           <a:p>
-            <a:pPr indent="0" marL="0">
+            <a:pPr marL="0" indent="0">
               <a:buNone/>
             </a:pPr>
             <a:r>
@@ -11761,7 +11479,7 @@
           </a:solidFill>
           <a:ln/>
           <a:effectLst>
-            <a:outerShdw sx="100000" sy="100000" kx="0" ky="0" algn="bl" rotWithShape="0" blurRad="101600" dist="25400" dir="8100000">
+            <a:outerShdw blurRad="101600" dist="25400" dir="8100000" algn="bl" rotWithShape="0">
               <a:srgbClr val="14332F">
                 <a:alpha val="8000"/>
               </a:srgbClr>
@@ -11810,7 +11528,7 @@
           <a:bodyPr wrap="square" lIns="0" tIns="0" rIns="0" bIns="0" rtlCol="0" anchor="ctr"/>
           <a:lstStyle/>
           <a:p>
-            <a:pPr indent="0" marL="0">
+            <a:pPr marL="0" indent="0">
               <a:buNone/>
             </a:pPr>
             <a:r>
@@ -11849,7 +11567,7 @@
           <a:bodyPr wrap="square" lIns="0" tIns="0" rIns="0" bIns="0" rtlCol="0" anchor="ctr"/>
           <a:lstStyle/>
           <a:p>
-            <a:pPr indent="0" marL="0">
+            <a:pPr marL="0" indent="0">
               <a:buNone/>
             </a:pPr>
             <a:r>
@@ -11888,7 +11606,7 @@
           <a:bodyPr wrap="square" lIns="0" tIns="0" rIns="0" bIns="0" rtlCol="0" anchor="ctr"/>
           <a:lstStyle/>
           <a:p>
-            <a:pPr indent="0" marL="0">
+            <a:pPr marL="0" indent="0">
               <a:buNone/>
             </a:pPr>
             <a:r>
@@ -11927,7 +11645,7 @@
           <a:bodyPr wrap="square" lIns="0" tIns="0" rIns="0" bIns="0" rtlCol="0" anchor="ctr"/>
           <a:lstStyle/>
           <a:p>
-            <a:pPr indent="0" marL="0">
+            <a:pPr marL="0" indent="0">
               <a:buNone/>
             </a:pPr>
             <a:r>
@@ -12093,7 +11811,7 @@
           <a:bodyPr wrap="square" lIns="0" tIns="0" rIns="0" bIns="0" rtlCol="0" anchor="ctr"/>
           <a:lstStyle/>
           <a:p>
-            <a:pPr indent="0" marL="0">
+            <a:pPr marL="0" indent="0">
               <a:buNone/>
             </a:pPr>
             <a:r>
@@ -12132,7 +11850,7 @@
           <a:bodyPr wrap="square" lIns="0" tIns="0" rIns="0" bIns="0" rtlCol="0" anchor="ctr"/>
           <a:lstStyle/>
           <a:p>
-            <a:pPr algn="r" indent="0" marL="0">
+            <a:pPr marL="0" indent="0" algn="r">
               <a:buNone/>
             </a:pPr>
             <a:r>
@@ -12216,11 +11934,11 @@
           <a:bodyPr wrap="square" lIns="0" tIns="0" rIns="0" bIns="0" rtlCol="0" anchor="ctr"/>
           <a:lstStyle/>
           <a:p>
-            <a:pPr indent="0" marL="0">
-              <a:buNone/>
-            </a:pPr>
-            <a:r>
-              <a:rPr lang="en-US" sz="1100" b="1" spc="60" kern="0" dirty="0">
+            <a:pPr marL="0" indent="0">
+              <a:buNone/>
+            </a:pPr>
+            <a:r>
+              <a:rPr lang="en-US" sz="1100" b="1" kern="0" spc="60" dirty="0">
                 <a:solidFill>
                   <a:srgbClr val="E85D3A"/>
                 </a:solidFill>
@@ -12255,7 +11973,7 @@
           <a:bodyPr wrap="square" lIns="0" tIns="0" rIns="0" bIns="0" rtlCol="0" anchor="ctr"/>
           <a:lstStyle/>
           <a:p>
-            <a:pPr indent="0" marL="0">
+            <a:pPr marL="0" indent="0">
               <a:buNone/>
             </a:pPr>
             <a:r>
@@ -12294,7 +12012,7 @@
           </a:solidFill>
           <a:ln/>
           <a:effectLst>
-            <a:outerShdw sx="100000" sy="100000" kx="0" ky="0" algn="bl" rotWithShape="0" blurRad="101600" dist="25400" dir="8100000">
+            <a:outerShdw blurRad="101600" dist="25400" dir="8100000" algn="bl" rotWithShape="0">
               <a:srgbClr val="14332F">
                 <a:alpha val="8000"/>
               </a:srgbClr>
@@ -12323,7 +12041,7 @@
           <a:bodyPr wrap="square" lIns="0" tIns="0" rIns="0" bIns="0" rtlCol="0" anchor="ctr"/>
           <a:lstStyle/>
           <a:p>
-            <a:pPr indent="0" marL="0">
+            <a:pPr marL="0" indent="0">
               <a:buNone/>
             </a:pPr>
             <a:r>
@@ -12362,7 +12080,7 @@
           <a:bodyPr wrap="square" lIns="0" tIns="0" rIns="0" bIns="0" rtlCol="0" anchor="ctr"/>
           <a:lstStyle/>
           <a:p>
-            <a:pPr indent="0" marL="0">
+            <a:pPr marL="0" indent="0">
               <a:buNone/>
             </a:pPr>
             <a:r>
@@ -12401,7 +12119,7 @@
           <a:bodyPr wrap="square" lIns="0" tIns="0" rIns="0" bIns="0" rtlCol="0" anchor="ctr"/>
           <a:lstStyle/>
           <a:p>
-            <a:pPr indent="0" marL="0">
+            <a:pPr marL="0" indent="0">
               <a:buNone/>
             </a:pPr>
             <a:r>
@@ -12418,7 +12136,7 @@
             <a:endParaRPr lang="en-US" sz="1400" dirty="0"/>
           </a:p>
           <a:p>
-            <a:pPr indent="0" marL="0">
+            <a:pPr marL="0" indent="0">
               <a:buNone/>
             </a:pPr>
             <a:r>
@@ -12457,7 +12175,7 @@
           </a:solidFill>
           <a:ln/>
           <a:effectLst>
-            <a:outerShdw sx="100000" sy="100000" kx="0" ky="0" algn="bl" rotWithShape="0" blurRad="101600" dist="25400" dir="8100000">
+            <a:outerShdw blurRad="101600" dist="25400" dir="8100000" algn="bl" rotWithShape="0">
               <a:srgbClr val="14332F">
                 <a:alpha val="8000"/>
               </a:srgbClr>
@@ -12486,7 +12204,7 @@
           <a:bodyPr wrap="square" lIns="0" tIns="0" rIns="0" bIns="0" rtlCol="0" anchor="ctr"/>
           <a:lstStyle/>
           <a:p>
-            <a:pPr indent="0" marL="0">
+            <a:pPr marL="0" indent="0">
               <a:buNone/>
             </a:pPr>
             <a:r>
@@ -12525,7 +12243,7 @@
           <a:bodyPr wrap="square" lIns="0" tIns="0" rIns="0" bIns="0" rtlCol="0" anchor="ctr"/>
           <a:lstStyle/>
           <a:p>
-            <a:pPr indent="0" marL="0">
+            <a:pPr marL="0" indent="0">
               <a:buNone/>
             </a:pPr>
             <a:r>
@@ -12564,7 +12282,7 @@
           <a:bodyPr wrap="square" lIns="0" tIns="0" rIns="0" bIns="0" rtlCol="0" anchor="ctr"/>
           <a:lstStyle/>
           <a:p>
-            <a:pPr indent="0" marL="0">
+            <a:pPr marL="0" indent="0">
               <a:buNone/>
             </a:pPr>
             <a:r>
@@ -12581,7 +12299,7 @@
             <a:endParaRPr lang="en-US" sz="1300" dirty="0"/>
           </a:p>
           <a:p>
-            <a:pPr indent="0" marL="0">
+            <a:pPr marL="0" indent="0">
               <a:buNone/>
             </a:pPr>
             <a:r>
@@ -12642,7 +12360,7 @@
           <a:bodyPr wrap="square" lIns="0" tIns="0" rIns="0" bIns="0" rtlCol="0" anchor="ctr"/>
           <a:lstStyle/>
           <a:p>
-            <a:pPr algn="ctr" indent="0" marL="0">
+            <a:pPr marL="0" indent="0" algn="ctr">
               <a:buNone/>
             </a:pPr>
             <a:r>
@@ -12681,7 +12399,7 @@
           <a:bodyPr wrap="square" lIns="0" tIns="0" rIns="0" bIns="0" rtlCol="0" anchor="ctr"/>
           <a:lstStyle/>
           <a:p>
-            <a:pPr algn="ctr" indent="0" marL="0">
+            <a:pPr marL="0" indent="0" algn="ctr">
               <a:buNone/>
             </a:pPr>
             <a:r>
@@ -12742,7 +12460,7 @@
           <a:bodyPr wrap="square" lIns="0" tIns="0" rIns="0" bIns="0" rtlCol="0" anchor="ctr"/>
           <a:lstStyle/>
           <a:p>
-            <a:pPr algn="ctr" indent="0" marL="0">
+            <a:pPr marL="0" indent="0" algn="ctr">
               <a:buNone/>
             </a:pPr>
             <a:r>
@@ -12781,7 +12499,7 @@
           <a:bodyPr wrap="square" lIns="0" tIns="0" rIns="0" bIns="0" rtlCol="0" anchor="ctr"/>
           <a:lstStyle/>
           <a:p>
-            <a:pPr algn="ctr" indent="0" marL="0">
+            <a:pPr marL="0" indent="0" algn="ctr">
               <a:buNone/>
             </a:pPr>
             <a:r>
@@ -12842,7 +12560,7 @@
           <a:bodyPr wrap="square" lIns="0" tIns="0" rIns="0" bIns="0" rtlCol="0" anchor="ctr"/>
           <a:lstStyle/>
           <a:p>
-            <a:pPr algn="ctr" indent="0" marL="0">
+            <a:pPr marL="0" indent="0" algn="ctr">
               <a:buNone/>
             </a:pPr>
             <a:r>
@@ -12881,7 +12599,7 @@
           <a:bodyPr wrap="square" lIns="0" tIns="0" rIns="0" bIns="0" rtlCol="0" anchor="ctr"/>
           <a:lstStyle/>
           <a:p>
-            <a:pPr algn="ctr" indent="0" marL="0">
+            <a:pPr marL="0" indent="0" algn="ctr">
               <a:buNone/>
             </a:pPr>
             <a:r>
@@ -12942,7 +12660,7 @@
           <a:bodyPr wrap="square" lIns="0" tIns="0" rIns="0" bIns="0" rtlCol="0" anchor="ctr"/>
           <a:lstStyle/>
           <a:p>
-            <a:pPr algn="ctr" indent="0" marL="0">
+            <a:pPr marL="0" indent="0" algn="ctr">
               <a:buNone/>
             </a:pPr>
             <a:r>
@@ -12981,7 +12699,7 @@
           <a:bodyPr wrap="square" lIns="0" tIns="0" rIns="0" bIns="0" rtlCol="0" anchor="ctr"/>
           <a:lstStyle/>
           <a:p>
-            <a:pPr algn="ctr" indent="0" marL="0">
+            <a:pPr marL="0" indent="0" algn="ctr">
               <a:buNone/>
             </a:pPr>
             <a:r>
@@ -13042,7 +12760,7 @@
           <a:bodyPr wrap="square" lIns="0" tIns="0" rIns="0" bIns="0" rtlCol="0" anchor="ctr"/>
           <a:lstStyle/>
           <a:p>
-            <a:pPr algn="ctr" indent="0" marL="0">
+            <a:pPr marL="0" indent="0" algn="ctr">
               <a:buNone/>
             </a:pPr>
             <a:r>
@@ -13081,7 +12799,7 @@
           <a:bodyPr wrap="square" lIns="0" tIns="0" rIns="0" bIns="0" rtlCol="0" anchor="ctr"/>
           <a:lstStyle/>
           <a:p>
-            <a:pPr algn="ctr" indent="0" marL="0">
+            <a:pPr marL="0" indent="0" algn="ctr">
               <a:buNone/>
             </a:pPr>
             <a:r>
@@ -13142,7 +12860,7 @@
           <a:bodyPr wrap="square" lIns="0" tIns="0" rIns="0" bIns="0" rtlCol="0" anchor="ctr"/>
           <a:lstStyle/>
           <a:p>
-            <a:pPr algn="ctr" indent="0" marL="0">
+            <a:pPr marL="0" indent="0" algn="ctr">
               <a:buNone/>
             </a:pPr>
             <a:r>
@@ -13181,7 +12899,7 @@
           <a:bodyPr wrap="square" lIns="0" tIns="0" rIns="0" bIns="0" rtlCol="0" anchor="ctr"/>
           <a:lstStyle/>
           <a:p>
-            <a:pPr algn="ctr" indent="0" marL="0">
+            <a:pPr marL="0" indent="0" algn="ctr">
               <a:buNone/>
             </a:pPr>
             <a:r>
@@ -13220,7 +12938,7 @@
           </a:solidFill>
           <a:ln/>
           <a:effectLst>
-            <a:outerShdw sx="100000" sy="100000" kx="0" ky="0" algn="bl" rotWithShape="0" blurRad="101600" dist="25400" dir="8100000">
+            <a:outerShdw blurRad="101600" dist="25400" dir="8100000" algn="bl" rotWithShape="0">
               <a:srgbClr val="14332F">
                 <a:alpha val="8000"/>
               </a:srgbClr>
@@ -13249,7 +12967,7 @@
           <a:bodyPr wrap="square" lIns="0" tIns="0" rIns="0" bIns="0" rtlCol="0" anchor="ctr"/>
           <a:lstStyle/>
           <a:p>
-            <a:pPr indent="0" marL="0">
+            <a:pPr marL="0" indent="0">
               <a:buNone/>
             </a:pPr>
             <a:r>
@@ -13288,7 +13006,7 @@
           <a:bodyPr wrap="square" lIns="0" tIns="0" rIns="0" bIns="0" rtlCol="0" anchor="ctr"/>
           <a:lstStyle/>
           <a:p>
-            <a:pPr indent="0" marL="0">
+            <a:pPr marL="0" indent="0">
               <a:buNone/>
             </a:pPr>
             <a:r>
@@ -13327,7 +13045,7 @@
           <a:bodyPr wrap="square" lIns="0" tIns="0" rIns="0" bIns="0" rtlCol="0" anchor="ctr"/>
           <a:lstStyle/>
           <a:p>
-            <a:pPr indent="0" marL="0">
+            <a:pPr marL="0" indent="0">
               <a:buNone/>
             </a:pPr>
             <a:r>
@@ -13366,7 +13084,7 @@
           <a:bodyPr wrap="square" lIns="0" tIns="0" rIns="0" bIns="0" rtlCol="0" anchor="ctr"/>
           <a:lstStyle/>
           <a:p>
-            <a:pPr algn="r" indent="0" marL="0">
+            <a:pPr marL="0" indent="0" algn="r">
               <a:buNone/>
             </a:pPr>
             <a:r>
@@ -13450,11 +13168,11 @@
           <a:bodyPr wrap="square" lIns="0" tIns="0" rIns="0" bIns="0" rtlCol="0" anchor="ctr"/>
           <a:lstStyle/>
           <a:p>
-            <a:pPr indent="0" marL="0">
-              <a:buNone/>
-            </a:pPr>
-            <a:r>
-              <a:rPr lang="en-US" sz="1100" b="1" spc="60" kern="0" dirty="0">
+            <a:pPr marL="0" indent="0">
+              <a:buNone/>
+            </a:pPr>
+            <a:r>
+              <a:rPr lang="en-US" sz="1100" b="1" kern="0" spc="60" dirty="0">
                 <a:solidFill>
                   <a:srgbClr val="E85D3A"/>
                 </a:solidFill>
@@ -13489,7 +13207,7 @@
           <a:bodyPr wrap="square" lIns="0" tIns="0" rIns="0" bIns="0" rtlCol="0" anchor="ctr"/>
           <a:lstStyle/>
           <a:p>
-            <a:pPr indent="0" marL="0">
+            <a:pPr marL="0" indent="0">
               <a:buNone/>
             </a:pPr>
             <a:r>
@@ -13528,7 +13246,7 @@
           </a:solidFill>
           <a:ln/>
           <a:effectLst>
-            <a:outerShdw sx="100000" sy="100000" kx="0" ky="0" algn="bl" rotWithShape="0" blurRad="101600" dist="25400" dir="8100000">
+            <a:outerShdw blurRad="101600" dist="25400" dir="8100000" algn="bl" rotWithShape="0">
               <a:srgbClr val="14332F">
                 <a:alpha val="8000"/>
               </a:srgbClr>
@@ -13538,425 +13256,7 @@
       </p:sp>
       <p:pic>
         <p:nvPicPr>
-          <p:cNvPr id="6" name="Image 0" descr="/home/workdir/artifacts/figures/01_charges_hist.png">    </p:cNvPr>
-          <p:cNvPicPr>
-            <a:picLocks noChangeAspect="1"/>
-          </p:cNvPicPr>
-          <p:nvPr/>
-        </p:nvPicPr>
-        <p:blipFill>
-          <a:blip r:embed="rId1"/>
-          <a:stretch>
-            <a:fillRect/>
-          </a:stretch>
-        </p:blipFill>
-        <p:spPr>
-          <a:xfrm>
-            <a:off x="502920" y="1207008"/>
-            <a:ext cx="3520440" cy="2157984"/>
-          </a:xfrm>
-          <a:prstGeom prst="rect">
-            <a:avLst/>
-          </a:prstGeom>
-        </p:spPr>
-      </p:pic>
-      <p:sp>
-        <p:nvSpPr>
-          <p:cNvPr id="7" name="Text 4"/>
-          <p:cNvSpPr/>
-          <p:nvPr/>
-        </p:nvSpPr>
-        <p:spPr>
-          <a:xfrm>
-            <a:off x="548640" y="3456432"/>
-            <a:ext cx="3474720" cy="256032"/>
-          </a:xfrm>
-          <a:prstGeom prst="rect">
-            <a:avLst/>
-          </a:prstGeom>
-          <a:noFill/>
-          <a:ln/>
-        </p:spPr>
-        <p:txBody>
-          <a:bodyPr wrap="square" lIns="0" tIns="0" rIns="0" bIns="0" rtlCol="0" anchor="ctr"/>
-          <a:lstStyle/>
-          <a:p>
-            <a:pPr indent="0" marL="0">
-              <a:buNone/>
-            </a:pPr>
-            <a:r>
-              <a:rPr lang="en-US" sz="1300" b="1" dirty="0">
-                <a:solidFill>
-                  <a:srgbClr val="1A2E2B"/>
-                </a:solidFill>
-                <a:latin typeface="Arial" pitchFamily="34" charset="0"/>
-                <a:ea typeface="Arial" pitchFamily="34" charset="-122"/>
-                <a:cs typeface="Arial" pitchFamily="34" charset="-120"/>
-              </a:rPr>
-              <a:t>01  •  Histogram charges</a:t>
-            </a:r>
-            <a:endParaRPr lang="en-US" sz="1300" dirty="0"/>
-          </a:p>
-        </p:txBody>
-      </p:sp>
-      <p:sp>
-        <p:nvSpPr>
-          <p:cNvPr id="8" name="Text 5"/>
-          <p:cNvSpPr/>
-          <p:nvPr/>
-        </p:nvSpPr>
-        <p:spPr>
-          <a:xfrm>
-            <a:off x="548640" y="3767328"/>
-            <a:ext cx="3474720" cy="658368"/>
-          </a:xfrm>
-          <a:prstGeom prst="rect">
-            <a:avLst/>
-          </a:prstGeom>
-          <a:noFill/>
-          <a:ln/>
-        </p:spPr>
-        <p:txBody>
-          <a:bodyPr wrap="square" lIns="0" tIns="0" rIns="0" bIns="0" rtlCol="0" anchor="ctr"/>
-          <a:lstStyle/>
-          <a:p>
-            <a:pPr indent="0" marL="0">
-              <a:buNone/>
-            </a:pPr>
-            <a:r>
-              <a:rPr lang="en-US" sz="1200" dirty="0">
-                <a:solidFill>
-                  <a:srgbClr val="1A2E2B"/>
-                </a:solidFill>
-                <a:latin typeface="Arial" pitchFamily="34" charset="0"/>
-                <a:ea typeface="Arial" pitchFamily="34" charset="-122"/>
-                <a:cs typeface="Arial" pitchFamily="34" charset="-120"/>
-              </a:rPr>
-              <a:t>Thấy gì? Lệch phải (skew ≈ 1,52). Median 9.382, mean 13.270 USD.</a:t>
-            </a:r>
-            <a:endParaRPr lang="en-US" sz="1200" dirty="0"/>
-          </a:p>
-        </p:txBody>
-      </p:sp>
-      <p:sp>
-        <p:nvSpPr>
-          <p:cNvPr id="9" name="Text 6"/>
-          <p:cNvSpPr/>
-          <p:nvPr/>
-        </p:nvSpPr>
-        <p:spPr>
-          <a:xfrm>
-            <a:off x="548640" y="4425696"/>
-            <a:ext cx="3474720" cy="640080"/>
-          </a:xfrm>
-          <a:prstGeom prst="rect">
-            <a:avLst/>
-          </a:prstGeom>
-          <a:noFill/>
-          <a:ln/>
-        </p:spPr>
-        <p:txBody>
-          <a:bodyPr wrap="square" lIns="0" tIns="0" rIns="0" bIns="0" rtlCol="0" anchor="ctr"/>
-          <a:lstStyle/>
-          <a:p>
-            <a:pPr indent="0" marL="0">
-              <a:buNone/>
-            </a:pPr>
-            <a:r>
-              <a:rPr lang="en-US" sz="1200" dirty="0">
-                <a:solidFill>
-                  <a:srgbClr val="1A2E2B"/>
-                </a:solidFill>
-                <a:latin typeface="Arial" pitchFamily="34" charset="0"/>
-                <a:ea typeface="Arial" pitchFamily="34" charset="-122"/>
-                <a:cs typeface="Arial" pitchFamily="34" charset="-120"/>
-              </a:rPr>
-              <a:t>Ý nghĩa: đuôi cao = người hút thuốc / BMI lớn. MAPE dễ lệch.</a:t>
-            </a:r>
-            <a:endParaRPr lang="en-US" sz="1200" dirty="0"/>
-          </a:p>
-        </p:txBody>
-      </p:sp>
-      <p:sp>
-        <p:nvSpPr>
-          <p:cNvPr id="10" name="Text 7"/>
-          <p:cNvSpPr/>
-          <p:nvPr/>
-        </p:nvSpPr>
-        <p:spPr>
-          <a:xfrm>
-            <a:off x="548640" y="5065776"/>
-            <a:ext cx="3474720" cy="1005840"/>
-          </a:xfrm>
-          <a:prstGeom prst="rect">
-            <a:avLst/>
-          </a:prstGeom>
-          <a:noFill/>
-          <a:ln/>
-        </p:spPr>
-        <p:txBody>
-          <a:bodyPr wrap="square" lIns="0" tIns="0" rIns="0" bIns="0" rtlCol="0" anchor="ctr"/>
-          <a:lstStyle/>
-          <a:p>
-            <a:pPr indent="0" marL="0">
-              <a:buNone/>
-            </a:pPr>
-            <a:r>
-              <a:rPr lang="en-US" sz="1200" dirty="0">
-                <a:solidFill>
-                  <a:srgbClr val="14332F"/>
-                </a:solidFill>
-                <a:latin typeface="Arial" pitchFamily="34" charset="0"/>
-                <a:ea typeface="Arial" pitchFamily="34" charset="-122"/>
-                <a:cs typeface="Arial" pitchFamily="34" charset="-120"/>
-              </a:rPr>
-              <a:t>Quyết định: giữ nguyên đơn vị USD; dùng MAE + RMSE + R²; không cắt outlier.</a:t>
-            </a:r>
-            <a:endParaRPr lang="en-US" sz="1200" dirty="0"/>
-          </a:p>
-        </p:txBody>
-      </p:sp>
-      <p:sp>
-        <p:nvSpPr>
-          <p:cNvPr id="11" name="Shape 8"/>
-          <p:cNvSpPr/>
-          <p:nvPr/>
-        </p:nvSpPr>
-        <p:spPr>
-          <a:xfrm>
-            <a:off x="4251960" y="1078992"/>
-            <a:ext cx="3794760" cy="5212080"/>
-          </a:xfrm>
-          <a:prstGeom prst="roundRect">
-            <a:avLst>
-              <a:gd name="adj" fmla="val 1928"/>
-            </a:avLst>
-          </a:prstGeom>
-          <a:solidFill>
-            <a:srgbClr val="FFFFFF"/>
-          </a:solidFill>
-          <a:ln/>
-          <a:effectLst>
-            <a:outerShdw sx="100000" sy="100000" kx="0" ky="0" algn="bl" rotWithShape="0" blurRad="101600" dist="25400" dir="8100000">
-              <a:srgbClr val="14332F">
-                <a:alpha val="8000"/>
-              </a:srgbClr>
-            </a:outerShdw>
-          </a:effectLst>
-        </p:spPr>
-      </p:sp>
-      <p:pic>
-        <p:nvPicPr>
-          <p:cNvPr id="12" name="Image 1" descr="/home/workdir/artifacts/figures/02_smoker_box.png">    </p:cNvPr>
-          <p:cNvPicPr>
-            <a:picLocks noChangeAspect="1"/>
-          </p:cNvPicPr>
-          <p:nvPr/>
-        </p:nvPicPr>
-        <p:blipFill>
-          <a:blip r:embed="rId2"/>
-          <a:stretch>
-            <a:fillRect/>
-          </a:stretch>
-        </p:blipFill>
-        <p:spPr>
-          <a:xfrm>
-            <a:off x="4389120" y="1207008"/>
-            <a:ext cx="3520440" cy="2157984"/>
-          </a:xfrm>
-          <a:prstGeom prst="rect">
-            <a:avLst/>
-          </a:prstGeom>
-        </p:spPr>
-      </p:pic>
-      <p:sp>
-        <p:nvSpPr>
-          <p:cNvPr id="13" name="Text 9"/>
-          <p:cNvSpPr/>
-          <p:nvPr/>
-        </p:nvSpPr>
-        <p:spPr>
-          <a:xfrm>
-            <a:off x="4434840" y="3456432"/>
-            <a:ext cx="3474720" cy="256032"/>
-          </a:xfrm>
-          <a:prstGeom prst="rect">
-            <a:avLst/>
-          </a:prstGeom>
-          <a:noFill/>
-          <a:ln/>
-        </p:spPr>
-        <p:txBody>
-          <a:bodyPr wrap="square" lIns="0" tIns="0" rIns="0" bIns="0" rtlCol="0" anchor="ctr"/>
-          <a:lstStyle/>
-          <a:p>
-            <a:pPr indent="0" marL="0">
-              <a:buNone/>
-            </a:pPr>
-            <a:r>
-              <a:rPr lang="en-US" sz="1300" b="1" dirty="0">
-                <a:solidFill>
-                  <a:srgbClr val="1A2E2B"/>
-                </a:solidFill>
-                <a:latin typeface="Arial" pitchFamily="34" charset="0"/>
-                <a:ea typeface="Arial" pitchFamily="34" charset="-122"/>
-                <a:cs typeface="Arial" pitchFamily="34" charset="-120"/>
-              </a:rPr>
-              <a:t>02  •  Boxplot smoker × charges</a:t>
-            </a:r>
-            <a:endParaRPr lang="en-US" sz="1300" dirty="0"/>
-          </a:p>
-        </p:txBody>
-      </p:sp>
-      <p:sp>
-        <p:nvSpPr>
-          <p:cNvPr id="14" name="Text 10"/>
-          <p:cNvSpPr/>
-          <p:nvPr/>
-        </p:nvSpPr>
-        <p:spPr>
-          <a:xfrm>
-            <a:off x="4434840" y="3767328"/>
-            <a:ext cx="3474720" cy="658368"/>
-          </a:xfrm>
-          <a:prstGeom prst="rect">
-            <a:avLst/>
-          </a:prstGeom>
-          <a:noFill/>
-          <a:ln/>
-        </p:spPr>
-        <p:txBody>
-          <a:bodyPr wrap="square" lIns="0" tIns="0" rIns="0" bIns="0" rtlCol="0" anchor="ctr"/>
-          <a:lstStyle/>
-          <a:p>
-            <a:pPr indent="0" marL="0">
-              <a:buNone/>
-            </a:pPr>
-            <a:r>
-              <a:rPr lang="en-US" sz="1200" dirty="0">
-                <a:solidFill>
-                  <a:srgbClr val="1A2E2B"/>
-                </a:solidFill>
-                <a:latin typeface="Arial" pitchFamily="34" charset="0"/>
-                <a:ea typeface="Arial" pitchFamily="34" charset="-122"/>
-                <a:cs typeface="Arial" pitchFamily="34" charset="-120"/>
-              </a:rPr>
-              <a:t>Thấy gì? Median yes 34.456 vs no 7.345 — gấp ~4,7 lần. 274/1338 hút thuốc.</a:t>
-            </a:r>
-            <a:endParaRPr lang="en-US" sz="1200" dirty="0"/>
-          </a:p>
-        </p:txBody>
-      </p:sp>
-      <p:sp>
-        <p:nvSpPr>
-          <p:cNvPr id="15" name="Text 11"/>
-          <p:cNvSpPr/>
-          <p:nvPr/>
-        </p:nvSpPr>
-        <p:spPr>
-          <a:xfrm>
-            <a:off x="4434840" y="4425696"/>
-            <a:ext cx="3474720" cy="640080"/>
-          </a:xfrm>
-          <a:prstGeom prst="rect">
-            <a:avLst/>
-          </a:prstGeom>
-          <a:noFill/>
-          <a:ln/>
-        </p:spPr>
-        <p:txBody>
-          <a:bodyPr wrap="square" lIns="0" tIns="0" rIns="0" bIns="0" rtlCol="0" anchor="ctr"/>
-          <a:lstStyle/>
-          <a:p>
-            <a:pPr indent="0" marL="0">
-              <a:buNone/>
-            </a:pPr>
-            <a:r>
-              <a:rPr lang="en-US" sz="1200" dirty="0">
-                <a:solidFill>
-                  <a:srgbClr val="1A2E2B"/>
-                </a:solidFill>
-                <a:latin typeface="Arial" pitchFamily="34" charset="0"/>
-                <a:ea typeface="Arial" pitchFamily="34" charset="-122"/>
-                <a:cs typeface="Arial" pitchFamily="34" charset="-120"/>
-              </a:rPr>
-              <a:t>Ý nghĩa: smoker là đặc trưng mạnh nhất (corr ≈ 0,79).</a:t>
-            </a:r>
-            <a:endParaRPr lang="en-US" sz="1200" dirty="0"/>
-          </a:p>
-        </p:txBody>
-      </p:sp>
-      <p:sp>
-        <p:nvSpPr>
-          <p:cNvPr id="16" name="Text 12"/>
-          <p:cNvSpPr/>
-          <p:nvPr/>
-        </p:nvSpPr>
-        <p:spPr>
-          <a:xfrm>
-            <a:off x="4434840" y="5065776"/>
-            <a:ext cx="3474720" cy="1005840"/>
-          </a:xfrm>
-          <a:prstGeom prst="rect">
-            <a:avLst/>
-          </a:prstGeom>
-          <a:noFill/>
-          <a:ln/>
-        </p:spPr>
-        <p:txBody>
-          <a:bodyPr wrap="square" lIns="0" tIns="0" rIns="0" bIns="0" rtlCol="0" anchor="ctr"/>
-          <a:lstStyle/>
-          <a:p>
-            <a:pPr indent="0" marL="0">
-              <a:buNone/>
-            </a:pPr>
-            <a:r>
-              <a:rPr lang="en-US" sz="1200" dirty="0">
-                <a:solidFill>
-                  <a:srgbClr val="14332F"/>
-                </a:solidFill>
-                <a:latin typeface="Arial" pitchFamily="34" charset="0"/>
-                <a:ea typeface="Arial" pitchFamily="34" charset="-122"/>
-                <a:cs typeface="Arial" pitchFamily="34" charset="-120"/>
-              </a:rPr>
-              <a:t>Quyết định: one-hot smoker; không gộp nhóm; không bỏ outlier đuôi.</a:t>
-            </a:r>
-            <a:endParaRPr lang="en-US" sz="1200" dirty="0"/>
-          </a:p>
-        </p:txBody>
-      </p:sp>
-      <p:sp>
-        <p:nvSpPr>
-          <p:cNvPr id="17" name="Shape 13"/>
-          <p:cNvSpPr/>
-          <p:nvPr/>
-        </p:nvSpPr>
-        <p:spPr>
-          <a:xfrm>
-            <a:off x="8138160" y="1078992"/>
-            <a:ext cx="3703320" cy="5212080"/>
-          </a:xfrm>
-          <a:prstGeom prst="roundRect">
-            <a:avLst>
-              <a:gd name="adj" fmla="val 1975"/>
-            </a:avLst>
-          </a:prstGeom>
-          <a:solidFill>
-            <a:srgbClr val="FFFFFF"/>
-          </a:solidFill>
-          <a:ln/>
-          <a:effectLst>
-            <a:outerShdw sx="100000" sy="100000" kx="0" ky="0" algn="bl" rotWithShape="0" blurRad="101600" dist="25400" dir="8100000">
-              <a:srgbClr val="14332F">
-                <a:alpha val="8000"/>
-              </a:srgbClr>
-            </a:outerShdw>
-          </a:effectLst>
-        </p:spPr>
-      </p:sp>
-      <p:pic>
-        <p:nvPicPr>
-          <p:cNvPr id="18" name="Image 2" descr="/home/workdir/artifacts/figures/03_missing.png">    </p:cNvPr>
+          <p:cNvPr id="6" name="Image 0" descr="/home/workdir/artifacts/figures/01_charges_hist.png"/>
           <p:cNvPicPr>
             <a:picLocks noChangeAspect="1"/>
           </p:cNvPicPr>
@@ -13970,6 +13270,424 @@
         </p:blipFill>
         <p:spPr>
           <a:xfrm>
+            <a:off x="502920" y="1207008"/>
+            <a:ext cx="3520440" cy="2157984"/>
+          </a:xfrm>
+          <a:prstGeom prst="rect">
+            <a:avLst/>
+          </a:prstGeom>
+        </p:spPr>
+      </p:pic>
+      <p:sp>
+        <p:nvSpPr>
+          <p:cNvPr id="7" name="Text 4"/>
+          <p:cNvSpPr/>
+          <p:nvPr/>
+        </p:nvSpPr>
+        <p:spPr>
+          <a:xfrm>
+            <a:off x="548640" y="3456432"/>
+            <a:ext cx="3474720" cy="256032"/>
+          </a:xfrm>
+          <a:prstGeom prst="rect">
+            <a:avLst/>
+          </a:prstGeom>
+          <a:noFill/>
+          <a:ln/>
+        </p:spPr>
+        <p:txBody>
+          <a:bodyPr wrap="square" lIns="0" tIns="0" rIns="0" bIns="0" rtlCol="0" anchor="ctr"/>
+          <a:lstStyle/>
+          <a:p>
+            <a:pPr marL="0" indent="0">
+              <a:buNone/>
+            </a:pPr>
+            <a:r>
+              <a:rPr lang="en-US" sz="1300" b="1" dirty="0">
+                <a:solidFill>
+                  <a:srgbClr val="1A2E2B"/>
+                </a:solidFill>
+                <a:latin typeface="Arial" pitchFamily="34" charset="0"/>
+                <a:ea typeface="Arial" pitchFamily="34" charset="-122"/>
+                <a:cs typeface="Arial" pitchFamily="34" charset="-120"/>
+              </a:rPr>
+              <a:t>01  •  Histogram charges</a:t>
+            </a:r>
+            <a:endParaRPr lang="en-US" sz="1300" dirty="0"/>
+          </a:p>
+        </p:txBody>
+      </p:sp>
+      <p:sp>
+        <p:nvSpPr>
+          <p:cNvPr id="8" name="Text 5"/>
+          <p:cNvSpPr/>
+          <p:nvPr/>
+        </p:nvSpPr>
+        <p:spPr>
+          <a:xfrm>
+            <a:off x="548640" y="3767328"/>
+            <a:ext cx="3474720" cy="658368"/>
+          </a:xfrm>
+          <a:prstGeom prst="rect">
+            <a:avLst/>
+          </a:prstGeom>
+          <a:noFill/>
+          <a:ln/>
+        </p:spPr>
+        <p:txBody>
+          <a:bodyPr wrap="square" lIns="0" tIns="0" rIns="0" bIns="0" rtlCol="0" anchor="ctr"/>
+          <a:lstStyle/>
+          <a:p>
+            <a:pPr marL="0" indent="0">
+              <a:buNone/>
+            </a:pPr>
+            <a:r>
+              <a:rPr lang="en-US" sz="1200" dirty="0">
+                <a:solidFill>
+                  <a:srgbClr val="1A2E2B"/>
+                </a:solidFill>
+                <a:latin typeface="Arial" pitchFamily="34" charset="0"/>
+                <a:ea typeface="Arial" pitchFamily="34" charset="-122"/>
+                <a:cs typeface="Arial" pitchFamily="34" charset="-120"/>
+              </a:rPr>
+              <a:t>Thấy gì? Lệch phải (skew ≈ 1,52). Median 9.382, mean 13.270 USD.</a:t>
+            </a:r>
+            <a:endParaRPr lang="en-US" sz="1200" dirty="0"/>
+          </a:p>
+        </p:txBody>
+      </p:sp>
+      <p:sp>
+        <p:nvSpPr>
+          <p:cNvPr id="9" name="Text 6"/>
+          <p:cNvSpPr/>
+          <p:nvPr/>
+        </p:nvSpPr>
+        <p:spPr>
+          <a:xfrm>
+            <a:off x="548640" y="4425696"/>
+            <a:ext cx="3474720" cy="640080"/>
+          </a:xfrm>
+          <a:prstGeom prst="rect">
+            <a:avLst/>
+          </a:prstGeom>
+          <a:noFill/>
+          <a:ln/>
+        </p:spPr>
+        <p:txBody>
+          <a:bodyPr wrap="square" lIns="0" tIns="0" rIns="0" bIns="0" rtlCol="0" anchor="ctr"/>
+          <a:lstStyle/>
+          <a:p>
+            <a:pPr marL="0" indent="0">
+              <a:buNone/>
+            </a:pPr>
+            <a:r>
+              <a:rPr lang="en-US" sz="1200" dirty="0">
+                <a:solidFill>
+                  <a:srgbClr val="1A2E2B"/>
+                </a:solidFill>
+                <a:latin typeface="Arial" pitchFamily="34" charset="0"/>
+                <a:ea typeface="Arial" pitchFamily="34" charset="-122"/>
+                <a:cs typeface="Arial" pitchFamily="34" charset="-120"/>
+              </a:rPr>
+              <a:t>Ý nghĩa: đuôi cao = người hút thuốc / BMI lớn. MAPE dễ lệch.</a:t>
+            </a:r>
+            <a:endParaRPr lang="en-US" sz="1200" dirty="0"/>
+          </a:p>
+        </p:txBody>
+      </p:sp>
+      <p:sp>
+        <p:nvSpPr>
+          <p:cNvPr id="10" name="Text 7"/>
+          <p:cNvSpPr/>
+          <p:nvPr/>
+        </p:nvSpPr>
+        <p:spPr>
+          <a:xfrm>
+            <a:off x="548640" y="5065776"/>
+            <a:ext cx="3474720" cy="1005840"/>
+          </a:xfrm>
+          <a:prstGeom prst="rect">
+            <a:avLst/>
+          </a:prstGeom>
+          <a:noFill/>
+          <a:ln/>
+        </p:spPr>
+        <p:txBody>
+          <a:bodyPr wrap="square" lIns="0" tIns="0" rIns="0" bIns="0" rtlCol="0" anchor="ctr"/>
+          <a:lstStyle/>
+          <a:p>
+            <a:pPr marL="0" indent="0">
+              <a:buNone/>
+            </a:pPr>
+            <a:r>
+              <a:rPr lang="en-US" sz="1200" dirty="0">
+                <a:solidFill>
+                  <a:srgbClr val="14332F"/>
+                </a:solidFill>
+                <a:latin typeface="Arial" pitchFamily="34" charset="0"/>
+                <a:ea typeface="Arial" pitchFamily="34" charset="-122"/>
+                <a:cs typeface="Arial" pitchFamily="34" charset="-120"/>
+              </a:rPr>
+              <a:t>Quyết định: giữ nguyên đơn vị USD; dùng MAE + RMSE + R²; không cắt outlier.</a:t>
+            </a:r>
+            <a:endParaRPr lang="en-US" sz="1200" dirty="0"/>
+          </a:p>
+        </p:txBody>
+      </p:sp>
+      <p:sp>
+        <p:nvSpPr>
+          <p:cNvPr id="11" name="Shape 8"/>
+          <p:cNvSpPr/>
+          <p:nvPr/>
+        </p:nvSpPr>
+        <p:spPr>
+          <a:xfrm>
+            <a:off x="4251960" y="1078992"/>
+            <a:ext cx="3794760" cy="5212080"/>
+          </a:xfrm>
+          <a:prstGeom prst="roundRect">
+            <a:avLst>
+              <a:gd name="adj" fmla="val 1928"/>
+            </a:avLst>
+          </a:prstGeom>
+          <a:solidFill>
+            <a:srgbClr val="FFFFFF"/>
+          </a:solidFill>
+          <a:ln/>
+          <a:effectLst>
+            <a:outerShdw blurRad="101600" dist="25400" dir="8100000" algn="bl" rotWithShape="0">
+              <a:srgbClr val="14332F">
+                <a:alpha val="8000"/>
+              </a:srgbClr>
+            </a:outerShdw>
+          </a:effectLst>
+        </p:spPr>
+      </p:sp>
+      <p:pic>
+        <p:nvPicPr>
+          <p:cNvPr id="12" name="Image 1" descr="/home/workdir/artifacts/figures/02_smoker_box.png"/>
+          <p:cNvPicPr>
+            <a:picLocks noChangeAspect="1"/>
+          </p:cNvPicPr>
+          <p:nvPr/>
+        </p:nvPicPr>
+        <p:blipFill>
+          <a:blip r:embed="rId4"/>
+          <a:stretch>
+            <a:fillRect/>
+          </a:stretch>
+        </p:blipFill>
+        <p:spPr>
+          <a:xfrm>
+            <a:off x="4389120" y="1207008"/>
+            <a:ext cx="3520440" cy="2157984"/>
+          </a:xfrm>
+          <a:prstGeom prst="rect">
+            <a:avLst/>
+          </a:prstGeom>
+        </p:spPr>
+      </p:pic>
+      <p:sp>
+        <p:nvSpPr>
+          <p:cNvPr id="13" name="Text 9"/>
+          <p:cNvSpPr/>
+          <p:nvPr/>
+        </p:nvSpPr>
+        <p:spPr>
+          <a:xfrm>
+            <a:off x="4434840" y="3456432"/>
+            <a:ext cx="3474720" cy="256032"/>
+          </a:xfrm>
+          <a:prstGeom prst="rect">
+            <a:avLst/>
+          </a:prstGeom>
+          <a:noFill/>
+          <a:ln/>
+        </p:spPr>
+        <p:txBody>
+          <a:bodyPr wrap="square" lIns="0" tIns="0" rIns="0" bIns="0" rtlCol="0" anchor="ctr"/>
+          <a:lstStyle/>
+          <a:p>
+            <a:pPr marL="0" indent="0">
+              <a:buNone/>
+            </a:pPr>
+            <a:r>
+              <a:rPr lang="en-US" sz="1300" b="1" dirty="0">
+                <a:solidFill>
+                  <a:srgbClr val="1A2E2B"/>
+                </a:solidFill>
+                <a:latin typeface="Arial" pitchFamily="34" charset="0"/>
+                <a:ea typeface="Arial" pitchFamily="34" charset="-122"/>
+                <a:cs typeface="Arial" pitchFamily="34" charset="-120"/>
+              </a:rPr>
+              <a:t>02  •  Boxplot smoker × charges</a:t>
+            </a:r>
+            <a:endParaRPr lang="en-US" sz="1300" dirty="0"/>
+          </a:p>
+        </p:txBody>
+      </p:sp>
+      <p:sp>
+        <p:nvSpPr>
+          <p:cNvPr id="14" name="Text 10"/>
+          <p:cNvSpPr/>
+          <p:nvPr/>
+        </p:nvSpPr>
+        <p:spPr>
+          <a:xfrm>
+            <a:off x="4434840" y="3767328"/>
+            <a:ext cx="3474720" cy="658368"/>
+          </a:xfrm>
+          <a:prstGeom prst="rect">
+            <a:avLst/>
+          </a:prstGeom>
+          <a:noFill/>
+          <a:ln/>
+        </p:spPr>
+        <p:txBody>
+          <a:bodyPr wrap="square" lIns="0" tIns="0" rIns="0" bIns="0" rtlCol="0" anchor="ctr"/>
+          <a:lstStyle/>
+          <a:p>
+            <a:pPr marL="0" indent="0">
+              <a:buNone/>
+            </a:pPr>
+            <a:r>
+              <a:rPr lang="en-US" sz="1200" dirty="0">
+                <a:solidFill>
+                  <a:srgbClr val="1A2E2B"/>
+                </a:solidFill>
+                <a:latin typeface="Arial" pitchFamily="34" charset="0"/>
+                <a:ea typeface="Arial" pitchFamily="34" charset="-122"/>
+                <a:cs typeface="Arial" pitchFamily="34" charset="-120"/>
+              </a:rPr>
+              <a:t>Thấy gì? Median yes 34.456 vs no 7.345 — gấp ~4,7 lần. 274/1338 hút thuốc.</a:t>
+            </a:r>
+            <a:endParaRPr lang="en-US" sz="1200" dirty="0"/>
+          </a:p>
+        </p:txBody>
+      </p:sp>
+      <p:sp>
+        <p:nvSpPr>
+          <p:cNvPr id="15" name="Text 11"/>
+          <p:cNvSpPr/>
+          <p:nvPr/>
+        </p:nvSpPr>
+        <p:spPr>
+          <a:xfrm>
+            <a:off x="4434840" y="4425696"/>
+            <a:ext cx="3474720" cy="640080"/>
+          </a:xfrm>
+          <a:prstGeom prst="rect">
+            <a:avLst/>
+          </a:prstGeom>
+          <a:noFill/>
+          <a:ln/>
+        </p:spPr>
+        <p:txBody>
+          <a:bodyPr wrap="square" lIns="0" tIns="0" rIns="0" bIns="0" rtlCol="0" anchor="ctr"/>
+          <a:lstStyle/>
+          <a:p>
+            <a:pPr marL="0" indent="0">
+              <a:buNone/>
+            </a:pPr>
+            <a:r>
+              <a:rPr lang="en-US" sz="1200" dirty="0">
+                <a:solidFill>
+                  <a:srgbClr val="1A2E2B"/>
+                </a:solidFill>
+                <a:latin typeface="Arial" pitchFamily="34" charset="0"/>
+                <a:ea typeface="Arial" pitchFamily="34" charset="-122"/>
+                <a:cs typeface="Arial" pitchFamily="34" charset="-120"/>
+              </a:rPr>
+              <a:t>Ý nghĩa: smoker là đặc trưng mạnh nhất (corr ≈ 0,79).</a:t>
+            </a:r>
+            <a:endParaRPr lang="en-US" sz="1200" dirty="0"/>
+          </a:p>
+        </p:txBody>
+      </p:sp>
+      <p:sp>
+        <p:nvSpPr>
+          <p:cNvPr id="16" name="Text 12"/>
+          <p:cNvSpPr/>
+          <p:nvPr/>
+        </p:nvSpPr>
+        <p:spPr>
+          <a:xfrm>
+            <a:off x="4434840" y="5065776"/>
+            <a:ext cx="3474720" cy="1005840"/>
+          </a:xfrm>
+          <a:prstGeom prst="rect">
+            <a:avLst/>
+          </a:prstGeom>
+          <a:noFill/>
+          <a:ln/>
+        </p:spPr>
+        <p:txBody>
+          <a:bodyPr wrap="square" lIns="0" tIns="0" rIns="0" bIns="0" rtlCol="0" anchor="ctr"/>
+          <a:lstStyle/>
+          <a:p>
+            <a:pPr marL="0" indent="0">
+              <a:buNone/>
+            </a:pPr>
+            <a:r>
+              <a:rPr lang="en-US" sz="1200" dirty="0">
+                <a:solidFill>
+                  <a:srgbClr val="14332F"/>
+                </a:solidFill>
+                <a:latin typeface="Arial" pitchFamily="34" charset="0"/>
+                <a:ea typeface="Arial" pitchFamily="34" charset="-122"/>
+                <a:cs typeface="Arial" pitchFamily="34" charset="-120"/>
+              </a:rPr>
+              <a:t>Quyết định: one-hot smoker; không gộp nhóm; không bỏ outlier đuôi.</a:t>
+            </a:r>
+            <a:endParaRPr lang="en-US" sz="1200" dirty="0"/>
+          </a:p>
+        </p:txBody>
+      </p:sp>
+      <p:sp>
+        <p:nvSpPr>
+          <p:cNvPr id="17" name="Shape 13"/>
+          <p:cNvSpPr/>
+          <p:nvPr/>
+        </p:nvSpPr>
+        <p:spPr>
+          <a:xfrm>
+            <a:off x="8138160" y="1078992"/>
+            <a:ext cx="3703320" cy="5212080"/>
+          </a:xfrm>
+          <a:prstGeom prst="roundRect">
+            <a:avLst>
+              <a:gd name="adj" fmla="val 1975"/>
+            </a:avLst>
+          </a:prstGeom>
+          <a:solidFill>
+            <a:srgbClr val="FFFFFF"/>
+          </a:solidFill>
+          <a:ln/>
+          <a:effectLst>
+            <a:outerShdw blurRad="101600" dist="25400" dir="8100000" algn="bl" rotWithShape="0">
+              <a:srgbClr val="14332F">
+                <a:alpha val="8000"/>
+              </a:srgbClr>
+            </a:outerShdw>
+          </a:effectLst>
+        </p:spPr>
+      </p:sp>
+      <p:pic>
+        <p:nvPicPr>
+          <p:cNvPr id="18" name="Image 2" descr="/home/workdir/artifacts/figures/03_missing.png"/>
+          <p:cNvPicPr>
+            <a:picLocks noChangeAspect="1"/>
+          </p:cNvPicPr>
+          <p:nvPr/>
+        </p:nvPicPr>
+        <p:blipFill>
+          <a:blip r:embed="rId5"/>
+          <a:stretch>
+            <a:fillRect/>
+          </a:stretch>
+        </p:blipFill>
+        <p:spPr>
+          <a:xfrm>
             <a:off x="8247888" y="1207008"/>
             <a:ext cx="3474720" cy="2157984"/>
           </a:xfrm>
@@ -13999,7 +13717,7 @@
           <a:bodyPr wrap="square" lIns="0" tIns="0" rIns="0" bIns="0" rtlCol="0" anchor="ctr"/>
           <a:lstStyle/>
           <a:p>
-            <a:pPr indent="0" marL="0">
+            <a:pPr marL="0" indent="0">
               <a:buNone/>
             </a:pPr>
             <a:r>
@@ -14038,7 +13756,7 @@
           <a:bodyPr wrap="square" lIns="0" tIns="0" rIns="0" bIns="0" rtlCol="0" anchor="ctr"/>
           <a:lstStyle/>
           <a:p>
-            <a:pPr indent="0" marL="0">
+            <a:pPr marL="0" indent="0">
               <a:buNone/>
             </a:pPr>
             <a:r>
@@ -14077,7 +13795,7 @@
           <a:bodyPr wrap="square" lIns="0" tIns="0" rIns="0" bIns="0" rtlCol="0" anchor="ctr"/>
           <a:lstStyle/>
           <a:p>
-            <a:pPr indent="0" marL="0">
+            <a:pPr marL="0" indent="0">
               <a:buNone/>
             </a:pPr>
             <a:r>
@@ -14116,7 +13834,7 @@
           <a:bodyPr wrap="square" lIns="0" tIns="0" rIns="0" bIns="0" rtlCol="0" anchor="ctr"/>
           <a:lstStyle/>
           <a:p>
-            <a:pPr indent="0" marL="0">
+            <a:pPr marL="0" indent="0">
               <a:buNone/>
             </a:pPr>
             <a:r>
@@ -14155,7 +13873,7 @@
           <a:bodyPr wrap="square" lIns="0" tIns="0" rIns="0" bIns="0" rtlCol="0" anchor="ctr"/>
           <a:lstStyle/>
           <a:p>
-            <a:pPr indent="0" marL="0">
+            <a:pPr marL="0" indent="0">
               <a:buNone/>
             </a:pPr>
             <a:r>
@@ -14194,7 +13912,7 @@
           <a:bodyPr wrap="square" lIns="0" tIns="0" rIns="0" bIns="0" rtlCol="0" anchor="ctr"/>
           <a:lstStyle/>
           <a:p>
-            <a:pPr algn="r" indent="0" marL="0">
+            <a:pPr marL="0" indent="0" algn="r">
               <a:buNone/>
             </a:pPr>
             <a:r>
@@ -14278,11 +13996,11 @@
           <a:bodyPr wrap="square" lIns="0" tIns="0" rIns="0" bIns="0" rtlCol="0" anchor="ctr"/>
           <a:lstStyle/>
           <a:p>
-            <a:pPr indent="0" marL="0">
-              <a:buNone/>
-            </a:pPr>
-            <a:r>
-              <a:rPr lang="en-US" sz="1100" b="1" spc="60" kern="0" dirty="0">
+            <a:pPr marL="0" indent="0">
+              <a:buNone/>
+            </a:pPr>
+            <a:r>
+              <a:rPr lang="en-US" sz="1100" b="1" kern="0" spc="60" dirty="0">
                 <a:solidFill>
                   <a:srgbClr val="E85D3A"/>
                 </a:solidFill>
@@ -14317,7 +14035,7 @@
           <a:bodyPr wrap="square" lIns="0" tIns="0" rIns="0" bIns="0" rtlCol="0" anchor="ctr"/>
           <a:lstStyle/>
           <a:p>
-            <a:pPr indent="0" marL="0">
+            <a:pPr marL="0" indent="0">
               <a:buNone/>
             </a:pPr>
             <a:r>
@@ -14356,7 +14074,7 @@
           </a:solidFill>
           <a:ln/>
           <a:effectLst>
-            <a:outerShdw sx="100000" sy="100000" kx="0" ky="0" algn="bl" rotWithShape="0" blurRad="101600" dist="25400" dir="8100000">
+            <a:outerShdw blurRad="101600" dist="25400" dir="8100000" algn="bl" rotWithShape="0">
               <a:srgbClr val="14332F">
                 <a:alpha val="8000"/>
               </a:srgbClr>
@@ -14366,425 +14084,7 @@
       </p:sp>
       <p:pic>
         <p:nvPicPr>
-          <p:cNvPr id="6" name="Image 0" descr="/home/workdir/artifacts/figures/04_corr.png">    </p:cNvPr>
-          <p:cNvPicPr>
-            <a:picLocks noChangeAspect="1"/>
-          </p:cNvPicPr>
-          <p:nvPr/>
-        </p:nvPicPr>
-        <p:blipFill>
-          <a:blip r:embed="rId1"/>
-          <a:stretch>
-            <a:fillRect/>
-          </a:stretch>
-        </p:blipFill>
-        <p:spPr>
-          <a:xfrm>
-            <a:off x="475488" y="1188720"/>
-            <a:ext cx="3566160" cy="2468880"/>
-          </a:xfrm>
-          <a:prstGeom prst="rect">
-            <a:avLst/>
-          </a:prstGeom>
-        </p:spPr>
-      </p:pic>
-      <p:sp>
-        <p:nvSpPr>
-          <p:cNvPr id="7" name="Text 4"/>
-          <p:cNvSpPr/>
-          <p:nvPr/>
-        </p:nvSpPr>
-        <p:spPr>
-          <a:xfrm>
-            <a:off x="548640" y="3730752"/>
-            <a:ext cx="3474720" cy="237744"/>
-          </a:xfrm>
-          <a:prstGeom prst="rect">
-            <a:avLst/>
-          </a:prstGeom>
-          <a:noFill/>
-          <a:ln/>
-        </p:spPr>
-        <p:txBody>
-          <a:bodyPr wrap="square" lIns="0" tIns="0" rIns="0" bIns="0" rtlCol="0" anchor="ctr"/>
-          <a:lstStyle/>
-          <a:p>
-            <a:pPr indent="0" marL="0">
-              <a:buNone/>
-            </a:pPr>
-            <a:r>
-              <a:rPr lang="en-US" sz="1300" b="1" dirty="0">
-                <a:solidFill>
-                  <a:srgbClr val="1A2E2B"/>
-                </a:solidFill>
-                <a:latin typeface="Arial" pitchFamily="34" charset="0"/>
-                <a:ea typeface="Arial" pitchFamily="34" charset="-122"/>
-                <a:cs typeface="Arial" pitchFamily="34" charset="-120"/>
-              </a:rPr>
-              <a:t>04  •  Heatmap tương quan</a:t>
-            </a:r>
-            <a:endParaRPr lang="en-US" sz="1300" dirty="0"/>
-          </a:p>
-        </p:txBody>
-      </p:sp>
-      <p:sp>
-        <p:nvSpPr>
-          <p:cNvPr id="8" name="Text 5"/>
-          <p:cNvSpPr/>
-          <p:nvPr/>
-        </p:nvSpPr>
-        <p:spPr>
-          <a:xfrm>
-            <a:off x="548640" y="4005072"/>
-            <a:ext cx="3474720" cy="640080"/>
-          </a:xfrm>
-          <a:prstGeom prst="rect">
-            <a:avLst/>
-          </a:prstGeom>
-          <a:noFill/>
-          <a:ln/>
-        </p:spPr>
-        <p:txBody>
-          <a:bodyPr wrap="square" lIns="0" tIns="0" rIns="0" bIns="0" rtlCol="0" anchor="ctr"/>
-          <a:lstStyle/>
-          <a:p>
-            <a:pPr indent="0" marL="0">
-              <a:buNone/>
-            </a:pPr>
-            <a:r>
-              <a:rPr lang="en-US" sz="1200" dirty="0">
-                <a:solidFill>
-                  <a:srgbClr val="1A2E2B"/>
-                </a:solidFill>
-                <a:latin typeface="Arial" pitchFamily="34" charset="0"/>
-                <a:ea typeface="Arial" pitchFamily="34" charset="-122"/>
-                <a:cs typeface="Arial" pitchFamily="34" charset="-120"/>
-              </a:rPr>
-              <a:t>Thấy gì? smoker_yes 0,79 · age 0,30 · bmi 0,20 · region |r| &lt; 0,08.</a:t>
-            </a:r>
-            <a:endParaRPr lang="en-US" sz="1200" dirty="0"/>
-          </a:p>
-        </p:txBody>
-      </p:sp>
-      <p:sp>
-        <p:nvSpPr>
-          <p:cNvPr id="9" name="Text 6"/>
-          <p:cNvSpPr/>
-          <p:nvPr/>
-        </p:nvSpPr>
-        <p:spPr>
-          <a:xfrm>
-            <a:off x="548640" y="4617720"/>
-            <a:ext cx="3474720" cy="502920"/>
-          </a:xfrm>
-          <a:prstGeom prst="rect">
-            <a:avLst/>
-          </a:prstGeom>
-          <a:noFill/>
-          <a:ln/>
-        </p:spPr>
-        <p:txBody>
-          <a:bodyPr wrap="square" lIns="0" tIns="0" rIns="0" bIns="0" rtlCol="0" anchor="ctr"/>
-          <a:lstStyle/>
-          <a:p>
-            <a:pPr indent="0" marL="0">
-              <a:buNone/>
-            </a:pPr>
-            <a:r>
-              <a:rPr lang="en-US" sz="1200" dirty="0">
-                <a:solidFill>
-                  <a:srgbClr val="1A2E2B"/>
-                </a:solidFill>
-                <a:latin typeface="Arial" pitchFamily="34" charset="0"/>
-                <a:ea typeface="Arial" pitchFamily="34" charset="-122"/>
-                <a:cs typeface="Arial" pitchFamily="34" charset="-120"/>
-              </a:rPr>
-              <a:t>Ý nghĩa: xếp hạng đặc trưng rõ; region yếu nhưng không nhiễu.</a:t>
-            </a:r>
-            <a:endParaRPr lang="en-US" sz="1200" dirty="0"/>
-          </a:p>
-        </p:txBody>
-      </p:sp>
-      <p:sp>
-        <p:nvSpPr>
-          <p:cNvPr id="10" name="Text 7"/>
-          <p:cNvSpPr/>
-          <p:nvPr/>
-        </p:nvSpPr>
-        <p:spPr>
-          <a:xfrm>
-            <a:off x="548640" y="5120640"/>
-            <a:ext cx="3474720" cy="914400"/>
-          </a:xfrm>
-          <a:prstGeom prst="rect">
-            <a:avLst/>
-          </a:prstGeom>
-          <a:noFill/>
-          <a:ln/>
-        </p:spPr>
-        <p:txBody>
-          <a:bodyPr wrap="square" lIns="0" tIns="0" rIns="0" bIns="0" rtlCol="0" anchor="ctr"/>
-          <a:lstStyle/>
-          <a:p>
-            <a:pPr indent="0" marL="0">
-              <a:buNone/>
-            </a:pPr>
-            <a:r>
-              <a:rPr lang="en-US" sz="1200" dirty="0">
-                <a:solidFill>
-                  <a:srgbClr val="14332F"/>
-                </a:solidFill>
-                <a:latin typeface="Arial" pitchFamily="34" charset="0"/>
-                <a:ea typeface="Arial" pitchFamily="34" charset="-122"/>
-                <a:cs typeface="Arial" pitchFamily="34" charset="-120"/>
-              </a:rPr>
-              <a:t>Quyết định: giữ đủ 6 đặc trưng; không bỏ region (schema FE cần đủ cột).</a:t>
-            </a:r>
-            <a:endParaRPr lang="en-US" sz="1200" dirty="0"/>
-          </a:p>
-        </p:txBody>
-      </p:sp>
-      <p:sp>
-        <p:nvSpPr>
-          <p:cNvPr id="11" name="Shape 8"/>
-          <p:cNvSpPr/>
-          <p:nvPr/>
-        </p:nvSpPr>
-        <p:spPr>
-          <a:xfrm>
-            <a:off x="4251960" y="1078992"/>
-            <a:ext cx="3794760" cy="5212080"/>
-          </a:xfrm>
-          <a:prstGeom prst="roundRect">
-            <a:avLst>
-              <a:gd name="adj" fmla="val 1928"/>
-            </a:avLst>
-          </a:prstGeom>
-          <a:solidFill>
-            <a:srgbClr val="FFFFFF"/>
-          </a:solidFill>
-          <a:ln/>
-          <a:effectLst>
-            <a:outerShdw sx="100000" sy="100000" kx="0" ky="0" algn="bl" rotWithShape="0" blurRad="101600" dist="25400" dir="8100000">
-              <a:srgbClr val="14332F">
-                <a:alpha val="8000"/>
-              </a:srgbClr>
-            </a:outerShdw>
-          </a:effectLst>
-        </p:spPr>
-      </p:sp>
-      <p:pic>
-        <p:nvPicPr>
-          <p:cNvPr id="12" name="Image 1" descr="/home/workdir/artifacts/figures/06_bmi_smoker.png">    </p:cNvPr>
-          <p:cNvPicPr>
-            <a:picLocks noChangeAspect="1"/>
-          </p:cNvPicPr>
-          <p:nvPr/>
-        </p:nvPicPr>
-        <p:blipFill>
-          <a:blip r:embed="rId2"/>
-          <a:stretch>
-            <a:fillRect/>
-          </a:stretch>
-        </p:blipFill>
-        <p:spPr>
-          <a:xfrm>
-            <a:off x="4370832" y="1207008"/>
-            <a:ext cx="3547872" cy="2176272"/>
-          </a:xfrm>
-          <a:prstGeom prst="rect">
-            <a:avLst/>
-          </a:prstGeom>
-        </p:spPr>
-      </p:pic>
-      <p:sp>
-        <p:nvSpPr>
-          <p:cNvPr id="13" name="Text 9"/>
-          <p:cNvSpPr/>
-          <p:nvPr/>
-        </p:nvSpPr>
-        <p:spPr>
-          <a:xfrm>
-            <a:off x="4434840" y="3493008"/>
-            <a:ext cx="3474720" cy="237744"/>
-          </a:xfrm>
-          <a:prstGeom prst="rect">
-            <a:avLst/>
-          </a:prstGeom>
-          <a:noFill/>
-          <a:ln/>
-        </p:spPr>
-        <p:txBody>
-          <a:bodyPr wrap="square" lIns="0" tIns="0" rIns="0" bIns="0" rtlCol="0" anchor="ctr"/>
-          <a:lstStyle/>
-          <a:p>
-            <a:pPr indent="0" marL="0">
-              <a:buNone/>
-            </a:pPr>
-            <a:r>
-              <a:rPr lang="en-US" sz="1300" b="1" dirty="0">
-                <a:solidFill>
-                  <a:srgbClr val="1A2E2B"/>
-                </a:solidFill>
-                <a:latin typeface="Arial" pitchFamily="34" charset="0"/>
-                <a:ea typeface="Arial" pitchFamily="34" charset="-122"/>
-                <a:cs typeface="Arial" pitchFamily="34" charset="-120"/>
-              </a:rPr>
-              <a:t>05  •  Scatter BMI × charges</a:t>
-            </a:r>
-            <a:endParaRPr lang="en-US" sz="1300" dirty="0"/>
-          </a:p>
-        </p:txBody>
-      </p:sp>
-      <p:sp>
-        <p:nvSpPr>
-          <p:cNvPr id="14" name="Text 10"/>
-          <p:cNvSpPr/>
-          <p:nvPr/>
-        </p:nvSpPr>
-        <p:spPr>
-          <a:xfrm>
-            <a:off x="4434840" y="3785616"/>
-            <a:ext cx="3474720" cy="658368"/>
-          </a:xfrm>
-          <a:prstGeom prst="rect">
-            <a:avLst/>
-          </a:prstGeom>
-          <a:noFill/>
-          <a:ln/>
-        </p:spPr>
-        <p:txBody>
-          <a:bodyPr wrap="square" lIns="0" tIns="0" rIns="0" bIns="0" rtlCol="0" anchor="ctr"/>
-          <a:lstStyle/>
-          <a:p>
-            <a:pPr indent="0" marL="0">
-              <a:buNone/>
-            </a:pPr>
-            <a:r>
-              <a:rPr lang="en-US" sz="1200" dirty="0">
-                <a:solidFill>
-                  <a:srgbClr val="1A2E2B"/>
-                </a:solidFill>
-                <a:latin typeface="Arial" pitchFamily="34" charset="0"/>
-                <a:ea typeface="Arial" pitchFamily="34" charset="-122"/>
-                <a:cs typeface="Arial" pitchFamily="34" charset="-120"/>
-              </a:rPr>
-              <a:t>Thấy gì? Người hút thuốc: BMI tăng → charges nhảy vọt. Người không hút: gần phẳng.</a:t>
-            </a:r>
-            <a:endParaRPr lang="en-US" sz="1200" dirty="0"/>
-          </a:p>
-        </p:txBody>
-      </p:sp>
-      <p:sp>
-        <p:nvSpPr>
-          <p:cNvPr id="15" name="Text 11"/>
-          <p:cNvSpPr/>
-          <p:nvPr/>
-        </p:nvSpPr>
-        <p:spPr>
-          <a:xfrm>
-            <a:off x="4434840" y="4462272"/>
-            <a:ext cx="3474720" cy="457200"/>
-          </a:xfrm>
-          <a:prstGeom prst="rect">
-            <a:avLst/>
-          </a:prstGeom>
-          <a:noFill/>
-          <a:ln/>
-        </p:spPr>
-        <p:txBody>
-          <a:bodyPr wrap="square" lIns="0" tIns="0" rIns="0" bIns="0" rtlCol="0" anchor="ctr"/>
-          <a:lstStyle/>
-          <a:p>
-            <a:pPr indent="0" marL="0">
-              <a:buNone/>
-            </a:pPr>
-            <a:r>
-              <a:rPr lang="en-US" sz="1200" dirty="0">
-                <a:solidFill>
-                  <a:srgbClr val="1A2E2B"/>
-                </a:solidFill>
-                <a:latin typeface="Arial" pitchFamily="34" charset="0"/>
-                <a:ea typeface="Arial" pitchFamily="34" charset="-122"/>
-                <a:cs typeface="Arial" pitchFamily="34" charset="-120"/>
-              </a:rPr>
-              <a:t>Ý nghĩa: tương tác phi tuyến — Linear không đủ.</a:t>
-            </a:r>
-            <a:endParaRPr lang="en-US" sz="1200" dirty="0"/>
-          </a:p>
-        </p:txBody>
-      </p:sp>
-      <p:sp>
-        <p:nvSpPr>
-          <p:cNvPr id="16" name="Text 12"/>
-          <p:cNvSpPr/>
-          <p:nvPr/>
-        </p:nvSpPr>
-        <p:spPr>
-          <a:xfrm>
-            <a:off x="4434840" y="4956048"/>
-            <a:ext cx="3474720" cy="1005840"/>
-          </a:xfrm>
-          <a:prstGeom prst="rect">
-            <a:avLst/>
-          </a:prstGeom>
-          <a:noFill/>
-          <a:ln/>
-        </p:spPr>
-        <p:txBody>
-          <a:bodyPr wrap="square" lIns="0" tIns="0" rIns="0" bIns="0" rtlCol="0" anchor="ctr"/>
-          <a:lstStyle/>
-          <a:p>
-            <a:pPr indent="0" marL="0">
-              <a:buNone/>
-            </a:pPr>
-            <a:r>
-              <a:rPr lang="en-US" sz="1200" dirty="0">
-                <a:solidFill>
-                  <a:srgbClr val="14332F"/>
-                </a:solidFill>
-                <a:latin typeface="Arial" pitchFamily="34" charset="0"/>
-                <a:ea typeface="Arial" pitchFamily="34" charset="-122"/>
-                <a:cs typeface="Arial" pitchFamily="34" charset="-120"/>
-              </a:rPr>
-              <a:t>Quyết định: cần cây / RF / kernel, không chỉ hồi quy tuyến tính.</a:t>
-            </a:r>
-            <a:endParaRPr lang="en-US" sz="1200" dirty="0"/>
-          </a:p>
-        </p:txBody>
-      </p:sp>
-      <p:sp>
-        <p:nvSpPr>
-          <p:cNvPr id="17" name="Shape 13"/>
-          <p:cNvSpPr/>
-          <p:nvPr/>
-        </p:nvSpPr>
-        <p:spPr>
-          <a:xfrm>
-            <a:off x="8138160" y="1078992"/>
-            <a:ext cx="3703320" cy="5212080"/>
-          </a:xfrm>
-          <a:prstGeom prst="roundRect">
-            <a:avLst>
-              <a:gd name="adj" fmla="val 1975"/>
-            </a:avLst>
-          </a:prstGeom>
-          <a:solidFill>
-            <a:srgbClr val="FFFFFF"/>
-          </a:solidFill>
-          <a:ln/>
-          <a:effectLst>
-            <a:outerShdw sx="100000" sy="100000" kx="0" ky="0" algn="bl" rotWithShape="0" blurRad="101600" dist="25400" dir="8100000">
-              <a:srgbClr val="14332F">
-                <a:alpha val="8000"/>
-              </a:srgbClr>
-            </a:outerShdw>
-          </a:effectLst>
-        </p:spPr>
-      </p:sp>
-      <p:pic>
-        <p:nvPicPr>
-          <p:cNvPr id="18" name="Image 2" descr="/home/workdir/artifacts/figures/05_age_smoker.png">    </p:cNvPr>
+          <p:cNvPr id="6" name="Image 0" descr="/home/workdir/artifacts/figures/04_corr.png"/>
           <p:cNvPicPr>
             <a:picLocks noChangeAspect="1"/>
           </p:cNvPicPr>
@@ -14798,6 +14098,424 @@
         </p:blipFill>
         <p:spPr>
           <a:xfrm>
+            <a:off x="475488" y="1188720"/>
+            <a:ext cx="3566160" cy="2468880"/>
+          </a:xfrm>
+          <a:prstGeom prst="rect">
+            <a:avLst/>
+          </a:prstGeom>
+        </p:spPr>
+      </p:pic>
+      <p:sp>
+        <p:nvSpPr>
+          <p:cNvPr id="7" name="Text 4"/>
+          <p:cNvSpPr/>
+          <p:nvPr/>
+        </p:nvSpPr>
+        <p:spPr>
+          <a:xfrm>
+            <a:off x="548640" y="3730752"/>
+            <a:ext cx="3474720" cy="237744"/>
+          </a:xfrm>
+          <a:prstGeom prst="rect">
+            <a:avLst/>
+          </a:prstGeom>
+          <a:noFill/>
+          <a:ln/>
+        </p:spPr>
+        <p:txBody>
+          <a:bodyPr wrap="square" lIns="0" tIns="0" rIns="0" bIns="0" rtlCol="0" anchor="ctr"/>
+          <a:lstStyle/>
+          <a:p>
+            <a:pPr marL="0" indent="0">
+              <a:buNone/>
+            </a:pPr>
+            <a:r>
+              <a:rPr lang="en-US" sz="1300" b="1" dirty="0">
+                <a:solidFill>
+                  <a:srgbClr val="1A2E2B"/>
+                </a:solidFill>
+                <a:latin typeface="Arial" pitchFamily="34" charset="0"/>
+                <a:ea typeface="Arial" pitchFamily="34" charset="-122"/>
+                <a:cs typeface="Arial" pitchFamily="34" charset="-120"/>
+              </a:rPr>
+              <a:t>04  •  Heatmap tương quan</a:t>
+            </a:r>
+            <a:endParaRPr lang="en-US" sz="1300" dirty="0"/>
+          </a:p>
+        </p:txBody>
+      </p:sp>
+      <p:sp>
+        <p:nvSpPr>
+          <p:cNvPr id="8" name="Text 5"/>
+          <p:cNvSpPr/>
+          <p:nvPr/>
+        </p:nvSpPr>
+        <p:spPr>
+          <a:xfrm>
+            <a:off x="548640" y="4005072"/>
+            <a:ext cx="3474720" cy="640080"/>
+          </a:xfrm>
+          <a:prstGeom prst="rect">
+            <a:avLst/>
+          </a:prstGeom>
+          <a:noFill/>
+          <a:ln/>
+        </p:spPr>
+        <p:txBody>
+          <a:bodyPr wrap="square" lIns="0" tIns="0" rIns="0" bIns="0" rtlCol="0" anchor="ctr"/>
+          <a:lstStyle/>
+          <a:p>
+            <a:pPr marL="0" indent="0">
+              <a:buNone/>
+            </a:pPr>
+            <a:r>
+              <a:rPr lang="en-US" sz="1200" dirty="0">
+                <a:solidFill>
+                  <a:srgbClr val="1A2E2B"/>
+                </a:solidFill>
+                <a:latin typeface="Arial" pitchFamily="34" charset="0"/>
+                <a:ea typeface="Arial" pitchFamily="34" charset="-122"/>
+                <a:cs typeface="Arial" pitchFamily="34" charset="-120"/>
+              </a:rPr>
+              <a:t>Thấy gì? smoker_yes 0,79 · age 0,30 · bmi 0,20 · region |r| &lt; 0,08.</a:t>
+            </a:r>
+            <a:endParaRPr lang="en-US" sz="1200" dirty="0"/>
+          </a:p>
+        </p:txBody>
+      </p:sp>
+      <p:sp>
+        <p:nvSpPr>
+          <p:cNvPr id="9" name="Text 6"/>
+          <p:cNvSpPr/>
+          <p:nvPr/>
+        </p:nvSpPr>
+        <p:spPr>
+          <a:xfrm>
+            <a:off x="548640" y="4617720"/>
+            <a:ext cx="3474720" cy="502920"/>
+          </a:xfrm>
+          <a:prstGeom prst="rect">
+            <a:avLst/>
+          </a:prstGeom>
+          <a:noFill/>
+          <a:ln/>
+        </p:spPr>
+        <p:txBody>
+          <a:bodyPr wrap="square" lIns="0" tIns="0" rIns="0" bIns="0" rtlCol="0" anchor="ctr"/>
+          <a:lstStyle/>
+          <a:p>
+            <a:pPr marL="0" indent="0">
+              <a:buNone/>
+            </a:pPr>
+            <a:r>
+              <a:rPr lang="en-US" sz="1200" dirty="0">
+                <a:solidFill>
+                  <a:srgbClr val="1A2E2B"/>
+                </a:solidFill>
+                <a:latin typeface="Arial" pitchFamily="34" charset="0"/>
+                <a:ea typeface="Arial" pitchFamily="34" charset="-122"/>
+                <a:cs typeface="Arial" pitchFamily="34" charset="-120"/>
+              </a:rPr>
+              <a:t>Ý nghĩa: xếp hạng đặc trưng rõ; region yếu nhưng không nhiễu.</a:t>
+            </a:r>
+            <a:endParaRPr lang="en-US" sz="1200" dirty="0"/>
+          </a:p>
+        </p:txBody>
+      </p:sp>
+      <p:sp>
+        <p:nvSpPr>
+          <p:cNvPr id="10" name="Text 7"/>
+          <p:cNvSpPr/>
+          <p:nvPr/>
+        </p:nvSpPr>
+        <p:spPr>
+          <a:xfrm>
+            <a:off x="548640" y="5120640"/>
+            <a:ext cx="3474720" cy="914400"/>
+          </a:xfrm>
+          <a:prstGeom prst="rect">
+            <a:avLst/>
+          </a:prstGeom>
+          <a:noFill/>
+          <a:ln/>
+        </p:spPr>
+        <p:txBody>
+          <a:bodyPr wrap="square" lIns="0" tIns="0" rIns="0" bIns="0" rtlCol="0" anchor="ctr"/>
+          <a:lstStyle/>
+          <a:p>
+            <a:pPr marL="0" indent="0">
+              <a:buNone/>
+            </a:pPr>
+            <a:r>
+              <a:rPr lang="en-US" sz="1200" dirty="0">
+                <a:solidFill>
+                  <a:srgbClr val="14332F"/>
+                </a:solidFill>
+                <a:latin typeface="Arial" pitchFamily="34" charset="0"/>
+                <a:ea typeface="Arial" pitchFamily="34" charset="-122"/>
+                <a:cs typeface="Arial" pitchFamily="34" charset="-120"/>
+              </a:rPr>
+              <a:t>Quyết định: giữ đủ 6 đặc trưng; không bỏ region (schema FE cần đủ cột).</a:t>
+            </a:r>
+            <a:endParaRPr lang="en-US" sz="1200" dirty="0"/>
+          </a:p>
+        </p:txBody>
+      </p:sp>
+      <p:sp>
+        <p:nvSpPr>
+          <p:cNvPr id="11" name="Shape 8"/>
+          <p:cNvSpPr/>
+          <p:nvPr/>
+        </p:nvSpPr>
+        <p:spPr>
+          <a:xfrm>
+            <a:off x="4251960" y="1078992"/>
+            <a:ext cx="3794760" cy="5212080"/>
+          </a:xfrm>
+          <a:prstGeom prst="roundRect">
+            <a:avLst>
+              <a:gd name="adj" fmla="val 1928"/>
+            </a:avLst>
+          </a:prstGeom>
+          <a:solidFill>
+            <a:srgbClr val="FFFFFF"/>
+          </a:solidFill>
+          <a:ln/>
+          <a:effectLst>
+            <a:outerShdw blurRad="101600" dist="25400" dir="8100000" algn="bl" rotWithShape="0">
+              <a:srgbClr val="14332F">
+                <a:alpha val="8000"/>
+              </a:srgbClr>
+            </a:outerShdw>
+          </a:effectLst>
+        </p:spPr>
+      </p:sp>
+      <p:pic>
+        <p:nvPicPr>
+          <p:cNvPr id="12" name="Image 1" descr="/home/workdir/artifacts/figures/06_bmi_smoker.png"/>
+          <p:cNvPicPr>
+            <a:picLocks noChangeAspect="1"/>
+          </p:cNvPicPr>
+          <p:nvPr/>
+        </p:nvPicPr>
+        <p:blipFill>
+          <a:blip r:embed="rId4"/>
+          <a:stretch>
+            <a:fillRect/>
+          </a:stretch>
+        </p:blipFill>
+        <p:spPr>
+          <a:xfrm>
+            <a:off x="4370832" y="1207008"/>
+            <a:ext cx="3547872" cy="2176272"/>
+          </a:xfrm>
+          <a:prstGeom prst="rect">
+            <a:avLst/>
+          </a:prstGeom>
+        </p:spPr>
+      </p:pic>
+      <p:sp>
+        <p:nvSpPr>
+          <p:cNvPr id="13" name="Text 9"/>
+          <p:cNvSpPr/>
+          <p:nvPr/>
+        </p:nvSpPr>
+        <p:spPr>
+          <a:xfrm>
+            <a:off x="4434840" y="3493008"/>
+            <a:ext cx="3474720" cy="237744"/>
+          </a:xfrm>
+          <a:prstGeom prst="rect">
+            <a:avLst/>
+          </a:prstGeom>
+          <a:noFill/>
+          <a:ln/>
+        </p:spPr>
+        <p:txBody>
+          <a:bodyPr wrap="square" lIns="0" tIns="0" rIns="0" bIns="0" rtlCol="0" anchor="ctr"/>
+          <a:lstStyle/>
+          <a:p>
+            <a:pPr marL="0" indent="0">
+              <a:buNone/>
+            </a:pPr>
+            <a:r>
+              <a:rPr lang="en-US" sz="1300" b="1" dirty="0">
+                <a:solidFill>
+                  <a:srgbClr val="1A2E2B"/>
+                </a:solidFill>
+                <a:latin typeface="Arial" pitchFamily="34" charset="0"/>
+                <a:ea typeface="Arial" pitchFamily="34" charset="-122"/>
+                <a:cs typeface="Arial" pitchFamily="34" charset="-120"/>
+              </a:rPr>
+              <a:t>05  •  Scatter BMI × charges</a:t>
+            </a:r>
+            <a:endParaRPr lang="en-US" sz="1300" dirty="0"/>
+          </a:p>
+        </p:txBody>
+      </p:sp>
+      <p:sp>
+        <p:nvSpPr>
+          <p:cNvPr id="14" name="Text 10"/>
+          <p:cNvSpPr/>
+          <p:nvPr/>
+        </p:nvSpPr>
+        <p:spPr>
+          <a:xfrm>
+            <a:off x="4434840" y="3785616"/>
+            <a:ext cx="3474720" cy="658368"/>
+          </a:xfrm>
+          <a:prstGeom prst="rect">
+            <a:avLst/>
+          </a:prstGeom>
+          <a:noFill/>
+          <a:ln/>
+        </p:spPr>
+        <p:txBody>
+          <a:bodyPr wrap="square" lIns="0" tIns="0" rIns="0" bIns="0" rtlCol="0" anchor="ctr"/>
+          <a:lstStyle/>
+          <a:p>
+            <a:pPr marL="0" indent="0">
+              <a:buNone/>
+            </a:pPr>
+            <a:r>
+              <a:rPr lang="en-US" sz="1200" dirty="0">
+                <a:solidFill>
+                  <a:srgbClr val="1A2E2B"/>
+                </a:solidFill>
+                <a:latin typeface="Arial" pitchFamily="34" charset="0"/>
+                <a:ea typeface="Arial" pitchFamily="34" charset="-122"/>
+                <a:cs typeface="Arial" pitchFamily="34" charset="-120"/>
+              </a:rPr>
+              <a:t>Thấy gì? Người hút thuốc: BMI tăng → charges nhảy vọt. Người không hút: gần phẳng.</a:t>
+            </a:r>
+            <a:endParaRPr lang="en-US" sz="1200" dirty="0"/>
+          </a:p>
+        </p:txBody>
+      </p:sp>
+      <p:sp>
+        <p:nvSpPr>
+          <p:cNvPr id="15" name="Text 11"/>
+          <p:cNvSpPr/>
+          <p:nvPr/>
+        </p:nvSpPr>
+        <p:spPr>
+          <a:xfrm>
+            <a:off x="4434840" y="4462272"/>
+            <a:ext cx="3474720" cy="457200"/>
+          </a:xfrm>
+          <a:prstGeom prst="rect">
+            <a:avLst/>
+          </a:prstGeom>
+          <a:noFill/>
+          <a:ln/>
+        </p:spPr>
+        <p:txBody>
+          <a:bodyPr wrap="square" lIns="0" tIns="0" rIns="0" bIns="0" rtlCol="0" anchor="ctr"/>
+          <a:lstStyle/>
+          <a:p>
+            <a:pPr marL="0" indent="0">
+              <a:buNone/>
+            </a:pPr>
+            <a:r>
+              <a:rPr lang="en-US" sz="1200" dirty="0">
+                <a:solidFill>
+                  <a:srgbClr val="1A2E2B"/>
+                </a:solidFill>
+                <a:latin typeface="Arial" pitchFamily="34" charset="0"/>
+                <a:ea typeface="Arial" pitchFamily="34" charset="-122"/>
+                <a:cs typeface="Arial" pitchFamily="34" charset="-120"/>
+              </a:rPr>
+              <a:t>Ý nghĩa: tương tác phi tuyến — Linear không đủ.</a:t>
+            </a:r>
+            <a:endParaRPr lang="en-US" sz="1200" dirty="0"/>
+          </a:p>
+        </p:txBody>
+      </p:sp>
+      <p:sp>
+        <p:nvSpPr>
+          <p:cNvPr id="16" name="Text 12"/>
+          <p:cNvSpPr/>
+          <p:nvPr/>
+        </p:nvSpPr>
+        <p:spPr>
+          <a:xfrm>
+            <a:off x="4434840" y="4956048"/>
+            <a:ext cx="3474720" cy="1005840"/>
+          </a:xfrm>
+          <a:prstGeom prst="rect">
+            <a:avLst/>
+          </a:prstGeom>
+          <a:noFill/>
+          <a:ln/>
+        </p:spPr>
+        <p:txBody>
+          <a:bodyPr wrap="square" lIns="0" tIns="0" rIns="0" bIns="0" rtlCol="0" anchor="ctr"/>
+          <a:lstStyle/>
+          <a:p>
+            <a:pPr marL="0" indent="0">
+              <a:buNone/>
+            </a:pPr>
+            <a:r>
+              <a:rPr lang="en-US" sz="1200" dirty="0">
+                <a:solidFill>
+                  <a:srgbClr val="14332F"/>
+                </a:solidFill>
+                <a:latin typeface="Arial" pitchFamily="34" charset="0"/>
+                <a:ea typeface="Arial" pitchFamily="34" charset="-122"/>
+                <a:cs typeface="Arial" pitchFamily="34" charset="-120"/>
+              </a:rPr>
+              <a:t>Quyết định: cần cây / RF / kernel, không chỉ hồi quy tuyến tính.</a:t>
+            </a:r>
+            <a:endParaRPr lang="en-US" sz="1200" dirty="0"/>
+          </a:p>
+        </p:txBody>
+      </p:sp>
+      <p:sp>
+        <p:nvSpPr>
+          <p:cNvPr id="17" name="Shape 13"/>
+          <p:cNvSpPr/>
+          <p:nvPr/>
+        </p:nvSpPr>
+        <p:spPr>
+          <a:xfrm>
+            <a:off x="8138160" y="1078992"/>
+            <a:ext cx="3703320" cy="5212080"/>
+          </a:xfrm>
+          <a:prstGeom prst="roundRect">
+            <a:avLst>
+              <a:gd name="adj" fmla="val 1975"/>
+            </a:avLst>
+          </a:prstGeom>
+          <a:solidFill>
+            <a:srgbClr val="FFFFFF"/>
+          </a:solidFill>
+          <a:ln/>
+          <a:effectLst>
+            <a:outerShdw blurRad="101600" dist="25400" dir="8100000" algn="bl" rotWithShape="0">
+              <a:srgbClr val="14332F">
+                <a:alpha val="8000"/>
+              </a:srgbClr>
+            </a:outerShdw>
+          </a:effectLst>
+        </p:spPr>
+      </p:sp>
+      <p:pic>
+        <p:nvPicPr>
+          <p:cNvPr id="18" name="Image 2" descr="/home/workdir/artifacts/figures/05_age_smoker.png"/>
+          <p:cNvPicPr>
+            <a:picLocks noChangeAspect="1"/>
+          </p:cNvPicPr>
+          <p:nvPr/>
+        </p:nvPicPr>
+        <p:blipFill>
+          <a:blip r:embed="rId5"/>
+          <a:stretch>
+            <a:fillRect/>
+          </a:stretch>
+        </p:blipFill>
+        <p:spPr>
+          <a:xfrm>
             <a:off x="8247888" y="1207008"/>
             <a:ext cx="3474720" cy="2176272"/>
           </a:xfrm>
@@ -14827,7 +14545,7 @@
           <a:bodyPr wrap="square" lIns="0" tIns="0" rIns="0" bIns="0" rtlCol="0" anchor="ctr"/>
           <a:lstStyle/>
           <a:p>
-            <a:pPr indent="0" marL="0">
+            <a:pPr marL="0" indent="0">
               <a:buNone/>
             </a:pPr>
             <a:r>
@@ -14866,7 +14584,7 @@
           <a:bodyPr wrap="square" lIns="0" tIns="0" rIns="0" bIns="0" rtlCol="0" anchor="ctr"/>
           <a:lstStyle/>
           <a:p>
-            <a:pPr indent="0" marL="0">
+            <a:pPr marL="0" indent="0">
               <a:buNone/>
             </a:pPr>
             <a:r>
@@ -14905,7 +14623,7 @@
           <a:bodyPr wrap="square" lIns="0" tIns="0" rIns="0" bIns="0" rtlCol="0" anchor="ctr"/>
           <a:lstStyle/>
           <a:p>
-            <a:pPr indent="0" marL="0">
+            <a:pPr marL="0" indent="0">
               <a:buNone/>
             </a:pPr>
             <a:r>
@@ -14944,7 +14662,7 @@
           <a:bodyPr wrap="square" lIns="0" tIns="0" rIns="0" bIns="0" rtlCol="0" anchor="ctr"/>
           <a:lstStyle/>
           <a:p>
-            <a:pPr indent="0" marL="0">
+            <a:pPr marL="0" indent="0">
               <a:buNone/>
             </a:pPr>
             <a:r>
@@ -14983,7 +14701,7 @@
           <a:bodyPr wrap="square" lIns="0" tIns="0" rIns="0" bIns="0" rtlCol="0" anchor="ctr"/>
           <a:lstStyle/>
           <a:p>
-            <a:pPr indent="0" marL="0">
+            <a:pPr marL="0" indent="0">
               <a:buNone/>
             </a:pPr>
             <a:r>
@@ -15022,7 +14740,7 @@
           <a:bodyPr wrap="square" lIns="0" tIns="0" rIns="0" bIns="0" rtlCol="0" anchor="ctr"/>
           <a:lstStyle/>
           <a:p>
-            <a:pPr algn="r" indent="0" marL="0">
+            <a:pPr marL="0" indent="0" algn="r">
               <a:buNone/>
             </a:pPr>
             <a:r>
@@ -15106,11 +14824,11 @@
           <a:bodyPr wrap="square" lIns="0" tIns="0" rIns="0" bIns="0" rtlCol="0" anchor="ctr"/>
           <a:lstStyle/>
           <a:p>
-            <a:pPr indent="0" marL="0">
-              <a:buNone/>
-            </a:pPr>
-            <a:r>
-              <a:rPr lang="en-US" sz="1100" b="1" spc="60" kern="0" dirty="0">
+            <a:pPr marL="0" indent="0">
+              <a:buNone/>
+            </a:pPr>
+            <a:r>
+              <a:rPr lang="en-US" sz="1100" b="1" kern="0" spc="60" dirty="0">
                 <a:solidFill>
                   <a:srgbClr val="E85D3A"/>
                 </a:solidFill>
@@ -15145,7 +14863,7 @@
           <a:bodyPr wrap="square" lIns="0" tIns="0" rIns="0" bIns="0" rtlCol="0" anchor="ctr"/>
           <a:lstStyle/>
           <a:p>
-            <a:pPr indent="0" marL="0">
+            <a:pPr marL="0" indent="0">
               <a:buNone/>
             </a:pPr>
             <a:r>
@@ -15184,7 +14902,7 @@
           </a:solidFill>
           <a:ln/>
           <a:effectLst>
-            <a:outerShdw sx="100000" sy="100000" kx="0" ky="0" algn="bl" rotWithShape="0" blurRad="101600" dist="25400" dir="8100000">
+            <a:outerShdw blurRad="101600" dist="25400" dir="8100000" algn="bl" rotWithShape="0">
               <a:srgbClr val="14332F">
                 <a:alpha val="8000"/>
               </a:srgbClr>
@@ -15213,7 +14931,7 @@
           <a:bodyPr wrap="square" lIns="0" tIns="0" rIns="0" bIns="0" rtlCol="0" anchor="ctr"/>
           <a:lstStyle/>
           <a:p>
-            <a:pPr algn="ctr" indent="0" marL="0">
+            <a:pPr marL="0" indent="0" algn="ctr">
               <a:buNone/>
             </a:pPr>
             <a:r>
@@ -15252,7 +14970,7 @@
           <a:bodyPr wrap="square" lIns="0" tIns="0" rIns="0" bIns="0" rtlCol="0" anchor="ctr"/>
           <a:lstStyle/>
           <a:p>
-            <a:pPr algn="ctr" indent="0" marL="0">
+            <a:pPr marL="0" indent="0" algn="ctr">
               <a:buNone/>
             </a:pPr>
             <a:r>
@@ -15291,7 +15009,7 @@
           <a:bodyPr wrap="square" lIns="0" tIns="0" rIns="0" bIns="0" rtlCol="0" anchor="ctr"/>
           <a:lstStyle/>
           <a:p>
-            <a:pPr algn="ctr" indent="0" marL="0">
+            <a:pPr marL="0" indent="0" algn="ctr">
               <a:buNone/>
             </a:pPr>
             <a:r>
@@ -15308,7 +15026,7 @@
             <a:endParaRPr lang="en-US" sz="1200" dirty="0"/>
           </a:p>
           <a:p>
-            <a:pPr algn="ctr" indent="0" marL="0">
+            <a:pPr marL="0" indent="0" algn="ctr">
               <a:buNone/>
             </a:pPr>
             <a:r>
@@ -15347,7 +15065,7 @@
           </a:solidFill>
           <a:ln/>
           <a:effectLst>
-            <a:outerShdw sx="100000" sy="100000" kx="0" ky="0" algn="bl" rotWithShape="0" blurRad="101600" dist="25400" dir="8100000">
+            <a:outerShdw blurRad="101600" dist="25400" dir="8100000" algn="bl" rotWithShape="0">
               <a:srgbClr val="14332F">
                 <a:alpha val="8000"/>
               </a:srgbClr>
@@ -15376,7 +15094,7 @@
           <a:bodyPr wrap="square" lIns="0" tIns="0" rIns="0" bIns="0" rtlCol="0" anchor="ctr"/>
           <a:lstStyle/>
           <a:p>
-            <a:pPr algn="ctr" indent="0" marL="0">
+            <a:pPr marL="0" indent="0" algn="ctr">
               <a:buNone/>
             </a:pPr>
             <a:r>
@@ -15415,7 +15133,7 @@
           <a:bodyPr wrap="square" lIns="0" tIns="0" rIns="0" bIns="0" rtlCol="0" anchor="ctr"/>
           <a:lstStyle/>
           <a:p>
-            <a:pPr algn="ctr" indent="0" marL="0">
+            <a:pPr marL="0" indent="0" algn="ctr">
               <a:buNone/>
             </a:pPr>
             <a:r>
@@ -15454,7 +15172,7 @@
           <a:bodyPr wrap="square" lIns="0" tIns="0" rIns="0" bIns="0" rtlCol="0" anchor="ctr"/>
           <a:lstStyle/>
           <a:p>
-            <a:pPr algn="ctr" indent="0" marL="0">
+            <a:pPr marL="0" indent="0" algn="ctr">
               <a:buNone/>
             </a:pPr>
             <a:r>
@@ -15471,7 +15189,7 @@
             <a:endParaRPr lang="en-US" sz="1200" dirty="0"/>
           </a:p>
           <a:p>
-            <a:pPr algn="ctr" indent="0" marL="0">
+            <a:pPr marL="0" indent="0" algn="ctr">
               <a:buNone/>
             </a:pPr>
             <a:r>
@@ -15510,7 +15228,7 @@
           </a:solidFill>
           <a:ln/>
           <a:effectLst>
-            <a:outerShdw sx="100000" sy="100000" kx="0" ky="0" algn="bl" rotWithShape="0" blurRad="101600" dist="25400" dir="8100000">
+            <a:outerShdw blurRad="101600" dist="25400" dir="8100000" algn="bl" rotWithShape="0">
               <a:srgbClr val="14332F">
                 <a:alpha val="8000"/>
               </a:srgbClr>
@@ -15539,7 +15257,7 @@
           <a:bodyPr wrap="square" lIns="0" tIns="0" rIns="0" bIns="0" rtlCol="0" anchor="ctr"/>
           <a:lstStyle/>
           <a:p>
-            <a:pPr algn="ctr" indent="0" marL="0">
+            <a:pPr marL="0" indent="0" algn="ctr">
               <a:buNone/>
             </a:pPr>
             <a:r>
@@ -15578,7 +15296,7 @@
           <a:bodyPr wrap="square" lIns="0" tIns="0" rIns="0" bIns="0" rtlCol="0" anchor="ctr"/>
           <a:lstStyle/>
           <a:p>
-            <a:pPr algn="ctr" indent="0" marL="0">
+            <a:pPr marL="0" indent="0" algn="ctr">
               <a:buNone/>
             </a:pPr>
             <a:r>
@@ -15617,7 +15335,7 @@
           <a:bodyPr wrap="square" lIns="0" tIns="0" rIns="0" bIns="0" rtlCol="0" anchor="ctr"/>
           <a:lstStyle/>
           <a:p>
-            <a:pPr algn="ctr" indent="0" marL="0">
+            <a:pPr marL="0" indent="0" algn="ctr">
               <a:buNone/>
             </a:pPr>
             <a:r>
@@ -15634,7 +15352,7 @@
             <a:endParaRPr lang="en-US" sz="1200" dirty="0"/>
           </a:p>
           <a:p>
-            <a:pPr algn="ctr" indent="0" marL="0">
+            <a:pPr marL="0" indent="0" algn="ctr">
               <a:buNone/>
             </a:pPr>
             <a:r>
@@ -15673,7 +15391,7 @@
           </a:solidFill>
           <a:ln/>
           <a:effectLst>
-            <a:outerShdw sx="100000" sy="100000" kx="0" ky="0" algn="bl" rotWithShape="0" blurRad="101600" dist="25400" dir="8100000">
+            <a:outerShdw blurRad="101600" dist="25400" dir="8100000" algn="bl" rotWithShape="0">
               <a:srgbClr val="14332F">
                 <a:alpha val="8000"/>
               </a:srgbClr>
@@ -15702,7 +15420,7 @@
           <a:bodyPr wrap="square" lIns="0" tIns="0" rIns="0" bIns="0" rtlCol="0" anchor="ctr"/>
           <a:lstStyle/>
           <a:p>
-            <a:pPr algn="ctr" indent="0" marL="0">
+            <a:pPr marL="0" indent="0" algn="ctr">
               <a:buNone/>
             </a:pPr>
             <a:r>
@@ -15741,7 +15459,7 @@
           <a:bodyPr wrap="square" lIns="0" tIns="0" rIns="0" bIns="0" rtlCol="0" anchor="ctr"/>
           <a:lstStyle/>
           <a:p>
-            <a:pPr algn="ctr" indent="0" marL="0">
+            <a:pPr marL="0" indent="0" algn="ctr">
               <a:buNone/>
             </a:pPr>
             <a:r>
@@ -15780,7 +15498,7 @@
           <a:bodyPr wrap="square" lIns="0" tIns="0" rIns="0" bIns="0" rtlCol="0" anchor="ctr"/>
           <a:lstStyle/>
           <a:p>
-            <a:pPr algn="ctr" indent="0" marL="0">
+            <a:pPr marL="0" indent="0" algn="ctr">
               <a:buNone/>
             </a:pPr>
             <a:r>
@@ -15797,7 +15515,7 @@
             <a:endParaRPr lang="en-US" sz="1200" dirty="0"/>
           </a:p>
           <a:p>
-            <a:pPr algn="ctr" indent="0" marL="0">
+            <a:pPr marL="0" indent="0" algn="ctr">
               <a:buNone/>
             </a:pPr>
             <a:r>
@@ -15836,7 +15554,7 @@
           </a:solidFill>
           <a:ln/>
           <a:effectLst>
-            <a:outerShdw sx="100000" sy="100000" kx="0" ky="0" algn="bl" rotWithShape="0" blurRad="101600" dist="25400" dir="8100000">
+            <a:outerShdw blurRad="101600" dist="25400" dir="8100000" algn="bl" rotWithShape="0">
               <a:srgbClr val="14332F">
                 <a:alpha val="8000"/>
               </a:srgbClr>
@@ -15865,7 +15583,7 @@
           <a:bodyPr wrap="square" lIns="0" tIns="0" rIns="0" bIns="0" rtlCol="0" anchor="ctr"/>
           <a:lstStyle/>
           <a:p>
-            <a:pPr algn="ctr" indent="0" marL="0">
+            <a:pPr marL="0" indent="0" algn="ctr">
               <a:buNone/>
             </a:pPr>
             <a:r>
@@ -15904,7 +15622,7 @@
           <a:bodyPr wrap="square" lIns="0" tIns="0" rIns="0" bIns="0" rtlCol="0" anchor="ctr"/>
           <a:lstStyle/>
           <a:p>
-            <a:pPr algn="ctr" indent="0" marL="0">
+            <a:pPr marL="0" indent="0" algn="ctr">
               <a:buNone/>
             </a:pPr>
             <a:r>
@@ -15943,7 +15661,7 @@
           <a:bodyPr wrap="square" lIns="0" tIns="0" rIns="0" bIns="0" rtlCol="0" anchor="ctr"/>
           <a:lstStyle/>
           <a:p>
-            <a:pPr algn="ctr" indent="0" marL="0">
+            <a:pPr marL="0" indent="0" algn="ctr">
               <a:buNone/>
             </a:pPr>
             <a:r>
@@ -15960,7 +15678,7 @@
             <a:endParaRPr lang="en-US" sz="1200" dirty="0"/>
           </a:p>
           <a:p>
-            <a:pPr algn="ctr" indent="0" marL="0">
+            <a:pPr marL="0" indent="0" algn="ctr">
               <a:buNone/>
             </a:pPr>
             <a:r>
@@ -15999,7 +15717,7 @@
           </a:solidFill>
           <a:ln/>
           <a:effectLst>
-            <a:outerShdw sx="100000" sy="100000" kx="0" ky="0" algn="bl" rotWithShape="0" blurRad="101600" dist="25400" dir="8100000">
+            <a:outerShdw blurRad="101600" dist="25400" dir="8100000" algn="bl" rotWithShape="0">
               <a:srgbClr val="14332F">
                 <a:alpha val="8000"/>
               </a:srgbClr>
@@ -16028,7 +15746,7 @@
           <a:bodyPr wrap="square" lIns="0" tIns="0" rIns="0" bIns="0" rtlCol="0" anchor="ctr"/>
           <a:lstStyle/>
           <a:p>
-            <a:pPr indent="0" marL="0">
+            <a:pPr marL="0" indent="0">
               <a:buNone/>
             </a:pPr>
             <a:r>
@@ -16067,7 +15785,7 @@
           <a:bodyPr wrap="square" lIns="0" tIns="0" rIns="0" bIns="0" rtlCol="0" anchor="ctr"/>
           <a:lstStyle/>
           <a:p>
-            <a:pPr indent="0" marL="0">
+            <a:pPr marL="0" indent="0">
               <a:buNone/>
             </a:pPr>
             <a:r>
@@ -16212,7 +15930,7 @@
           <a:bodyPr wrap="square" lIns="0" tIns="0" rIns="0" bIns="0" rtlCol="0" anchor="ctr"/>
           <a:lstStyle/>
           <a:p>
-            <a:pPr indent="0" marL="0">
+            <a:pPr marL="0" indent="0">
               <a:buNone/>
             </a:pPr>
             <a:r>
@@ -16251,7 +15969,7 @@
           <a:bodyPr wrap="square" lIns="0" tIns="0" rIns="0" bIns="0" rtlCol="0" anchor="ctr"/>
           <a:lstStyle/>
           <a:p>
-            <a:pPr algn="r" indent="0" marL="0">
+            <a:pPr marL="0" indent="0" algn="r">
               <a:buNone/>
             </a:pPr>
             <a:r>
@@ -16335,11 +16053,11 @@
           <a:bodyPr wrap="square" lIns="0" tIns="0" rIns="0" bIns="0" rtlCol="0" anchor="ctr"/>
           <a:lstStyle/>
           <a:p>
-            <a:pPr indent="0" marL="0">
-              <a:buNone/>
-            </a:pPr>
-            <a:r>
-              <a:rPr lang="en-US" sz="1100" b="1" spc="60" kern="0" dirty="0">
+            <a:pPr marL="0" indent="0">
+              <a:buNone/>
+            </a:pPr>
+            <a:r>
+              <a:rPr lang="en-US" sz="1100" b="1" kern="0" spc="60" dirty="0">
                 <a:solidFill>
                   <a:srgbClr val="E85D3A"/>
                 </a:solidFill>
@@ -16374,7 +16092,7 @@
           <a:bodyPr wrap="square" lIns="0" tIns="0" rIns="0" bIns="0" rtlCol="0" anchor="ctr"/>
           <a:lstStyle/>
           <a:p>
-            <a:pPr indent="0" marL="0">
+            <a:pPr marL="0" indent="0">
               <a:buNone/>
             </a:pPr>
             <a:r>
@@ -16413,7 +16131,7 @@
           </a:solidFill>
           <a:ln/>
           <a:effectLst>
-            <a:outerShdw sx="100000" sy="100000" kx="0" ky="0" algn="bl" rotWithShape="0" blurRad="101600" dist="25400" dir="8100000">
+            <a:outerShdw blurRad="101600" dist="25400" dir="8100000" algn="bl" rotWithShape="0">
               <a:srgbClr val="14332F">
                 <a:alpha val="8000"/>
               </a:srgbClr>
@@ -16464,7 +16182,7 @@
           <a:bodyPr wrap="square" lIns="0" tIns="0" rIns="0" bIns="0" rtlCol="0" anchor="ctr"/>
           <a:lstStyle/>
           <a:p>
-            <a:pPr algn="ctr" indent="0" marL="0">
+            <a:pPr marL="0" indent="0" algn="ctr">
               <a:buNone/>
             </a:pPr>
             <a:r>
@@ -16503,7 +16221,7 @@
           <a:bodyPr wrap="square" lIns="0" tIns="0" rIns="0" bIns="0" rtlCol="0" anchor="ctr"/>
           <a:lstStyle/>
           <a:p>
-            <a:pPr indent="0" marL="0">
+            <a:pPr marL="0" indent="0">
               <a:buNone/>
             </a:pPr>
             <a:r>
@@ -16542,7 +16260,7 @@
           <a:bodyPr wrap="square" lIns="0" tIns="0" rIns="0" bIns="0" rtlCol="0" anchor="ctr"/>
           <a:lstStyle/>
           <a:p>
-            <a:pPr indent="0" marL="0">
+            <a:pPr marL="0" indent="0">
               <a:buNone/>
             </a:pPr>
             <a:r>
@@ -16581,7 +16299,7 @@
           <a:bodyPr wrap="square" lIns="0" tIns="0" rIns="0" bIns="0" rtlCol="0" anchor="ctr"/>
           <a:lstStyle/>
           <a:p>
-            <a:pPr indent="0" marL="0">
+            <a:pPr marL="0" indent="0">
               <a:buNone/>
             </a:pPr>
             <a:r>
@@ -16620,7 +16338,7 @@
           </a:solidFill>
           <a:ln/>
           <a:effectLst>
-            <a:outerShdw sx="100000" sy="100000" kx="0" ky="0" algn="bl" rotWithShape="0" blurRad="101600" dist="25400" dir="8100000">
+            <a:outerShdw blurRad="101600" dist="25400" dir="8100000" algn="bl" rotWithShape="0">
               <a:srgbClr val="14332F">
                 <a:alpha val="8000"/>
               </a:srgbClr>
@@ -16671,7 +16389,7 @@
           <a:bodyPr wrap="square" lIns="0" tIns="0" rIns="0" bIns="0" rtlCol="0" anchor="ctr"/>
           <a:lstStyle/>
           <a:p>
-            <a:pPr algn="ctr" indent="0" marL="0">
+            <a:pPr marL="0" indent="0" algn="ctr">
               <a:buNone/>
             </a:pPr>
             <a:r>
@@ -16710,7 +16428,7 @@
           <a:bodyPr wrap="square" lIns="0" tIns="0" rIns="0" bIns="0" rtlCol="0" anchor="ctr"/>
           <a:lstStyle/>
           <a:p>
-            <a:pPr indent="0" marL="0">
+            <a:pPr marL="0" indent="0">
               <a:buNone/>
             </a:pPr>
             <a:r>
@@ -16749,7 +16467,7 @@
           <a:bodyPr wrap="square" lIns="0" tIns="0" rIns="0" bIns="0" rtlCol="0" anchor="ctr"/>
           <a:lstStyle/>
           <a:p>
-            <a:pPr indent="0" marL="0">
+            <a:pPr marL="0" indent="0">
               <a:buNone/>
             </a:pPr>
             <a:r>
@@ -16788,7 +16506,7 @@
           <a:bodyPr wrap="square" lIns="0" tIns="0" rIns="0" bIns="0" rtlCol="0" anchor="ctr"/>
           <a:lstStyle/>
           <a:p>
-            <a:pPr indent="0" marL="0">
+            <a:pPr marL="0" indent="0">
               <a:buNone/>
             </a:pPr>
             <a:r>
@@ -16827,7 +16545,7 @@
           </a:solidFill>
           <a:ln/>
           <a:effectLst>
-            <a:outerShdw sx="100000" sy="100000" kx="0" ky="0" algn="bl" rotWithShape="0" blurRad="101600" dist="25400" dir="8100000">
+            <a:outerShdw blurRad="101600" dist="25400" dir="8100000" algn="bl" rotWithShape="0">
               <a:srgbClr val="14332F">
                 <a:alpha val="8000"/>
               </a:srgbClr>
@@ -16878,7 +16596,7 @@
           <a:bodyPr wrap="square" lIns="0" tIns="0" rIns="0" bIns="0" rtlCol="0" anchor="ctr"/>
           <a:lstStyle/>
           <a:p>
-            <a:pPr algn="ctr" indent="0" marL="0">
+            <a:pPr marL="0" indent="0" algn="ctr">
               <a:buNone/>
             </a:pPr>
             <a:r>
@@ -16917,7 +16635,7 @@
           <a:bodyPr wrap="square" lIns="0" tIns="0" rIns="0" bIns="0" rtlCol="0" anchor="ctr"/>
           <a:lstStyle/>
           <a:p>
-            <a:pPr indent="0" marL="0">
+            <a:pPr marL="0" indent="0">
               <a:buNone/>
             </a:pPr>
             <a:r>
@@ -16956,7 +16674,7 @@
           <a:bodyPr wrap="square" lIns="0" tIns="0" rIns="0" bIns="0" rtlCol="0" anchor="ctr"/>
           <a:lstStyle/>
           <a:p>
-            <a:pPr indent="0" marL="0">
+            <a:pPr marL="0" indent="0">
               <a:buNone/>
             </a:pPr>
             <a:r>
@@ -16995,7 +16713,7 @@
           <a:bodyPr wrap="square" lIns="0" tIns="0" rIns="0" bIns="0" rtlCol="0" anchor="ctr"/>
           <a:lstStyle/>
           <a:p>
-            <a:pPr indent="0" marL="0">
+            <a:pPr marL="0" indent="0">
               <a:buNone/>
             </a:pPr>
             <a:r>
@@ -17034,7 +16752,7 @@
           </a:solidFill>
           <a:ln/>
           <a:effectLst>
-            <a:outerShdw sx="100000" sy="100000" kx="0" ky="0" algn="bl" rotWithShape="0" blurRad="101600" dist="25400" dir="8100000">
+            <a:outerShdw blurRad="101600" dist="25400" dir="8100000" algn="bl" rotWithShape="0">
               <a:srgbClr val="14332F">
                 <a:alpha val="8000"/>
               </a:srgbClr>
@@ -17085,7 +16803,7 @@
           <a:bodyPr wrap="square" lIns="0" tIns="0" rIns="0" bIns="0" rtlCol="0" anchor="ctr"/>
           <a:lstStyle/>
           <a:p>
-            <a:pPr algn="ctr" indent="0" marL="0">
+            <a:pPr marL="0" indent="0" algn="ctr">
               <a:buNone/>
             </a:pPr>
             <a:r>
@@ -17124,7 +16842,7 @@
           <a:bodyPr wrap="square" lIns="0" tIns="0" rIns="0" bIns="0" rtlCol="0" anchor="ctr"/>
           <a:lstStyle/>
           <a:p>
-            <a:pPr indent="0" marL="0">
+            <a:pPr marL="0" indent="0">
               <a:buNone/>
             </a:pPr>
             <a:r>
@@ -17163,7 +16881,7 @@
           <a:bodyPr wrap="square" lIns="0" tIns="0" rIns="0" bIns="0" rtlCol="0" anchor="ctr"/>
           <a:lstStyle/>
           <a:p>
-            <a:pPr indent="0" marL="0">
+            <a:pPr marL="0" indent="0">
               <a:buNone/>
             </a:pPr>
             <a:r>
@@ -17202,7 +16920,7 @@
           <a:bodyPr wrap="square" lIns="0" tIns="0" rIns="0" bIns="0" rtlCol="0" anchor="ctr"/>
           <a:lstStyle/>
           <a:p>
-            <a:pPr indent="0" marL="0">
+            <a:pPr marL="0" indent="0">
               <a:buNone/>
             </a:pPr>
             <a:r>
@@ -17241,7 +16959,7 @@
           </a:solidFill>
           <a:ln/>
           <a:effectLst>
-            <a:outerShdw sx="100000" sy="100000" kx="0" ky="0" algn="bl" rotWithShape="0" blurRad="101600" dist="25400" dir="8100000">
+            <a:outerShdw blurRad="101600" dist="25400" dir="8100000" algn="bl" rotWithShape="0">
               <a:srgbClr val="14332F">
                 <a:alpha val="8000"/>
               </a:srgbClr>
@@ -17292,7 +17010,7 @@
           <a:bodyPr wrap="square" lIns="0" tIns="0" rIns="0" bIns="0" rtlCol="0" anchor="ctr"/>
           <a:lstStyle/>
           <a:p>
-            <a:pPr algn="ctr" indent="0" marL="0">
+            <a:pPr marL="0" indent="0" algn="ctr">
               <a:buNone/>
             </a:pPr>
             <a:r>
@@ -17331,7 +17049,7 @@
           <a:bodyPr wrap="square" lIns="0" tIns="0" rIns="0" bIns="0" rtlCol="0" anchor="ctr"/>
           <a:lstStyle/>
           <a:p>
-            <a:pPr indent="0" marL="0">
+            <a:pPr marL="0" indent="0">
               <a:buNone/>
             </a:pPr>
             <a:r>
@@ -17370,7 +17088,7 @@
           <a:bodyPr wrap="square" lIns="0" tIns="0" rIns="0" bIns="0" rtlCol="0" anchor="ctr"/>
           <a:lstStyle/>
           <a:p>
-            <a:pPr indent="0" marL="0">
+            <a:pPr marL="0" indent="0">
               <a:buNone/>
             </a:pPr>
             <a:r>
@@ -17409,7 +17127,7 @@
           <a:bodyPr wrap="square" lIns="0" tIns="0" rIns="0" bIns="0" rtlCol="0" anchor="ctr"/>
           <a:lstStyle/>
           <a:p>
-            <a:pPr indent="0" marL="0">
+            <a:pPr marL="0" indent="0">
               <a:buNone/>
             </a:pPr>
             <a:r>
@@ -17448,7 +17166,7 @@
           <a:bodyPr wrap="square" lIns="0" tIns="0" rIns="0" bIns="0" rtlCol="0" anchor="ctr"/>
           <a:lstStyle/>
           <a:p>
-            <a:pPr indent="0" marL="0">
+            <a:pPr marL="0" indent="0">
               <a:buNone/>
             </a:pPr>
             <a:r>
@@ -17487,7 +17205,7 @@
           <a:bodyPr wrap="square" lIns="0" tIns="0" rIns="0" bIns="0" rtlCol="0" anchor="ctr"/>
           <a:lstStyle/>
           <a:p>
-            <a:pPr algn="r" indent="0" marL="0">
+            <a:pPr marL="0" indent="0" algn="r">
               <a:buNone/>
             </a:pPr>
             <a:r>
@@ -17571,11 +17289,11 @@
           <a:bodyPr wrap="square" lIns="0" tIns="0" rIns="0" bIns="0" rtlCol="0" anchor="ctr"/>
           <a:lstStyle/>
           <a:p>
-            <a:pPr indent="0" marL="0">
-              <a:buNone/>
-            </a:pPr>
-            <a:r>
-              <a:rPr lang="en-US" sz="1100" b="1" spc="60" kern="0" dirty="0">
+            <a:pPr marL="0" indent="0">
+              <a:buNone/>
+            </a:pPr>
+            <a:r>
+              <a:rPr lang="en-US" sz="1100" b="1" kern="0" spc="60" dirty="0">
                 <a:solidFill>
                   <a:srgbClr val="E85D3A"/>
                 </a:solidFill>
@@ -17610,7 +17328,7 @@
           <a:bodyPr wrap="square" lIns="0" tIns="0" rIns="0" bIns="0" rtlCol="0" anchor="ctr"/>
           <a:lstStyle/>
           <a:p>
-            <a:pPr indent="0" marL="0">
+            <a:pPr marL="0" indent="0">
               <a:buNone/>
             </a:pPr>
             <a:r>
@@ -17637,27 +17355,69 @@
           <p:nvPr>
             <p:extLst>
               <p:ext uri="{D42A27DB-BD31-4B8C-83A1-F6EECF244321}">
-                <p14:modId xmlns:p14="http://schemas.microsoft.com/office/powerpoint/2010/main" val="1579011935"/>
+                <p14:modId xmlns:p14="http://schemas.microsoft.com/office/powerpoint/2010/main" val="3548842033"/>
               </p:ext>
             </p:extLst>
           </p:nvPr>
         </p:nvGraphicFramePr>
         <p:xfrm>
           <a:off x="365760" y="1078992"/>
-          <a:ext cx="11475720" cy="2880360"/>
+          <a:ext cx="11475720" cy="2468880"/>
         </p:xfrm>
         <a:graphic>
           <a:graphicData uri="http://schemas.openxmlformats.org/drawingml/2006/table">
             <a:tbl>
               <a:tblPr/>
               <a:tblGrid>
-                <a:gridCol w="2468880"/>
-                <a:gridCol w="1417320"/>
-                <a:gridCol w="1417320"/>
-                <a:gridCol w="1417320"/>
-                <a:gridCol w="1417320"/>
-                <a:gridCol w="1417320"/>
-                <a:gridCol w="1920240"/>
+                <a:gridCol w="2468880">
+                  <a:extLst>
+                    <a:ext uri="{9D8B030D-6E8A-4147-A177-3AD203B41FA5}">
+                      <a16:colId xmlns:a16="http://schemas.microsoft.com/office/drawing/2014/main" val="20000"/>
+                    </a:ext>
+                  </a:extLst>
+                </a:gridCol>
+                <a:gridCol w="1417320">
+                  <a:extLst>
+                    <a:ext uri="{9D8B030D-6E8A-4147-A177-3AD203B41FA5}">
+                      <a16:colId xmlns:a16="http://schemas.microsoft.com/office/drawing/2014/main" val="20001"/>
+                    </a:ext>
+                  </a:extLst>
+                </a:gridCol>
+                <a:gridCol w="1417320">
+                  <a:extLst>
+                    <a:ext uri="{9D8B030D-6E8A-4147-A177-3AD203B41FA5}">
+                      <a16:colId xmlns:a16="http://schemas.microsoft.com/office/drawing/2014/main" val="20002"/>
+                    </a:ext>
+                  </a:extLst>
+                </a:gridCol>
+                <a:gridCol w="1417320">
+                  <a:extLst>
+                    <a:ext uri="{9D8B030D-6E8A-4147-A177-3AD203B41FA5}">
+                      <a16:colId xmlns:a16="http://schemas.microsoft.com/office/drawing/2014/main" val="20003"/>
+                    </a:ext>
+                  </a:extLst>
+                </a:gridCol>
+                <a:gridCol w="1417320">
+                  <a:extLst>
+                    <a:ext uri="{9D8B030D-6E8A-4147-A177-3AD203B41FA5}">
+                      <a16:colId xmlns:a16="http://schemas.microsoft.com/office/drawing/2014/main" val="20004"/>
+                    </a:ext>
+                  </a:extLst>
+                </a:gridCol>
+                <a:gridCol w="1417320">
+                  <a:extLst>
+                    <a:ext uri="{9D8B030D-6E8A-4147-A177-3AD203B41FA5}">
+                      <a16:colId xmlns:a16="http://schemas.microsoft.com/office/drawing/2014/main" val="20005"/>
+                    </a:ext>
+                  </a:extLst>
+                </a:gridCol>
+                <a:gridCol w="1920240">
+                  <a:extLst>
+                    <a:ext uri="{9D8B030D-6E8A-4147-A177-3AD203B41FA5}">
+                      <a16:colId xmlns:a16="http://schemas.microsoft.com/office/drawing/2014/main" val="20006"/>
+                    </a:ext>
+                  </a:extLst>
+                </a:gridCol>
               </a:tblGrid>
               <a:tr h="411480">
                 <a:tc>
@@ -17665,7 +17425,7 @@
                     <a:bodyPr/>
                     <a:lstStyle/>
                     <a:p>
-                      <a:pPr algn="ctr" indent="0" marL="0">
+                      <a:pPr marL="0" indent="0" algn="ctr">
                         <a:buNone/>
                       </a:pPr>
                       <a:r>
@@ -17686,7 +17446,7 @@
                       </a:endParaRPr>
                     </a:p>
                   </a:txBody>
-                  <a:tcPr marL="91440" marR="91440" marT="45720" marB="45720" anchor="ctr">
+                  <a:tcPr anchor="ctr">
                     <a:lnL w="12700" cap="flat" cmpd="sng" algn="ctr">
                       <a:solidFill>
                         <a:srgbClr val="F4EFE6"/>
@@ -17733,7 +17493,7 @@
                     <a:bodyPr/>
                     <a:lstStyle/>
                     <a:p>
-                      <a:pPr algn="ctr" indent="0" marL="0">
+                      <a:pPr marL="0" indent="0" algn="ctr">
                         <a:buNone/>
                       </a:pPr>
                       <a:r>
@@ -17754,7 +17514,7 @@
                       </a:endParaRPr>
                     </a:p>
                   </a:txBody>
-                  <a:tcPr marL="91440" marR="91440" marT="45720" marB="45720" anchor="ctr">
+                  <a:tcPr anchor="ctr">
                     <a:lnL w="12700" cap="flat" cmpd="sng" algn="ctr">
                       <a:solidFill>
                         <a:srgbClr val="F4EFE6"/>
@@ -17801,7 +17561,7 @@
                     <a:bodyPr/>
                     <a:lstStyle/>
                     <a:p>
-                      <a:pPr algn="ctr" indent="0" marL="0">
+                      <a:pPr marL="0" indent="0" algn="ctr">
                         <a:buNone/>
                       </a:pPr>
                       <a:r>
@@ -17822,7 +17582,7 @@
                       </a:endParaRPr>
                     </a:p>
                   </a:txBody>
-                  <a:tcPr marL="91440" marR="91440" marT="45720" marB="45720" anchor="ctr">
+                  <a:tcPr anchor="ctr">
                     <a:lnL w="12700" cap="flat" cmpd="sng" algn="ctr">
                       <a:solidFill>
                         <a:srgbClr val="F4EFE6"/>
@@ -17869,7 +17629,7 @@
                     <a:bodyPr/>
                     <a:lstStyle/>
                     <a:p>
-                      <a:pPr algn="ctr" indent="0" marL="0">
+                      <a:pPr marL="0" indent="0" algn="ctr">
                         <a:buNone/>
                       </a:pPr>
                       <a:r>
@@ -17890,7 +17650,7 @@
                       </a:endParaRPr>
                     </a:p>
                   </a:txBody>
-                  <a:tcPr marL="91440" marR="91440" marT="45720" marB="45720" anchor="ctr">
+                  <a:tcPr anchor="ctr">
                     <a:lnL w="12700" cap="flat" cmpd="sng" algn="ctr">
                       <a:solidFill>
                         <a:srgbClr val="F4EFE6"/>
@@ -17937,7 +17697,7 @@
                     <a:bodyPr/>
                     <a:lstStyle/>
                     <a:p>
-                      <a:pPr algn="ctr" indent="0" marL="0">
+                      <a:pPr marL="0" indent="0" algn="ctr">
                         <a:buNone/>
                       </a:pPr>
                       <a:r>
@@ -17958,7 +17718,7 @@
                       </a:endParaRPr>
                     </a:p>
                   </a:txBody>
-                  <a:tcPr marL="91440" marR="91440" marT="45720" marB="45720" anchor="ctr">
+                  <a:tcPr anchor="ctr">
                     <a:lnL w="12700" cap="flat" cmpd="sng" algn="ctr">
                       <a:solidFill>
                         <a:srgbClr val="F4EFE6"/>
@@ -18005,7 +17765,7 @@
                     <a:bodyPr/>
                     <a:lstStyle/>
                     <a:p>
-                      <a:pPr algn="ctr" indent="0" marL="0">
+                      <a:pPr marL="0" indent="0" algn="ctr">
                         <a:buNone/>
                       </a:pPr>
                       <a:r>
@@ -18026,7 +17786,7 @@
                       </a:endParaRPr>
                     </a:p>
                   </a:txBody>
-                  <a:tcPr marL="91440" marR="91440" marT="45720" marB="45720" anchor="ctr">
+                  <a:tcPr anchor="ctr">
                     <a:lnL w="12700" cap="flat" cmpd="sng" algn="ctr">
                       <a:solidFill>
                         <a:srgbClr val="F4EFE6"/>
@@ -18073,7 +17833,7 @@
                     <a:bodyPr/>
                     <a:lstStyle/>
                     <a:p>
-                      <a:pPr algn="ctr" indent="0" marL="0">
+                      <a:pPr marL="0" indent="0" algn="ctr">
                         <a:buNone/>
                       </a:pPr>
                       <a:r>
@@ -18094,7 +17854,7 @@
                       </a:endParaRPr>
                     </a:p>
                   </a:txBody>
-                  <a:tcPr marL="91440" marR="91440" marT="45720" marB="45720" anchor="ctr">
+                  <a:tcPr anchor="ctr">
                     <a:lnL w="12700" cap="flat" cmpd="sng" algn="ctr">
                       <a:solidFill>
                         <a:srgbClr val="F4EFE6"/>
@@ -18136,6 +17896,11 @@
                     </a:solidFill>
                   </a:tcPr>
                 </a:tc>
+                <a:extLst>
+                  <a:ext uri="{0D108BD9-81ED-4DB2-BD59-A6C34878D82A}">
+                    <a16:rowId xmlns:a16="http://schemas.microsoft.com/office/drawing/2014/main" val="10000"/>
+                  </a:ext>
+                </a:extLst>
               </a:tr>
               <a:tr h="411480">
                 <a:tc>
@@ -18143,7 +17908,7 @@
                     <a:bodyPr/>
                     <a:lstStyle/>
                     <a:p>
-                      <a:pPr algn="ctr" indent="0" marL="0">
+                      <a:pPr marL="0" indent="0" algn="ctr">
                         <a:buNone/>
                       </a:pPr>
                       <a:r>
@@ -18155,7 +17920,11 @@
                           <a:ea typeface="Arial" pitchFamily="34" charset="-122"/>
                           <a:cs typeface="Arial" pitchFamily="34" charset="-120"/>
                         </a:rPr>
-                        <a:t>Dummy (mean)</a:t>
+                        <a:t>Dummy (mean) </a:t>
+                      </a:r>
+                      <a:r>
+                        <a:rPr lang="en-US" sz="1200" dirty="0"/>
+                        <a:t>❌ </a:t>
                       </a:r>
                       <a:endParaRPr lang="en-US" sz="1200" dirty="0">
                         <a:latin typeface="Arial" charset="0"/>
@@ -18164,7 +17933,7 @@
                       </a:endParaRPr>
                     </a:p>
                   </a:txBody>
-                  <a:tcPr marL="91440" marR="91440" marT="45720" marB="45720" anchor="ctr">
+                  <a:tcPr anchor="ctr">
                     <a:lnL w="12700" cap="flat" cmpd="sng" algn="ctr">
                       <a:solidFill>
                         <a:srgbClr val="F4EFE6"/>
@@ -18211,7 +17980,7 @@
                     <a:bodyPr/>
                     <a:lstStyle/>
                     <a:p>
-                      <a:pPr algn="ctr" indent="0" marL="0">
+                      <a:pPr marL="0" indent="0" algn="ctr">
                         <a:buNone/>
                       </a:pPr>
                       <a:r>
@@ -18232,7 +18001,7 @@
                       </a:endParaRPr>
                     </a:p>
                   </a:txBody>
-                  <a:tcPr marL="91440" marR="91440" marT="45720" marB="45720" anchor="ctr">
+                  <a:tcPr anchor="ctr">
                     <a:lnL w="12700" cap="flat" cmpd="sng" algn="ctr">
                       <a:solidFill>
                         <a:srgbClr val="F4EFE6"/>
@@ -18279,7 +18048,7 @@
                     <a:bodyPr/>
                     <a:lstStyle/>
                     <a:p>
-                      <a:pPr algn="ctr" indent="0" marL="0">
+                      <a:pPr marL="0" indent="0" algn="ctr">
                         <a:buNone/>
                       </a:pPr>
                       <a:r>
@@ -18300,7 +18069,7 @@
                       </a:endParaRPr>
                     </a:p>
                   </a:txBody>
-                  <a:tcPr marL="91440" marR="91440" marT="45720" marB="45720" anchor="ctr">
+                  <a:tcPr anchor="ctr">
                     <a:lnL w="12700" cap="flat" cmpd="sng" algn="ctr">
                       <a:solidFill>
                         <a:srgbClr val="F4EFE6"/>
@@ -18347,7 +18116,7 @@
                     <a:bodyPr/>
                     <a:lstStyle/>
                     <a:p>
-                      <a:pPr algn="ctr" indent="0" marL="0">
+                      <a:pPr marL="0" indent="0" algn="ctr">
                         <a:buNone/>
                       </a:pPr>
                       <a:r>
@@ -18368,7 +18137,7 @@
                       </a:endParaRPr>
                     </a:p>
                   </a:txBody>
-                  <a:tcPr marL="91440" marR="91440" marT="45720" marB="45720" anchor="ctr">
+                  <a:tcPr anchor="ctr">
                     <a:lnL w="12700" cap="flat" cmpd="sng" algn="ctr">
                       <a:solidFill>
                         <a:srgbClr val="F4EFE6"/>
@@ -18415,7 +18184,7 @@
                     <a:bodyPr/>
                     <a:lstStyle/>
                     <a:p>
-                      <a:pPr algn="ctr" indent="0" marL="0">
+                      <a:pPr marL="0" indent="0" algn="ctr">
                         <a:buNone/>
                       </a:pPr>
                       <a:r>
@@ -18436,7 +18205,7 @@
                       </a:endParaRPr>
                     </a:p>
                   </a:txBody>
-                  <a:tcPr marL="91440" marR="91440" marT="45720" marB="45720" anchor="ctr">
+                  <a:tcPr anchor="ctr">
                     <a:lnL w="12700" cap="flat" cmpd="sng" algn="ctr">
                       <a:solidFill>
                         <a:srgbClr val="F4EFE6"/>
@@ -18483,7 +18252,7 @@
                     <a:bodyPr/>
                     <a:lstStyle/>
                     <a:p>
-                      <a:pPr algn="ctr" indent="0" marL="0">
+                      <a:pPr marL="0" indent="0" algn="ctr">
                         <a:buNone/>
                       </a:pPr>
                       <a:r>
@@ -18504,7 +18273,7 @@
                       </a:endParaRPr>
                     </a:p>
                   </a:txBody>
-                  <a:tcPr marL="91440" marR="91440" marT="45720" marB="45720" anchor="ctr">
+                  <a:tcPr anchor="ctr">
                     <a:lnL w="12700" cap="flat" cmpd="sng" algn="ctr">
                       <a:solidFill>
                         <a:srgbClr val="F4EFE6"/>
@@ -18551,7 +18320,7 @@
                     <a:bodyPr/>
                     <a:lstStyle/>
                     <a:p>
-                      <a:pPr algn="ctr" indent="0" marL="0">
+                      <a:pPr marL="0" indent="0" algn="ctr">
                         <a:buNone/>
                       </a:pPr>
                       <a:r>
@@ -18572,7 +18341,7 @@
                       </a:endParaRPr>
                     </a:p>
                   </a:txBody>
-                  <a:tcPr marL="91440" marR="91440" marT="45720" marB="45720" anchor="ctr">
+                  <a:tcPr anchor="ctr">
                     <a:lnL w="12700" cap="flat" cmpd="sng" algn="ctr">
                       <a:solidFill>
                         <a:srgbClr val="F4EFE6"/>
@@ -18614,6 +18383,11 @@
                     </a:solidFill>
                   </a:tcPr>
                 </a:tc>
+                <a:extLst>
+                  <a:ext uri="{0D108BD9-81ED-4DB2-BD59-A6C34878D82A}">
+                    <a16:rowId xmlns:a16="http://schemas.microsoft.com/office/drawing/2014/main" val="10001"/>
+                  </a:ext>
+                </a:extLst>
               </a:tr>
               <a:tr h="411480">
                 <a:tc>
@@ -18621,7 +18395,7 @@
                     <a:bodyPr/>
                     <a:lstStyle/>
                     <a:p>
-                      <a:pPr algn="ctr" indent="0" marL="0">
+                      <a:pPr marL="0" indent="0" algn="ctr">
                         <a:buNone/>
                       </a:pPr>
                       <a:r>
@@ -18633,7 +18407,11 @@
                           <a:ea typeface="Arial" pitchFamily="34" charset="-122"/>
                           <a:cs typeface="Arial" pitchFamily="34" charset="-120"/>
                         </a:rPr>
-                        <a:t>Linear Regression</a:t>
+                        <a:t>Linear Regression </a:t>
+                      </a:r>
+                      <a:r>
+                        <a:rPr lang="en-US" sz="1200" dirty="0"/>
+                        <a:t>🥉</a:t>
                       </a:r>
                       <a:endParaRPr lang="en-US" sz="1200" dirty="0">
                         <a:latin typeface="Arial" charset="0"/>
@@ -18642,7 +18420,7 @@
                       </a:endParaRPr>
                     </a:p>
                   </a:txBody>
-                  <a:tcPr marL="91440" marR="91440" marT="45720" marB="45720" anchor="ctr">
+                  <a:tcPr anchor="ctr">
                     <a:lnL w="12700" cap="flat" cmpd="sng" algn="ctr">
                       <a:solidFill>
                         <a:srgbClr val="F4EFE6"/>
@@ -18689,7 +18467,7 @@
                     <a:bodyPr/>
                     <a:lstStyle/>
                     <a:p>
-                      <a:pPr algn="ctr" indent="0" marL="0">
+                      <a:pPr marL="0" indent="0" algn="ctr">
                         <a:buNone/>
                       </a:pPr>
                       <a:r>
@@ -18710,7 +18488,7 @@
                       </a:endParaRPr>
                     </a:p>
                   </a:txBody>
-                  <a:tcPr marL="91440" marR="91440" marT="45720" marB="45720" anchor="ctr">
+                  <a:tcPr anchor="ctr">
                     <a:lnL w="12700" cap="flat" cmpd="sng" algn="ctr">
                       <a:solidFill>
                         <a:srgbClr val="F4EFE6"/>
@@ -18757,7 +18535,7 @@
                     <a:bodyPr/>
                     <a:lstStyle/>
                     <a:p>
-                      <a:pPr algn="ctr" indent="0" marL="0">
+                      <a:pPr marL="0" indent="0" algn="ctr">
                         <a:buNone/>
                       </a:pPr>
                       <a:r>
@@ -18778,7 +18556,7 @@
                       </a:endParaRPr>
                     </a:p>
                   </a:txBody>
-                  <a:tcPr marL="91440" marR="91440" marT="45720" marB="45720" anchor="ctr">
+                  <a:tcPr anchor="ctr">
                     <a:lnL w="12700" cap="flat" cmpd="sng" algn="ctr">
                       <a:solidFill>
                         <a:srgbClr val="F4EFE6"/>
@@ -18825,7 +18603,7 @@
                     <a:bodyPr/>
                     <a:lstStyle/>
                     <a:p>
-                      <a:pPr algn="ctr" indent="0" marL="0">
+                      <a:pPr marL="0" indent="0" algn="ctr">
                         <a:buNone/>
                       </a:pPr>
                       <a:r>
@@ -18846,7 +18624,7 @@
                       </a:endParaRPr>
                     </a:p>
                   </a:txBody>
-                  <a:tcPr marL="91440" marR="91440" marT="45720" marB="45720" anchor="ctr">
+                  <a:tcPr anchor="ctr">
                     <a:lnL w="12700" cap="flat" cmpd="sng" algn="ctr">
                       <a:solidFill>
                         <a:srgbClr val="F4EFE6"/>
@@ -18893,7 +18671,7 @@
                     <a:bodyPr/>
                     <a:lstStyle/>
                     <a:p>
-                      <a:pPr algn="ctr" indent="0" marL="0">
+                      <a:pPr marL="0" indent="0" algn="ctr">
                         <a:buNone/>
                       </a:pPr>
                       <a:r>
@@ -18914,7 +18692,7 @@
                       </a:endParaRPr>
                     </a:p>
                   </a:txBody>
-                  <a:tcPr marL="91440" marR="91440" marT="45720" marB="45720" anchor="ctr">
+                  <a:tcPr anchor="ctr">
                     <a:lnL w="12700" cap="flat" cmpd="sng" algn="ctr">
                       <a:solidFill>
                         <a:srgbClr val="F4EFE6"/>
@@ -18961,7 +18739,7 @@
                     <a:bodyPr/>
                     <a:lstStyle/>
                     <a:p>
-                      <a:pPr algn="ctr" indent="0" marL="0">
+                      <a:pPr marL="0" indent="0" algn="ctr">
                         <a:buNone/>
                       </a:pPr>
                       <a:r>
@@ -18982,7 +18760,7 @@
                       </a:endParaRPr>
                     </a:p>
                   </a:txBody>
-                  <a:tcPr marL="91440" marR="91440" marT="45720" marB="45720" anchor="ctr">
+                  <a:tcPr anchor="ctr">
                     <a:lnL w="12700" cap="flat" cmpd="sng" algn="ctr">
                       <a:solidFill>
                         <a:srgbClr val="F4EFE6"/>
@@ -19029,7 +18807,7 @@
                     <a:bodyPr/>
                     <a:lstStyle/>
                     <a:p>
-                      <a:pPr algn="ctr" indent="0" marL="0">
+                      <a:pPr marL="0" indent="0" algn="ctr">
                         <a:buNone/>
                       </a:pPr>
                       <a:r>
@@ -19050,7 +18828,7 @@
                       </a:endParaRPr>
                     </a:p>
                   </a:txBody>
-                  <a:tcPr marL="91440" marR="91440" marT="45720" marB="45720" anchor="ctr">
+                  <a:tcPr anchor="ctr">
                     <a:lnL w="12700" cap="flat" cmpd="sng" algn="ctr">
                       <a:solidFill>
                         <a:srgbClr val="F4EFE6"/>
@@ -19092,6 +18870,11 @@
                     </a:solidFill>
                   </a:tcPr>
                 </a:tc>
+                <a:extLst>
+                  <a:ext uri="{0D108BD9-81ED-4DB2-BD59-A6C34878D82A}">
+                    <a16:rowId xmlns:a16="http://schemas.microsoft.com/office/drawing/2014/main" val="10002"/>
+                  </a:ext>
+                </a:extLst>
               </a:tr>
               <a:tr h="411480">
                 <a:tc>
@@ -19099,7 +18882,7 @@
                     <a:bodyPr/>
                     <a:lstStyle/>
                     <a:p>
-                      <a:pPr algn="ctr" indent="0" marL="0">
+                      <a:pPr marL="0" indent="0" algn="ctr">
                         <a:buNone/>
                       </a:pPr>
                       <a:r>
@@ -19111,7 +18894,11 @@
                           <a:ea typeface="Arial" pitchFamily="34" charset="-122"/>
                           <a:cs typeface="Arial" pitchFamily="34" charset="-120"/>
                         </a:rPr>
-                        <a:t>Decision Tree</a:t>
+                        <a:t>Decision Tree </a:t>
+                      </a:r>
+                      <a:r>
+                        <a:rPr lang="en-US" sz="1200" dirty="0"/>
+                        <a:t>🥈</a:t>
                       </a:r>
                       <a:endParaRPr lang="en-US" sz="1200" dirty="0">
                         <a:latin typeface="Arial" charset="0"/>
@@ -19120,7 +18907,7 @@
                       </a:endParaRPr>
                     </a:p>
                   </a:txBody>
-                  <a:tcPr marL="91440" marR="91440" marT="45720" marB="45720" anchor="ctr">
+                  <a:tcPr anchor="ctr">
                     <a:lnL w="12700" cap="flat" cmpd="sng" algn="ctr">
                       <a:solidFill>
                         <a:srgbClr val="F4EFE6"/>
@@ -19167,7 +18954,7 @@
                     <a:bodyPr/>
                     <a:lstStyle/>
                     <a:p>
-                      <a:pPr algn="ctr" indent="0" marL="0">
+                      <a:pPr marL="0" indent="0" algn="ctr">
                         <a:buNone/>
                       </a:pPr>
                       <a:r>
@@ -19188,7 +18975,7 @@
                       </a:endParaRPr>
                     </a:p>
                   </a:txBody>
-                  <a:tcPr marL="91440" marR="91440" marT="45720" marB="45720" anchor="ctr">
+                  <a:tcPr anchor="ctr">
                     <a:lnL w="12700" cap="flat" cmpd="sng" algn="ctr">
                       <a:solidFill>
                         <a:srgbClr val="F4EFE6"/>
@@ -19235,7 +19022,7 @@
                     <a:bodyPr/>
                     <a:lstStyle/>
                     <a:p>
-                      <a:pPr algn="ctr" indent="0" marL="0">
+                      <a:pPr marL="0" indent="0" algn="ctr">
                         <a:buNone/>
                       </a:pPr>
                       <a:r>
@@ -19256,7 +19043,7 @@
                       </a:endParaRPr>
                     </a:p>
                   </a:txBody>
-                  <a:tcPr marL="91440" marR="91440" marT="45720" marB="45720" anchor="ctr">
+                  <a:tcPr anchor="ctr">
                     <a:lnL w="12700" cap="flat" cmpd="sng" algn="ctr">
                       <a:solidFill>
                         <a:srgbClr val="F4EFE6"/>
@@ -19303,7 +19090,7 @@
                     <a:bodyPr/>
                     <a:lstStyle/>
                     <a:p>
-                      <a:pPr algn="ctr" indent="0" marL="0">
+                      <a:pPr marL="0" indent="0" algn="ctr">
                         <a:buNone/>
                       </a:pPr>
                       <a:r>
@@ -19324,7 +19111,7 @@
                       </a:endParaRPr>
                     </a:p>
                   </a:txBody>
-                  <a:tcPr marL="91440" marR="91440" marT="45720" marB="45720" anchor="ctr">
+                  <a:tcPr anchor="ctr">
                     <a:lnL w="12700" cap="flat" cmpd="sng" algn="ctr">
                       <a:solidFill>
                         <a:srgbClr val="F4EFE6"/>
@@ -19371,7 +19158,7 @@
                     <a:bodyPr/>
                     <a:lstStyle/>
                     <a:p>
-                      <a:pPr algn="ctr" indent="0" marL="0">
+                      <a:pPr marL="0" indent="0" algn="ctr">
                         <a:buNone/>
                       </a:pPr>
                       <a:r>
@@ -19392,7 +19179,7 @@
                       </a:endParaRPr>
                     </a:p>
                   </a:txBody>
-                  <a:tcPr marL="91440" marR="91440" marT="45720" marB="45720" anchor="ctr">
+                  <a:tcPr anchor="ctr">
                     <a:lnL w="12700" cap="flat" cmpd="sng" algn="ctr">
                       <a:solidFill>
                         <a:srgbClr val="F4EFE6"/>
@@ -19439,7 +19226,7 @@
                     <a:bodyPr/>
                     <a:lstStyle/>
                     <a:p>
-                      <a:pPr algn="ctr" indent="0" marL="0">
+                      <a:pPr marL="0" indent="0" algn="ctr">
                         <a:buNone/>
                       </a:pPr>
                       <a:r>
@@ -19460,7 +19247,7 @@
                       </a:endParaRPr>
                     </a:p>
                   </a:txBody>
-                  <a:tcPr marL="91440" marR="91440" marT="45720" marB="45720" anchor="ctr">
+                  <a:tcPr anchor="ctr">
                     <a:lnL w="12700" cap="flat" cmpd="sng" algn="ctr">
                       <a:solidFill>
                         <a:srgbClr val="F4EFE6"/>
@@ -19507,7 +19294,7 @@
                     <a:bodyPr/>
                     <a:lstStyle/>
                     <a:p>
-                      <a:pPr algn="ctr" indent="0" marL="0">
+                      <a:pPr marL="0" indent="0" algn="ctr">
                         <a:buNone/>
                       </a:pPr>
                       <a:r>
@@ -19528,7 +19315,7 @@
                       </a:endParaRPr>
                     </a:p>
                   </a:txBody>
-                  <a:tcPr marL="91440" marR="91440" marT="45720" marB="45720" anchor="ctr">
+                  <a:tcPr anchor="ctr">
                     <a:lnL w="12700" cap="flat" cmpd="sng" algn="ctr">
                       <a:solidFill>
                         <a:srgbClr val="F4EFE6"/>
@@ -19570,6 +19357,11 @@
                     </a:solidFill>
                   </a:tcPr>
                 </a:tc>
+                <a:extLst>
+                  <a:ext uri="{0D108BD9-81ED-4DB2-BD59-A6C34878D82A}">
+                    <a16:rowId xmlns:a16="http://schemas.microsoft.com/office/drawing/2014/main" val="10003"/>
+                  </a:ext>
+                </a:extLst>
               </a:tr>
               <a:tr h="411480">
                 <a:tc>
@@ -19577,7 +19369,7 @@
                     <a:bodyPr/>
                     <a:lstStyle/>
                     <a:p>
-                      <a:pPr algn="ctr" indent="0" marL="0">
+                      <a:pPr marL="0" indent="0" algn="ctr">
                         <a:buNone/>
                       </a:pPr>
                       <a:r>
@@ -19589,7 +19381,11 @@
                           <a:ea typeface="Arial" pitchFamily="34" charset="-122"/>
                           <a:cs typeface="Arial" pitchFamily="34" charset="-120"/>
                         </a:rPr>
-                        <a:t>Random Forest ★</a:t>
+                        <a:t>Random Forest ★ </a:t>
+                      </a:r>
+                      <a:r>
+                        <a:rPr lang="en-US" sz="1200" dirty="0"/>
+                        <a:t>🏆</a:t>
                       </a:r>
                       <a:endParaRPr lang="en-US" sz="1200" dirty="0">
                         <a:latin typeface="Arial" charset="0"/>
@@ -19598,7 +19394,7 @@
                       </a:endParaRPr>
                     </a:p>
                   </a:txBody>
-                  <a:tcPr marL="91440" marR="91440" marT="45720" marB="45720" anchor="ctr">
+                  <a:tcPr anchor="ctr">
                     <a:lnL w="12700" cap="flat" cmpd="sng" algn="ctr">
                       <a:solidFill>
                         <a:srgbClr val="F4EFE6"/>
@@ -19645,7 +19441,7 @@
                     <a:bodyPr/>
                     <a:lstStyle/>
                     <a:p>
-                      <a:pPr algn="ctr" indent="0" marL="0">
+                      <a:pPr marL="0" indent="0" algn="ctr">
                         <a:buNone/>
                       </a:pPr>
                       <a:r>
@@ -19666,7 +19462,7 @@
                       </a:endParaRPr>
                     </a:p>
                   </a:txBody>
-                  <a:tcPr marL="91440" marR="91440" marT="45720" marB="45720" anchor="ctr">
+                  <a:tcPr anchor="ctr">
                     <a:lnL w="12700" cap="flat" cmpd="sng" algn="ctr">
                       <a:solidFill>
                         <a:srgbClr val="F4EFE6"/>
@@ -19713,7 +19509,7 @@
                     <a:bodyPr/>
                     <a:lstStyle/>
                     <a:p>
-                      <a:pPr algn="ctr" indent="0" marL="0">
+                      <a:pPr marL="0" indent="0" algn="ctr">
                         <a:buNone/>
                       </a:pPr>
                       <a:r>
@@ -19734,7 +19530,7 @@
                       </a:endParaRPr>
                     </a:p>
                   </a:txBody>
-                  <a:tcPr marL="91440" marR="91440" marT="45720" marB="45720" anchor="ctr">
+                  <a:tcPr anchor="ctr">
                     <a:lnL w="12700" cap="flat" cmpd="sng" algn="ctr">
                       <a:solidFill>
                         <a:srgbClr val="F4EFE6"/>
@@ -19781,7 +19577,7 @@
                     <a:bodyPr/>
                     <a:lstStyle/>
                     <a:p>
-                      <a:pPr algn="ctr" indent="0" marL="0">
+                      <a:pPr marL="0" indent="0" algn="ctr">
                         <a:buNone/>
                       </a:pPr>
                       <a:r>
@@ -19802,7 +19598,7 @@
                       </a:endParaRPr>
                     </a:p>
                   </a:txBody>
-                  <a:tcPr marL="91440" marR="91440" marT="45720" marB="45720" anchor="ctr">
+                  <a:tcPr anchor="ctr">
                     <a:lnL w="12700" cap="flat" cmpd="sng" algn="ctr">
                       <a:solidFill>
                         <a:srgbClr val="F4EFE6"/>
@@ -19849,7 +19645,7 @@
                     <a:bodyPr/>
                     <a:lstStyle/>
                     <a:p>
-                      <a:pPr algn="ctr" indent="0" marL="0">
+                      <a:pPr marL="0" indent="0" algn="ctr">
                         <a:buNone/>
                       </a:pPr>
                       <a:r>
@@ -19870,7 +19666,7 @@
                       </a:endParaRPr>
                     </a:p>
                   </a:txBody>
-                  <a:tcPr marL="91440" marR="91440" marT="45720" marB="45720" anchor="ctr">
+                  <a:tcPr anchor="ctr">
                     <a:lnL w="12700" cap="flat" cmpd="sng" algn="ctr">
                       <a:solidFill>
                         <a:srgbClr val="F4EFE6"/>
@@ -19917,7 +19713,7 @@
                     <a:bodyPr/>
                     <a:lstStyle/>
                     <a:p>
-                      <a:pPr algn="ctr" indent="0" marL="0">
+                      <a:pPr marL="0" indent="0" algn="ctr">
                         <a:buNone/>
                       </a:pPr>
                       <a:r>
@@ -19938,7 +19734,7 @@
                       </a:endParaRPr>
                     </a:p>
                   </a:txBody>
-                  <a:tcPr marL="91440" marR="91440" marT="45720" marB="45720" anchor="ctr">
+                  <a:tcPr anchor="ctr">
                     <a:lnL w="12700" cap="flat" cmpd="sng" algn="ctr">
                       <a:solidFill>
                         <a:srgbClr val="F4EFE6"/>
@@ -19985,7 +19781,7 @@
                     <a:bodyPr/>
                     <a:lstStyle/>
                     <a:p>
-                      <a:pPr algn="ctr" indent="0" marL="0">
+                      <a:pPr marL="0" indent="0" algn="ctr">
                         <a:buNone/>
                       </a:pPr>
                       <a:r>
@@ -20006,7 +19802,7 @@
                       </a:endParaRPr>
                     </a:p>
                   </a:txBody>
-                  <a:tcPr marL="91440" marR="91440" marT="45720" marB="45720" anchor="ctr">
+                  <a:tcPr anchor="ctr">
                     <a:lnL w="12700" cap="flat" cmpd="sng" algn="ctr">
                       <a:solidFill>
                         <a:srgbClr val="F4EFE6"/>
@@ -20048,6 +19844,11 @@
                     </a:solidFill>
                   </a:tcPr>
                 </a:tc>
+                <a:extLst>
+                  <a:ext uri="{0D108BD9-81ED-4DB2-BD59-A6C34878D82A}">
+                    <a16:rowId xmlns:a16="http://schemas.microsoft.com/office/drawing/2014/main" val="10004"/>
+                  </a:ext>
+                </a:extLst>
               </a:tr>
               <a:tr h="411480">
                 <a:tc>
@@ -20055,7 +19856,7 @@
                     <a:bodyPr/>
                     <a:lstStyle/>
                     <a:p>
-                      <a:pPr algn="ctr" indent="0" marL="0">
+                      <a:pPr marL="0" indent="0" algn="ctr">
                         <a:buNone/>
                       </a:pPr>
                       <a:r>
@@ -20067,7 +19868,11 @@
                           <a:ea typeface="Arial" pitchFamily="34" charset="-122"/>
                           <a:cs typeface="Arial" pitchFamily="34" charset="-120"/>
                         </a:rPr>
-                        <a:t>SVR (RBF)</a:t>
+                        <a:t>SVR (RBF) </a:t>
+                      </a:r>
+                      <a:r>
+                        <a:rPr lang="en-US" sz="1200" dirty="0"/>
+                        <a:t>📊</a:t>
                       </a:r>
                       <a:endParaRPr lang="en-US" sz="1200" dirty="0">
                         <a:latin typeface="Arial" charset="0"/>
@@ -20076,7 +19881,7 @@
                       </a:endParaRPr>
                     </a:p>
                   </a:txBody>
-                  <a:tcPr marL="91440" marR="91440" marT="45720" marB="45720" anchor="ctr">
+                  <a:tcPr anchor="ctr">
                     <a:lnL w="12700" cap="flat" cmpd="sng" algn="ctr">
                       <a:solidFill>
                         <a:srgbClr val="F4EFE6"/>
@@ -20123,7 +19928,7 @@
                     <a:bodyPr/>
                     <a:lstStyle/>
                     <a:p>
-                      <a:pPr algn="ctr" indent="0" marL="0">
+                      <a:pPr marL="0" indent="0" algn="ctr">
                         <a:buNone/>
                       </a:pPr>
                       <a:r>
@@ -20144,7 +19949,7 @@
                       </a:endParaRPr>
                     </a:p>
                   </a:txBody>
-                  <a:tcPr marL="91440" marR="91440" marT="45720" marB="45720" anchor="ctr">
+                  <a:tcPr anchor="ctr">
                     <a:lnL w="12700" cap="flat" cmpd="sng" algn="ctr">
                       <a:solidFill>
                         <a:srgbClr val="F4EFE6"/>
@@ -20191,7 +19996,7 @@
                     <a:bodyPr/>
                     <a:lstStyle/>
                     <a:p>
-                      <a:pPr algn="ctr" indent="0" marL="0">
+                      <a:pPr marL="0" indent="0" algn="ctr">
                         <a:buNone/>
                       </a:pPr>
                       <a:r>
@@ -20212,7 +20017,7 @@
                       </a:endParaRPr>
                     </a:p>
                   </a:txBody>
-                  <a:tcPr marL="91440" marR="91440" marT="45720" marB="45720" anchor="ctr">
+                  <a:tcPr anchor="ctr">
                     <a:lnL w="12700" cap="flat" cmpd="sng" algn="ctr">
                       <a:solidFill>
                         <a:srgbClr val="F4EFE6"/>
@@ -20259,7 +20064,7 @@
                     <a:bodyPr/>
                     <a:lstStyle/>
                     <a:p>
-                      <a:pPr algn="ctr" indent="0" marL="0">
+                      <a:pPr marL="0" indent="0" algn="ctr">
                         <a:buNone/>
                       </a:pPr>
                       <a:r>
@@ -20280,7 +20085,7 @@
                       </a:endParaRPr>
                     </a:p>
                   </a:txBody>
-                  <a:tcPr marL="91440" marR="91440" marT="45720" marB="45720" anchor="ctr">
+                  <a:tcPr anchor="ctr">
                     <a:lnL w="12700" cap="flat" cmpd="sng" algn="ctr">
                       <a:solidFill>
                         <a:srgbClr val="F4EFE6"/>
@@ -20327,7 +20132,7 @@
                     <a:bodyPr/>
                     <a:lstStyle/>
                     <a:p>
-                      <a:pPr algn="ctr" indent="0" marL="0">
+                      <a:pPr marL="0" indent="0" algn="ctr">
                         <a:buNone/>
                       </a:pPr>
                       <a:r>
@@ -20348,7 +20153,7 @@
                       </a:endParaRPr>
                     </a:p>
                   </a:txBody>
-                  <a:tcPr marL="91440" marR="91440" marT="45720" marB="45720" anchor="ctr">
+                  <a:tcPr anchor="ctr">
                     <a:lnL w="12700" cap="flat" cmpd="sng" algn="ctr">
                       <a:solidFill>
                         <a:srgbClr val="F4EFE6"/>
@@ -20395,7 +20200,7 @@
                     <a:bodyPr/>
                     <a:lstStyle/>
                     <a:p>
-                      <a:pPr algn="ctr" indent="0" marL="0">
+                      <a:pPr marL="0" indent="0" algn="ctr">
                         <a:buNone/>
                       </a:pPr>
                       <a:r>
@@ -20416,7 +20221,7 @@
                       </a:endParaRPr>
                     </a:p>
                   </a:txBody>
-                  <a:tcPr marL="91440" marR="91440" marT="45720" marB="45720" anchor="ctr">
+                  <a:tcPr anchor="ctr">
                     <a:lnL w="12700" cap="flat" cmpd="sng" algn="ctr">
                       <a:solidFill>
                         <a:srgbClr val="F4EFE6"/>
@@ -20463,7 +20268,7 @@
                     <a:bodyPr/>
                     <a:lstStyle/>
                     <a:p>
-                      <a:pPr algn="ctr" indent="0" marL="0">
+                      <a:pPr marL="0" indent="0" algn="ctr">
                         <a:buNone/>
                       </a:pPr>
                       <a:r>
@@ -20484,7 +20289,7 @@
                       </a:endParaRPr>
                     </a:p>
                   </a:txBody>
-                  <a:tcPr marL="91440" marR="91440" marT="45720" marB="45720" anchor="ctr">
+                  <a:tcPr anchor="ctr">
                     <a:lnL w="12700" cap="flat" cmpd="sng" algn="ctr">
                       <a:solidFill>
                         <a:srgbClr val="F4EFE6"/>
@@ -20526,6 +20331,11 @@
                     </a:solidFill>
                   </a:tcPr>
                 </a:tc>
+                <a:extLst>
+                  <a:ext uri="{0D108BD9-81ED-4DB2-BD59-A6C34878D82A}">
+                    <a16:rowId xmlns:a16="http://schemas.microsoft.com/office/drawing/2014/main" val="10005"/>
+                  </a:ext>
+                </a:extLst>
               </a:tr>
             </a:tbl>
           </a:graphicData>
@@ -20574,7 +20384,7 @@
           <a:bodyPr wrap="square" lIns="0" tIns="0" rIns="0" bIns="0" rtlCol="0" anchor="ctr"/>
           <a:lstStyle/>
           <a:p>
-            <a:pPr indent="0" marL="0">
+            <a:pPr marL="0" indent="0">
               <a:buNone/>
             </a:pPr>
             <a:r>
@@ -20719,7 +20529,7 @@
           <a:bodyPr wrap="square" lIns="0" tIns="0" rIns="0" bIns="0" rtlCol="0" anchor="ctr"/>
           <a:lstStyle/>
           <a:p>
-            <a:pPr indent="0" marL="0">
+            <a:pPr marL="0" indent="0">
               <a:buNone/>
             </a:pPr>
             <a:r>
@@ -20739,7 +20549,7 @@
       </p:sp>
       <p:sp>
         <p:nvSpPr>
-          <p:cNvPr id="10" name="Text 7"/>
+          <p:cNvPr id="5" name="Text 7"/>
           <p:cNvSpPr/>
           <p:nvPr/>
         </p:nvSpPr>
@@ -20758,7 +20568,7 @@
           <a:bodyPr wrap="square" lIns="0" tIns="0" rIns="0" bIns="0" rtlCol="0" anchor="ctr"/>
           <a:lstStyle/>
           <a:p>
-            <a:pPr algn="r" indent="0" marL="0">
+            <a:pPr marL="0" indent="0" algn="r">
               <a:buNone/>
             </a:pPr>
             <a:r>
@@ -21077,4 +20887,299 @@
     </a:ext>
   </a:extLst>
 </a:theme>
+</file>
+
+<file path=ppt/theme/theme2.xml><?xml version="1.0" encoding="utf-8"?>
+<a:theme xmlns:a="http://schemas.openxmlformats.org/drawingml/2006/main" name="Office Theme">
+  <a:themeElements>
+    <a:clrScheme name="Office">
+      <a:dk1>
+        <a:sysClr val="windowText" lastClr="000000"/>
+      </a:dk1>
+      <a:lt1>
+        <a:sysClr val="window" lastClr="FFFFFF"/>
+      </a:lt1>
+      <a:dk2>
+        <a:srgbClr val="44546A"/>
+      </a:dk2>
+      <a:lt2>
+        <a:srgbClr val="E7E6E6"/>
+      </a:lt2>
+      <a:accent1>
+        <a:srgbClr val="4472C4"/>
+      </a:accent1>
+      <a:accent2>
+        <a:srgbClr val="ED7D31"/>
+      </a:accent2>
+      <a:accent3>
+        <a:srgbClr val="A5A5A5"/>
+      </a:accent3>
+      <a:accent4>
+        <a:srgbClr val="FFC000"/>
+      </a:accent4>
+      <a:accent5>
+        <a:srgbClr val="5B9BD5"/>
+      </a:accent5>
+      <a:accent6>
+        <a:srgbClr val="70AD47"/>
+      </a:accent6>
+      <a:hlink>
+        <a:srgbClr val="0563C1"/>
+      </a:hlink>
+      <a:folHlink>
+        <a:srgbClr val="954F72"/>
+      </a:folHlink>
+    </a:clrScheme>
+    <a:fontScheme name="Office">
+      <a:majorFont>
+        <a:latin typeface="Calibri Light" panose="020F0302020204030204"/>
+        <a:ea typeface=""/>
+        <a:cs typeface=""/>
+        <a:font script="Jpan" typeface="游ゴシック Light"/>
+        <a:font script="Hang" typeface="맑은 고딕"/>
+        <a:font script="Hans" typeface="等线 Light"/>
+        <a:font script="Hant" typeface="新細明體"/>
+        <a:font script="Arab" typeface="Times New Roman"/>
+        <a:font script="Hebr" typeface="Times New Roman"/>
+        <a:font script="Thai" typeface="Angsana New"/>
+        <a:font script="Ethi" typeface="Nyala"/>
+        <a:font script="Beng" typeface="Vrinda"/>
+        <a:font script="Gujr" typeface="Shruti"/>
+        <a:font script="Khmr" typeface="MoolBoran"/>
+        <a:font script="Knda" typeface="Tunga"/>
+        <a:font script="Guru" typeface="Raavi"/>
+        <a:font script="Cans" typeface="Euphemia"/>
+        <a:font script="Cher" typeface="Plantagenet Cherokee"/>
+        <a:font script="Yiii" typeface="Microsoft Yi Baiti"/>
+        <a:font script="Tibt" typeface="Microsoft Himalaya"/>
+        <a:font script="Thaa" typeface="MV Boli"/>
+        <a:font script="Deva" typeface="Mangal"/>
+        <a:font script="Telu" typeface="Gautami"/>
+        <a:font script="Taml" typeface="Latha"/>
+        <a:font script="Syrc" typeface="Estrangelo Edessa"/>
+        <a:font script="Orya" typeface="Kalinga"/>
+        <a:font script="Mlym" typeface="Kartika"/>
+        <a:font script="Laoo" typeface="DokChampa"/>
+        <a:font script="Sinh" typeface="Iskoola Pota"/>
+        <a:font script="Mong" typeface="Mongolian Baiti"/>
+        <a:font script="Viet" typeface="Times New Roman"/>
+        <a:font script="Uigh" typeface="Microsoft Uighur"/>
+        <a:font script="Geor" typeface="Sylfaen"/>
+        <a:font script="Armn" typeface="Arial"/>
+        <a:font script="Bugi" typeface="Leelawadee UI"/>
+        <a:font script="Bopo" typeface="Microsoft JhengHei"/>
+        <a:font script="Java" typeface="Javanese Text"/>
+        <a:font script="Lisu" typeface="Segoe UI"/>
+        <a:font script="Mymr" typeface="Myanmar Text"/>
+        <a:font script="Nkoo" typeface="Ebrima"/>
+        <a:font script="Olck" typeface="Nirmala UI"/>
+        <a:font script="Osma" typeface="Ebrima"/>
+        <a:font script="Phag" typeface="Phagspa"/>
+        <a:font script="Syrn" typeface="Estrangelo Edessa"/>
+        <a:font script="Syrj" typeface="Estrangelo Edessa"/>
+        <a:font script="Syre" typeface="Estrangelo Edessa"/>
+        <a:font script="Sora" typeface="Nirmala UI"/>
+        <a:font script="Tale" typeface="Microsoft Tai Le"/>
+        <a:font script="Talu" typeface="Microsoft New Tai Lue"/>
+        <a:font script="Tfng" typeface="Ebrima"/>
+      </a:majorFont>
+      <a:minorFont>
+        <a:latin typeface="Calibri" panose="020F0502020204030204"/>
+        <a:ea typeface=""/>
+        <a:cs typeface=""/>
+        <a:font script="Jpan" typeface="游ゴシック"/>
+        <a:font script="Hang" typeface="맑은 고딕"/>
+        <a:font script="Hans" typeface="等线"/>
+        <a:font script="Hant" typeface="新細明體"/>
+        <a:font script="Arab" typeface="Arial"/>
+        <a:font script="Hebr" typeface="Arial"/>
+        <a:font script="Thai" typeface="Cordia New"/>
+        <a:font script="Ethi" typeface="Nyala"/>
+        <a:font script="Beng" typeface="Vrinda"/>
+        <a:font script="Gujr" typeface="Shruti"/>
+        <a:font script="Khmr" typeface="DaunPenh"/>
+        <a:font script="Knda" typeface="Tunga"/>
+        <a:font script="Guru" typeface="Raavi"/>
+        <a:font script="Cans" typeface="Euphemia"/>
+        <a:font script="Cher" typeface="Plantagenet Cherokee"/>
+        <a:font script="Yiii" typeface="Microsoft Yi Baiti"/>
+        <a:font script="Tibt" typeface="Microsoft Himalaya"/>
+        <a:font script="Thaa" typeface="MV Boli"/>
+        <a:font script="Deva" typeface="Mangal"/>
+        <a:font script="Telu" typeface="Gautami"/>
+        <a:font script="Taml" typeface="Latha"/>
+        <a:font script="Syrc" typeface="Estrangelo Edessa"/>
+        <a:font script="Orya" typeface="Kalinga"/>
+        <a:font script="Mlym" typeface="Kartika"/>
+        <a:font script="Laoo" typeface="DokChampa"/>
+        <a:font script="Sinh" typeface="Iskoola Pota"/>
+        <a:font script="Mong" typeface="Mongolian Baiti"/>
+        <a:font script="Viet" typeface="Arial"/>
+        <a:font script="Uigh" typeface="Microsoft Uighur"/>
+        <a:font script="Geor" typeface="Sylfaen"/>
+        <a:font script="Armn" typeface="Arial"/>
+        <a:font script="Bugi" typeface="Leelawadee UI"/>
+        <a:font script="Bopo" typeface="Microsoft JhengHei"/>
+        <a:font script="Java" typeface="Javanese Text"/>
+        <a:font script="Lisu" typeface="Segoe UI"/>
+        <a:font script="Mymr" typeface="Myanmar Text"/>
+        <a:font script="Nkoo" typeface="Ebrima"/>
+        <a:font script="Olck" typeface="Nirmala UI"/>
+        <a:font script="Osma" typeface="Ebrima"/>
+        <a:font script="Phag" typeface="Phagspa"/>
+        <a:font script="Syrn" typeface="Estrangelo Edessa"/>
+        <a:font script="Syrj" typeface="Estrangelo Edessa"/>
+        <a:font script="Syre" typeface="Estrangelo Edessa"/>
+        <a:font script="Sora" typeface="Nirmala UI"/>
+        <a:font script="Tale" typeface="Microsoft Tai Le"/>
+        <a:font script="Talu" typeface="Microsoft New Tai Lue"/>
+        <a:font script="Tfng" typeface="Ebrima"/>
+      </a:minorFont>
+    </a:fontScheme>
+    <a:fmtScheme name="Office">
+      <a:fillStyleLst>
+        <a:solidFill>
+          <a:schemeClr val="phClr"/>
+        </a:solidFill>
+        <a:gradFill rotWithShape="1">
+          <a:gsLst>
+            <a:gs pos="0">
+              <a:schemeClr val="phClr">
+                <a:lumMod val="110000"/>
+                <a:satMod val="105000"/>
+                <a:tint val="67000"/>
+              </a:schemeClr>
+            </a:gs>
+            <a:gs pos="50000">
+              <a:schemeClr val="phClr">
+                <a:lumMod val="105000"/>
+                <a:satMod val="103000"/>
+                <a:tint val="73000"/>
+              </a:schemeClr>
+            </a:gs>
+            <a:gs pos="100000">
+              <a:schemeClr val="phClr">
+                <a:lumMod val="105000"/>
+                <a:satMod val="109000"/>
+                <a:tint val="81000"/>
+              </a:schemeClr>
+            </a:gs>
+          </a:gsLst>
+          <a:lin ang="5400000" scaled="0"/>
+        </a:gradFill>
+        <a:gradFill rotWithShape="1">
+          <a:gsLst>
+            <a:gs pos="0">
+              <a:schemeClr val="phClr">
+                <a:satMod val="103000"/>
+                <a:lumMod val="102000"/>
+                <a:tint val="94000"/>
+              </a:schemeClr>
+            </a:gs>
+            <a:gs pos="50000">
+              <a:schemeClr val="phClr">
+                <a:satMod val="110000"/>
+                <a:lumMod val="100000"/>
+                <a:shade val="100000"/>
+              </a:schemeClr>
+            </a:gs>
+            <a:gs pos="100000">
+              <a:schemeClr val="phClr">
+                <a:lumMod val="99000"/>
+                <a:satMod val="120000"/>
+                <a:shade val="78000"/>
+              </a:schemeClr>
+            </a:gs>
+          </a:gsLst>
+          <a:lin ang="5400000" scaled="0"/>
+        </a:gradFill>
+      </a:fillStyleLst>
+      <a:lnStyleLst>
+        <a:ln w="6350" cap="flat" cmpd="sng" algn="ctr">
+          <a:solidFill>
+            <a:schemeClr val="phClr"/>
+          </a:solidFill>
+          <a:prstDash val="solid"/>
+          <a:miter lim="800000"/>
+        </a:ln>
+        <a:ln w="12700" cap="flat" cmpd="sng" algn="ctr">
+          <a:solidFill>
+            <a:schemeClr val="phClr"/>
+          </a:solidFill>
+          <a:prstDash val="solid"/>
+          <a:miter lim="800000"/>
+        </a:ln>
+        <a:ln w="19050" cap="flat" cmpd="sng" algn="ctr">
+          <a:solidFill>
+            <a:schemeClr val="phClr"/>
+          </a:solidFill>
+          <a:prstDash val="solid"/>
+          <a:miter lim="800000"/>
+        </a:ln>
+      </a:lnStyleLst>
+      <a:effectStyleLst>
+        <a:effectStyle>
+          <a:effectLst/>
+        </a:effectStyle>
+        <a:effectStyle>
+          <a:effectLst/>
+        </a:effectStyle>
+        <a:effectStyle>
+          <a:effectLst>
+            <a:outerShdw blurRad="57150" dist="19050" dir="5400000" algn="ctr" rotWithShape="0">
+              <a:srgbClr val="000000">
+                <a:alpha val="63000"/>
+              </a:srgbClr>
+            </a:outerShdw>
+          </a:effectLst>
+        </a:effectStyle>
+      </a:effectStyleLst>
+      <a:bgFillStyleLst>
+        <a:solidFill>
+          <a:schemeClr val="phClr"/>
+        </a:solidFill>
+        <a:solidFill>
+          <a:schemeClr val="phClr">
+            <a:tint val="95000"/>
+            <a:satMod val="170000"/>
+          </a:schemeClr>
+        </a:solidFill>
+        <a:gradFill rotWithShape="1">
+          <a:gsLst>
+            <a:gs pos="0">
+              <a:schemeClr val="phClr">
+                <a:tint val="93000"/>
+                <a:satMod val="150000"/>
+                <a:shade val="98000"/>
+                <a:lumMod val="102000"/>
+              </a:schemeClr>
+            </a:gs>
+            <a:gs pos="50000">
+              <a:schemeClr val="phClr">
+                <a:tint val="98000"/>
+                <a:satMod val="130000"/>
+                <a:shade val="90000"/>
+                <a:lumMod val="103000"/>
+              </a:schemeClr>
+            </a:gs>
+            <a:gs pos="100000">
+              <a:schemeClr val="phClr">
+                <a:shade val="63000"/>
+                <a:satMod val="120000"/>
+              </a:schemeClr>
+            </a:gs>
+          </a:gsLst>
+          <a:lin ang="5400000" scaled="0"/>
+        </a:gradFill>
+      </a:bgFillStyleLst>
+    </a:fmtScheme>
+  </a:themeElements>
+  <a:objectDefaults/>
+  <a:extraClrSchemeLst/>
+  <a:extLst>
+    <a:ext uri="{05A4C25C-085E-4340-85A3-A5531E510DB2}">
+      <thm15:themeFamily xmlns:thm15="http://schemas.microsoft.com/office/thememl/2012/main" name="Office Theme" id="{62F939B6-93AF-4DB8-9C6B-D6C7DFDC589F}" vid="{4A3C46E8-61CC-4603-A589-7422A47A8E4A}"/>
+    </a:ext>
+  </a:extLst>
+</a:theme>
 </file>
--- a/docs/slide.pptx
+++ b/docs/slide.pptx
@@ -5,7 +5,7 @@
     <p:sldMasterId id="2147483648" r:id="rId1"/>
   </p:sldMasterIdLst>
   <p:notesMasterIdLst>
-    <p:notesMasterId r:id="rId19"/>
+    <p:notesMasterId r:id="rId20"/>
   </p:notesMasterIdLst>
   <p:sldIdLst>
     <p:sldId id="256" r:id="rId2"/>
@@ -23,8 +23,9 @@
     <p:sldId id="268" r:id="rId14"/>
     <p:sldId id="269" r:id="rId15"/>
     <p:sldId id="270" r:id="rId16"/>
-    <p:sldId id="271" r:id="rId17"/>
-    <p:sldId id="272" r:id="rId18"/>
+    <p:sldId id="273" r:id="rId17"/>
+    <p:sldId id="271" r:id="rId18"/>
+    <p:sldId id="272" r:id="rId19"/>
   </p:sldIdLst>
   <p:sldSz cx="12192000" cy="6858000"/>
   <p:notesSz cx="6858000" cy="12192000"/>
@@ -906,7 +907,7 @@
           <a:p>
             <a:fld id="{F7021451-1387-4CA6-816F-3879F97B5CBC}" type="slidenum">
               <a:rPr lang="en-US"/>
-              <a:t>16</a:t>
+              <a:t>17</a:t>
             </a:fld>
             <a:endParaRPr lang="en-US"/>
           </a:p>
@@ -990,7 +991,7 @@
           <a:p>
             <a:fld id="{F7021451-1387-4CA6-816F-3879F97B5CBC}" type="slidenum">
               <a:rPr lang="en-US"/>
-              <a:t>17</a:t>
+              <a:t>18</a:t>
             </a:fld>
             <a:endParaRPr lang="en-US"/>
           </a:p>
@@ -7643,6 +7644,66 @@
 
 <file path=ppt/slides/slide16.xml><?xml version="1.0" encoding="utf-8"?>
 <p:sld xmlns:a="http://schemas.openxmlformats.org/drawingml/2006/main" xmlns:r="http://schemas.openxmlformats.org/officeDocument/2006/relationships" xmlns:p="http://schemas.openxmlformats.org/presentationml/2006/main">
+  <p:cSld>
+    <p:spTree>
+      <p:nvGrpSpPr>
+        <p:cNvPr id="1" name=""/>
+        <p:cNvGrpSpPr/>
+        <p:nvPr/>
+      </p:nvGrpSpPr>
+      <p:grpSpPr>
+        <a:xfrm>
+          <a:off x="0" y="0"/>
+          <a:ext cx="0" cy="0"/>
+          <a:chOff x="0" y="0"/>
+          <a:chExt cx="0" cy="0"/>
+        </a:xfrm>
+      </p:grpSpPr>
+      <p:pic>
+        <p:nvPicPr>
+          <p:cNvPr id="3" name="Picture 2">
+            <a:extLst>
+              <a:ext uri="{FF2B5EF4-FFF2-40B4-BE49-F238E27FC236}">
+                <a16:creationId xmlns:a16="http://schemas.microsoft.com/office/drawing/2014/main" id="{3D8F7E30-E014-47A3-91F8-69150E24895C}"/>
+              </a:ext>
+            </a:extLst>
+          </p:cNvPr>
+          <p:cNvPicPr>
+            <a:picLocks noChangeAspect="1"/>
+          </p:cNvPicPr>
+          <p:nvPr/>
+        </p:nvPicPr>
+        <p:blipFill>
+          <a:blip r:embed="rId2"/>
+          <a:stretch>
+            <a:fillRect/>
+          </a:stretch>
+        </p:blipFill>
+        <p:spPr>
+          <a:xfrm>
+            <a:off x="-1" y="0"/>
+            <a:ext cx="12296025" cy="6929718"/>
+          </a:xfrm>
+          <a:prstGeom prst="rect">
+            <a:avLst/>
+          </a:prstGeom>
+        </p:spPr>
+      </p:pic>
+    </p:spTree>
+    <p:extLst>
+      <p:ext uri="{BB962C8B-B14F-4D97-AF65-F5344CB8AC3E}">
+        <p14:creationId xmlns:p14="http://schemas.microsoft.com/office/powerpoint/2010/main" val="1890813773"/>
+      </p:ext>
+    </p:extLst>
+  </p:cSld>
+  <p:clrMapOvr>
+    <a:masterClrMapping/>
+  </p:clrMapOvr>
+</p:sld>
+</file>
+
+<file path=ppt/slides/slide17.xml><?xml version="1.0" encoding="utf-8"?>
+<p:sld xmlns:a="http://schemas.openxmlformats.org/drawingml/2006/main" xmlns:r="http://schemas.openxmlformats.org/officeDocument/2006/relationships" xmlns:p="http://schemas.openxmlformats.org/presentationml/2006/main">
   <p:cSld name="Slide 16">
     <p:spTree>
       <p:nvGrpSpPr>
@@ -8651,7 +8712,7 @@
 </p:sld>
 </file>
 
-<file path=ppt/slides/slide17.xml><?xml version="1.0" encoding="utf-8"?>
+<file path=ppt/slides/slide18.xml><?xml version="1.0" encoding="utf-8"?>
 <p:sld xmlns:a="http://schemas.openxmlformats.org/drawingml/2006/main" xmlns:r="http://schemas.openxmlformats.org/officeDocument/2006/relationships" xmlns:p="http://schemas.openxmlformats.org/presentationml/2006/main">
   <p:cSld name="Slide 17">
     <p:spTree>
